--- a/docs/showcase/software-earnings.pptx
+++ b/docs/showcase/software-earnings.pptx
@@ -162,6 +162,85 @@
               </a:solidFill>
             </c:spPr>
           </c:dPt>
+          <c:dLbls>
+            <c:dLbl>
+              <c:idx val="7"/>
+              <c:delete val="1"/>
+            </c:dLbl>
+            <c:dLbl>
+              <c:idx val="6"/>
+              <c:delete val="1"/>
+            </c:dLbl>
+            <c:dLbl>
+              <c:idx val="5"/>
+              <c:delete val="1"/>
+            </c:dLbl>
+            <c:dLbl>
+              <c:idx val="4"/>
+              <c:delete val="1"/>
+            </c:dLbl>
+            <c:dLbl>
+              <c:idx val="3"/>
+              <c:delete val="1"/>
+            </c:dLbl>
+            <c:dLbl>
+              <c:idx val="2"/>
+              <c:delete val="1"/>
+            </c:dLbl>
+            <c:dLbl>
+              <c:idx val="1"/>
+              <c:delete val="1"/>
+            </c:dLbl>
+            <c:dLbl>
+              <c:idx val="8"/>
+              <c:numFmt formatCode="0.0" sourceLinked="0"/>
+              <c:spPr/>
+              <c:txPr>
+                <a:bodyPr/>
+                <a:lstStyle/>
+                <a:p>
+                  <a:pPr>
+                    <a:defRPr sz="800" b="1" i="0">
+                      <a:solidFill>
+                        <a:srgbClr val="2E3A9E"/>
+                      </a:solidFill>
+                      <a:latin typeface="Arial"/>
+                    </a:defRPr>
+                  </a:pPr>
+                </a:p>
+              </c:txPr>
+              <c:dLblPos val="outEnd"/>
+              <c:showLegendKey val="0"/>
+              <c:showVal val="1"/>
+              <c:showCatName val="0"/>
+              <c:showSerName val="0"/>
+              <c:showPercent val="0"/>
+              <c:showBubbleSize val="0"/>
+            </c:dLbl>
+            <c:numFmt formatCode="0.0" sourceLinked="0"/>
+            <c:txPr>
+              <a:bodyPr/>
+              <a:lstStyle/>
+              <a:p>
+                <a:pPr>
+                  <a:defRPr sz="800" b="1" i="0">
+                    <a:solidFill>
+                      <a:srgbClr val="16181D"/>
+                    </a:solidFill>
+                    <a:latin typeface="Arial"/>
+                  </a:defRPr>
+                </a:pPr>
+              </a:p>
+            </c:txPr>
+            <c:dLblPos val="outEnd"/>
+            <c:showLegendKey val="0"/>
+            <c:showVal val="1"/>
+            <c:showCatName val="0"/>
+            <c:showSerName val="0"/>
+            <c:showPercent val="0"/>
+            <c:showBubbleSize val="0"/>
+            <c:showLeaderLines val="1"/>
+          </c:dLbls>
           <c:cat>
             <c:strRef>
               <c:f>Sheet1!$A$2:$A$10</c:f>
@@ -263,7 +342,7 @@
       <c:valAx>
         <c:axId val="-2113994440"/>
         <c:scaling>
-          <c:max val="376.1"/>
+          <c:max val="422.7"/>
           <c:min val="0.0"/>
         </c:scaling>
         <c:delete/>
@@ -290,7 +369,7 @@
           <a:solidFill>
             <a:srgbClr val="596070"/>
           </a:solidFill>
-          <a:latin typeface="Inter"/>
+          <a:latin typeface="Arial"/>
         </a:defRPr>
       </a:pPr>
       <a:endParaRPr lang="en-US"/>
@@ -365,7 +444,7 @@
                         <a:solidFill>
                           <a:srgbClr val="596070"/>
                         </a:solidFill>
-                        <a:latin typeface="Inter"/>
+                        <a:latin typeface="Arial"/>
                       </a:rPr>
                       <a:t>FY2021 2.05x</a:t>
                     </a:r>
@@ -381,7 +460,7 @@
                       <a:solidFill>
                         <a:srgbClr val="596070"/>
                       </a:solidFill>
-                      <a:latin typeface="Inter"/>
+                      <a:latin typeface="Arial"/>
                     </a:defRPr>
                   </a:pPr>
                 </a:p>
@@ -494,7 +573,7 @@
                         <a:solidFill>
                           <a:srgbClr val="596070"/>
                         </a:solidFill>
-                        <a:latin typeface="Inter"/>
+                        <a:latin typeface="Arial"/>
                       </a:rPr>
                       <a:t>FY2022 1.82x</a:t>
                     </a:r>
@@ -510,7 +589,7 @@
                       <a:solidFill>
                         <a:srgbClr val="596070"/>
                       </a:solidFill>
-                      <a:latin typeface="Inter"/>
+                      <a:latin typeface="Arial"/>
                     </a:defRPr>
                   </a:pPr>
                 </a:p>
@@ -620,7 +699,7 @@
                         <a:solidFill>
                           <a:srgbClr val="596070"/>
                         </a:solidFill>
-                        <a:latin typeface="Inter"/>
+                        <a:latin typeface="Arial"/>
                       </a:rPr>
                       <a:t>FY2023 1.71x</a:t>
                     </a:r>
@@ -636,7 +715,7 @@
                       <a:solidFill>
                         <a:srgbClr val="596070"/>
                       </a:solidFill>
-                      <a:latin typeface="Inter"/>
+                      <a:latin typeface="Arial"/>
                     </a:defRPr>
                   </a:pPr>
                 </a:p>
@@ -743,7 +822,7 @@
                         <a:solidFill>
                           <a:srgbClr val="2E3A9E"/>
                         </a:solidFill>
-                        <a:latin typeface="Inter"/>
+                        <a:latin typeface="Arial"/>
                       </a:rPr>
                       <a:t>FY2024 1.47x</a:t>
                     </a:r>
@@ -759,7 +838,7 @@
                       <a:solidFill>
                         <a:srgbClr val="2E3A9E"/>
                       </a:solidFill>
-                      <a:latin typeface="Inter"/>
+                      <a:latin typeface="Arial"/>
                     </a:defRPr>
                   </a:pPr>
                 </a:p>
@@ -849,7 +928,7 @@
                 <a:solidFill>
                   <a:srgbClr val="596070"/>
                 </a:solidFill>
-                <a:latin typeface="Inter"/>
+                <a:latin typeface="Arial"/>
               </a:defRPr>
             </a:pPr>
           </a:p>
@@ -896,7 +975,7 @@
                 <a:solidFill>
                   <a:srgbClr val="596070"/>
                 </a:solidFill>
-                <a:latin typeface="Inter"/>
+                <a:latin typeface="Arial"/>
               </a:defRPr>
             </a:pPr>
           </a:p>
@@ -923,7 +1002,7 @@
           <a:solidFill>
             <a:srgbClr val="596070"/>
           </a:solidFill>
-          <a:latin typeface="Inter"/>
+          <a:latin typeface="Arial"/>
         </a:defRPr>
       </a:pPr>
       <a:endParaRPr lang="en-US"/>
@@ -1155,7 +1234,7 @@
                         <a:solidFill>
                           <a:srgbClr val="16181D"/>
                         </a:solidFill>
-                        <a:latin typeface="Inter"/>
+                        <a:latin typeface="Arial"/>
                       </a:rPr>
                       <a:t>11.2%</a:t>
                     </a:r>
@@ -1171,7 +1250,7 @@
                       <a:solidFill>
                         <a:srgbClr val="16181D"/>
                       </a:solidFill>
-                      <a:latin typeface="Inter"/>
+                      <a:latin typeface="Arial"/>
                     </a:defRPr>
                   </a:pPr>
                 </a:p>
@@ -1196,7 +1275,7 @@
                         <a:solidFill>
                           <a:srgbClr val="16181D"/>
                         </a:solidFill>
-                        <a:latin typeface="Inter"/>
+                        <a:latin typeface="Arial"/>
                       </a:rPr>
                       <a:t>+0.8</a:t>
                     </a:r>
@@ -1212,7 +1291,7 @@
                       <a:solidFill>
                         <a:srgbClr val="16181D"/>
                       </a:solidFill>
-                      <a:latin typeface="Inter"/>
+                      <a:latin typeface="Arial"/>
                     </a:defRPr>
                   </a:pPr>
                 </a:p>
@@ -1237,7 +1316,7 @@
                         <a:solidFill>
                           <a:srgbClr val="16181D"/>
                         </a:solidFill>
-                        <a:latin typeface="Inter"/>
+                        <a:latin typeface="Arial"/>
                       </a:rPr>
                       <a:t>+3.1</a:t>
                     </a:r>
@@ -1248,7 +1327,7 @@
                         <a:solidFill>
                           <a:srgbClr val="16181D"/>
                         </a:solidFill>
-                        <a:latin typeface="Inter"/>
+                        <a:latin typeface="Arial"/>
                       </a:rPr>
                       <a:t>57% of gain</a:t>
                     </a:r>
@@ -1264,7 +1343,7 @@
                       <a:solidFill>
                         <a:srgbClr val="16181D"/>
                       </a:solidFill>
-                      <a:latin typeface="Inter"/>
+                      <a:latin typeface="Arial"/>
                     </a:defRPr>
                   </a:pPr>
                 </a:p>
@@ -1289,7 +1368,7 @@
                         <a:solidFill>
                           <a:srgbClr val="16181D"/>
                         </a:solidFill>
-                        <a:latin typeface="Inter"/>
+                        <a:latin typeface="Arial"/>
                       </a:rPr>
                       <a:t>+0.9</a:t>
                     </a:r>
@@ -1305,7 +1384,7 @@
                       <a:solidFill>
                         <a:srgbClr val="16181D"/>
                       </a:solidFill>
-                      <a:latin typeface="Inter"/>
+                      <a:latin typeface="Arial"/>
                     </a:defRPr>
                   </a:pPr>
                 </a:p>
@@ -1330,7 +1409,7 @@
                         <a:solidFill>
                           <a:srgbClr val="16181D"/>
                         </a:solidFill>
-                        <a:latin typeface="Inter"/>
+                        <a:latin typeface="Arial"/>
                       </a:rPr>
                       <a:t>+0.6</a:t>
                     </a:r>
@@ -1346,7 +1425,7 @@
                       <a:solidFill>
                         <a:srgbClr val="16181D"/>
                       </a:solidFill>
-                      <a:latin typeface="Inter"/>
+                      <a:latin typeface="Arial"/>
                     </a:defRPr>
                   </a:pPr>
                 </a:p>
@@ -1371,7 +1450,7 @@
                         <a:solidFill>
                           <a:srgbClr val="16181D"/>
                         </a:solidFill>
-                        <a:latin typeface="Inter"/>
+                        <a:latin typeface="Arial"/>
                       </a:rPr>
                       <a:t>16.6%</a:t>
                     </a:r>
@@ -1387,7 +1466,7 @@
                       <a:solidFill>
                         <a:srgbClr val="16181D"/>
                       </a:solidFill>
-                      <a:latin typeface="Inter"/>
+                      <a:latin typeface="Arial"/>
                     </a:defRPr>
                   </a:pPr>
                 </a:p>
@@ -1409,7 +1488,7 @@
                     <a:solidFill>
                       <a:srgbClr val="16181D"/>
                     </a:solidFill>
-                    <a:latin typeface="Inter"/>
+                    <a:latin typeface="Arial"/>
                   </a:defRPr>
                 </a:pPr>
               </a:p>
@@ -1506,7 +1585,7 @@
                 <a:solidFill>
                   <a:srgbClr val="596070"/>
                 </a:solidFill>
-                <a:latin typeface="Inter"/>
+                <a:latin typeface="Arial"/>
               </a:defRPr>
             </a:pPr>
           </a:p>
@@ -1548,7 +1627,7 @@
           <a:solidFill>
             <a:srgbClr val="596070"/>
           </a:solidFill>
-          <a:latin typeface="Inter"/>
+          <a:latin typeface="Arial"/>
         </a:defRPr>
       </a:pPr>
       <a:endParaRPr lang="en-US"/>
@@ -1612,7 +1691,7 @@
                     <a:solidFill>
                       <a:srgbClr val="16181D"/>
                     </a:solidFill>
-                    <a:latin typeface="Inter"/>
+                    <a:latin typeface="Arial"/>
                   </a:defRPr>
                 </a:pPr>
               </a:p>
@@ -1773,7 +1852,7 @@
                         <a:solidFill>
                           <a:srgbClr val="16181D"/>
                         </a:solidFill>
-                        <a:latin typeface="Inter"/>
+                        <a:latin typeface="Arial"/>
                       </a:rPr>
                       <a:t>1,365.0</a:t>
                     </a:r>
@@ -1789,7 +1868,7 @@
                       <a:solidFill>
                         <a:srgbClr val="16181D"/>
                       </a:solidFill>
-                      <a:latin typeface="Inter"/>
+                      <a:latin typeface="Arial"/>
                     </a:defRPr>
                   </a:pPr>
                 </a:p>
@@ -1814,7 +1893,7 @@
                         <a:solidFill>
                           <a:srgbClr val="16181D"/>
                         </a:solidFill>
-                        <a:latin typeface="Inter"/>
+                        <a:latin typeface="Arial"/>
                       </a:rPr>
                       <a:t>1,377.0</a:t>
                     </a:r>
@@ -1830,7 +1909,7 @@
                       <a:solidFill>
                         <a:srgbClr val="16181D"/>
                       </a:solidFill>
-                      <a:latin typeface="Inter"/>
+                      <a:latin typeface="Arial"/>
                     </a:defRPr>
                   </a:pPr>
                 </a:p>
@@ -1855,7 +1934,7 @@
                         <a:solidFill>
                           <a:srgbClr val="16181D"/>
                         </a:solidFill>
-                        <a:latin typeface="Inter"/>
+                        <a:latin typeface="Arial"/>
                       </a:rPr>
                       <a:t>1,389.0</a:t>
                     </a:r>
@@ -1871,7 +1950,7 @@
                       <a:solidFill>
                         <a:srgbClr val="16181D"/>
                       </a:solidFill>
-                      <a:latin typeface="Inter"/>
+                      <a:latin typeface="Arial"/>
                     </a:defRPr>
                   </a:pPr>
                 </a:p>
@@ -1896,7 +1975,7 @@
                         <a:solidFill>
                           <a:srgbClr val="16181D"/>
                         </a:solidFill>
-                        <a:latin typeface="Inter"/>
+                        <a:latin typeface="Arial"/>
                       </a:rPr>
                       <a:t>1,398.4</a:t>
                     </a:r>
@@ -1912,7 +1991,7 @@
                       <a:solidFill>
                         <a:srgbClr val="16181D"/>
                       </a:solidFill>
-                      <a:latin typeface="Inter"/>
+                      <a:latin typeface="Arial"/>
                     </a:defRPr>
                   </a:pPr>
                 </a:p>
@@ -1934,7 +2013,7 @@
                     <a:solidFill>
                       <a:srgbClr val="16181D"/>
                     </a:solidFill>
-                    <a:latin typeface="Inter"/>
+                    <a:latin typeface="Arial"/>
                   </a:defRPr>
                 </a:pPr>
               </a:p>
@@ -2021,7 +2100,7 @@
                 <a:solidFill>
                   <a:srgbClr val="596070"/>
                 </a:solidFill>
-                <a:latin typeface="Inter"/>
+                <a:latin typeface="Arial"/>
               </a:defRPr>
             </a:pPr>
           </a:p>
@@ -2061,7 +2140,7 @@
                 <a:solidFill>
                   <a:srgbClr val="596070"/>
                 </a:solidFill>
-                <a:latin typeface="Inter"/>
+                <a:latin typeface="Arial"/>
               </a:defRPr>
             </a:pPr>
           </a:p>
@@ -2086,7 +2165,7 @@
           <a:solidFill>
             <a:srgbClr val="596070"/>
           </a:solidFill>
-          <a:latin typeface="Inter"/>
+          <a:latin typeface="Arial"/>
         </a:defRPr>
       </a:pPr>
       <a:endParaRPr lang="en-US"/>
@@ -2149,6 +2228,85 @@
               </a:solidFill>
             </c:spPr>
           </c:dPt>
+          <c:dLbls>
+            <c:dLbl>
+              <c:idx val="7"/>
+              <c:delete val="1"/>
+            </c:dLbl>
+            <c:dLbl>
+              <c:idx val="6"/>
+              <c:delete val="1"/>
+            </c:dLbl>
+            <c:dLbl>
+              <c:idx val="5"/>
+              <c:delete val="1"/>
+            </c:dLbl>
+            <c:dLbl>
+              <c:idx val="4"/>
+              <c:delete val="1"/>
+            </c:dLbl>
+            <c:dLbl>
+              <c:idx val="3"/>
+              <c:delete val="1"/>
+            </c:dLbl>
+            <c:dLbl>
+              <c:idx val="2"/>
+              <c:delete val="1"/>
+            </c:dLbl>
+            <c:dLbl>
+              <c:idx val="1"/>
+              <c:delete val="1"/>
+            </c:dLbl>
+            <c:dLbl>
+              <c:idx val="8"/>
+              <c:numFmt formatCode="#,##0" sourceLinked="0"/>
+              <c:spPr/>
+              <c:txPr>
+                <a:bodyPr/>
+                <a:lstStyle/>
+                <a:p>
+                  <a:pPr>
+                    <a:defRPr sz="800" b="1" i="0">
+                      <a:solidFill>
+                        <a:srgbClr val="2E3A9E"/>
+                      </a:solidFill>
+                      <a:latin typeface="Arial"/>
+                    </a:defRPr>
+                  </a:pPr>
+                </a:p>
+              </c:txPr>
+              <c:dLblPos val="outEnd"/>
+              <c:showLegendKey val="0"/>
+              <c:showVal val="1"/>
+              <c:showCatName val="0"/>
+              <c:showSerName val="0"/>
+              <c:showPercent val="0"/>
+              <c:showBubbleSize val="0"/>
+            </c:dLbl>
+            <c:numFmt formatCode="#,##0" sourceLinked="0"/>
+            <c:txPr>
+              <a:bodyPr/>
+              <a:lstStyle/>
+              <a:p>
+                <a:pPr>
+                  <a:defRPr sz="800" b="1" i="0">
+                    <a:solidFill>
+                      <a:srgbClr val="16181D"/>
+                    </a:solidFill>
+                    <a:latin typeface="Arial"/>
+                  </a:defRPr>
+                </a:pPr>
+              </a:p>
+            </c:txPr>
+            <c:dLblPos val="outEnd"/>
+            <c:showLegendKey val="0"/>
+            <c:showVal val="1"/>
+            <c:showCatName val="0"/>
+            <c:showSerName val="0"/>
+            <c:showPercent val="0"/>
+            <c:showBubbleSize val="0"/>
+            <c:showLeaderLines val="1"/>
+          </c:dLbls>
           <c:cat>
             <c:strRef>
               <c:f>Sheet1!$A$2:$A$10</c:f>
@@ -2250,7 +2408,7 @@
       <c:valAx>
         <c:axId val="-2113994440"/>
         <c:scaling>
-          <c:max val="1572.9"/>
+          <c:max val="1767.6"/>
           <c:min val="0.0"/>
         </c:scaling>
         <c:delete/>
@@ -2277,7 +2435,7 @@
           <a:solidFill>
             <a:srgbClr val="596070"/>
           </a:solidFill>
-          <a:latin typeface="Inter"/>
+          <a:latin typeface="Arial"/>
         </a:defRPr>
       </a:pPr>
       <a:endParaRPr lang="en-US"/>
@@ -2340,6 +2498,85 @@
               </a:solidFill>
             </c:spPr>
           </c:dPt>
+          <c:dLbls>
+            <c:dLbl>
+              <c:idx val="7"/>
+              <c:delete val="1"/>
+            </c:dLbl>
+            <c:dLbl>
+              <c:idx val="6"/>
+              <c:delete val="1"/>
+            </c:dLbl>
+            <c:dLbl>
+              <c:idx val="5"/>
+              <c:delete val="1"/>
+            </c:dLbl>
+            <c:dLbl>
+              <c:idx val="4"/>
+              <c:delete val="1"/>
+            </c:dLbl>
+            <c:dLbl>
+              <c:idx val="3"/>
+              <c:delete val="1"/>
+            </c:dLbl>
+            <c:dLbl>
+              <c:idx val="2"/>
+              <c:delete val="1"/>
+            </c:dLbl>
+            <c:dLbl>
+              <c:idx val="1"/>
+              <c:delete val="1"/>
+            </c:dLbl>
+            <c:dLbl>
+              <c:idx val="8"/>
+              <c:numFmt formatCode="0" sourceLinked="0"/>
+              <c:spPr/>
+              <c:txPr>
+                <a:bodyPr/>
+                <a:lstStyle/>
+                <a:p>
+                  <a:pPr>
+                    <a:defRPr sz="800" b="1" i="0">
+                      <a:solidFill>
+                        <a:srgbClr val="2E3A9E"/>
+                      </a:solidFill>
+                      <a:latin typeface="Arial"/>
+                    </a:defRPr>
+                  </a:pPr>
+                </a:p>
+              </c:txPr>
+              <c:dLblPos val="outEnd"/>
+              <c:showLegendKey val="0"/>
+              <c:showVal val="1"/>
+              <c:showCatName val="0"/>
+              <c:showSerName val="0"/>
+              <c:showPercent val="0"/>
+              <c:showBubbleSize val="0"/>
+            </c:dLbl>
+            <c:numFmt formatCode="0" sourceLinked="0"/>
+            <c:txPr>
+              <a:bodyPr/>
+              <a:lstStyle/>
+              <a:p>
+                <a:pPr>
+                  <a:defRPr sz="800" b="1" i="0">
+                    <a:solidFill>
+                      <a:srgbClr val="16181D"/>
+                    </a:solidFill>
+                    <a:latin typeface="Arial"/>
+                  </a:defRPr>
+                </a:pPr>
+              </a:p>
+            </c:txPr>
+            <c:dLblPos val="outEnd"/>
+            <c:showLegendKey val="0"/>
+            <c:showVal val="1"/>
+            <c:showCatName val="0"/>
+            <c:showSerName val="0"/>
+            <c:showPercent val="0"/>
+            <c:showBubbleSize val="0"/>
+            <c:showLeaderLines val="1"/>
+          </c:dLbls>
           <c:cat>
             <c:strRef>
               <c:f>Sheet1!$A$2:$A$10</c:f>
@@ -2441,7 +2678,7 @@
       <c:valAx>
         <c:axId val="-2113994440"/>
         <c:scaling>
-          <c:max val="87.2"/>
+          <c:max val="97.9"/>
           <c:min val="0.0"/>
         </c:scaling>
         <c:delete/>
@@ -2468,7 +2705,7 @@
           <a:solidFill>
             <a:srgbClr val="596070"/>
           </a:solidFill>
-          <a:latin typeface="Inter"/>
+          <a:latin typeface="Arial"/>
         </a:defRPr>
       </a:pPr>
       <a:endParaRPr lang="en-US"/>
@@ -2524,6 +2761,55 @@
           <c:marker>
             <c:symbol val="none"/>
           </c:marker>
+          <c:dLbls>
+            <c:dLbl>
+              <c:idx val="7"/>
+              <c:delete val="1"/>
+            </c:dLbl>
+            <c:dLbl>
+              <c:idx val="6"/>
+              <c:delete val="1"/>
+            </c:dLbl>
+            <c:dLbl>
+              <c:idx val="5"/>
+              <c:delete val="1"/>
+            </c:dLbl>
+            <c:dLbl>
+              <c:idx val="3"/>
+              <c:delete val="1"/>
+            </c:dLbl>
+            <c:dLbl>
+              <c:idx val="2"/>
+              <c:delete val="1"/>
+            </c:dLbl>
+            <c:dLbl>
+              <c:idx val="1"/>
+              <c:delete val="1"/>
+            </c:dLbl>
+            <c:numFmt formatCode="0" sourceLinked="0"/>
+            <c:txPr>
+              <a:bodyPr/>
+              <a:lstStyle/>
+              <a:p>
+                <a:pPr>
+                  <a:defRPr sz="800" b="1" i="0">
+                    <a:solidFill>
+                      <a:srgbClr val="16181D"/>
+                    </a:solidFill>
+                    <a:latin typeface="Arial"/>
+                  </a:defRPr>
+                </a:pPr>
+              </a:p>
+            </c:txPr>
+            <c:dLblPos val="t"/>
+            <c:showLegendKey val="0"/>
+            <c:showVal val="1"/>
+            <c:showCatName val="0"/>
+            <c:showSerName val="0"/>
+            <c:showPercent val="0"/>
+            <c:showBubbleSize val="0"/>
+            <c:showLeaderLines val="1"/>
+          </c:dLbls>
           <c:cat>
             <c:strRef>
               <c:f>Sheet1!$A$2:$A$10</c:f>
@@ -2627,8 +2913,8 @@
       <c:valAx>
         <c:axId val="2140495176"/>
         <c:scaling>
-          <c:max val="123.0"/>
-          <c:min val="112.0"/>
+          <c:max val="124.0"/>
+          <c:min val="110.0"/>
         </c:scaling>
         <c:delete/>
         <c:axPos val="l"/>
@@ -2656,7 +2942,7 @@
           <a:solidFill>
             <a:srgbClr val="596070"/>
           </a:solidFill>
-          <a:latin typeface="Inter"/>
+          <a:latin typeface="Arial"/>
         </a:defRPr>
       </a:pPr>
       <a:endParaRPr lang="en-US"/>
@@ -2719,6 +3005,85 @@
               </a:solidFill>
             </c:spPr>
           </c:dPt>
+          <c:dLbls>
+            <c:dLbl>
+              <c:idx val="7"/>
+              <c:delete val="1"/>
+            </c:dLbl>
+            <c:dLbl>
+              <c:idx val="6"/>
+              <c:delete val="1"/>
+            </c:dLbl>
+            <c:dLbl>
+              <c:idx val="5"/>
+              <c:delete val="1"/>
+            </c:dLbl>
+            <c:dLbl>
+              <c:idx val="4"/>
+              <c:delete val="1"/>
+            </c:dLbl>
+            <c:dLbl>
+              <c:idx val="3"/>
+              <c:delete val="1"/>
+            </c:dLbl>
+            <c:dLbl>
+              <c:idx val="2"/>
+              <c:delete val="1"/>
+            </c:dLbl>
+            <c:dLbl>
+              <c:idx val="1"/>
+              <c:delete val="1"/>
+            </c:dLbl>
+            <c:dLbl>
+              <c:idx val="8"/>
+              <c:numFmt formatCode="0.0" sourceLinked="0"/>
+              <c:spPr/>
+              <c:txPr>
+                <a:bodyPr/>
+                <a:lstStyle/>
+                <a:p>
+                  <a:pPr>
+                    <a:defRPr sz="800" b="1" i="0">
+                      <a:solidFill>
+                        <a:srgbClr val="2E3A9E"/>
+                      </a:solidFill>
+                      <a:latin typeface="Arial"/>
+                    </a:defRPr>
+                  </a:pPr>
+                </a:p>
+              </c:txPr>
+              <c:dLblPos val="outEnd"/>
+              <c:showLegendKey val="0"/>
+              <c:showVal val="1"/>
+              <c:showCatName val="0"/>
+              <c:showSerName val="0"/>
+              <c:showPercent val="0"/>
+              <c:showBubbleSize val="0"/>
+            </c:dLbl>
+            <c:numFmt formatCode="0.0" sourceLinked="0"/>
+            <c:txPr>
+              <a:bodyPr/>
+              <a:lstStyle/>
+              <a:p>
+                <a:pPr>
+                  <a:defRPr sz="800" b="1" i="0">
+                    <a:solidFill>
+                      <a:srgbClr val="16181D"/>
+                    </a:solidFill>
+                    <a:latin typeface="Arial"/>
+                  </a:defRPr>
+                </a:pPr>
+              </a:p>
+            </c:txPr>
+            <c:dLblPos val="outEnd"/>
+            <c:showLegendKey val="0"/>
+            <c:showVal val="1"/>
+            <c:showCatName val="0"/>
+            <c:showSerName val="0"/>
+            <c:showPercent val="0"/>
+            <c:showBubbleSize val="0"/>
+            <c:showLeaderLines val="1"/>
+          </c:dLbls>
           <c:cat>
             <c:strRef>
               <c:f>Sheet1!$A$2:$A$10</c:f>
@@ -2820,7 +3185,7 @@
       <c:valAx>
         <c:axId val="-2113994440"/>
         <c:scaling>
-          <c:max val="17.4"/>
+          <c:max val="19.6"/>
           <c:min val="0.0"/>
         </c:scaling>
         <c:delete/>
@@ -2847,7 +3212,7 @@
           <a:solidFill>
             <a:srgbClr val="596070"/>
           </a:solidFill>
-          <a:latin typeface="Inter"/>
+          <a:latin typeface="Arial"/>
         </a:defRPr>
       </a:pPr>
       <a:endParaRPr lang="en-US"/>
@@ -2910,6 +3275,85 @@
               </a:solidFill>
             </c:spPr>
           </c:dPt>
+          <c:dLbls>
+            <c:dLbl>
+              <c:idx val="7"/>
+              <c:delete val="1"/>
+            </c:dLbl>
+            <c:dLbl>
+              <c:idx val="6"/>
+              <c:delete val="1"/>
+            </c:dLbl>
+            <c:dLbl>
+              <c:idx val="5"/>
+              <c:delete val="1"/>
+            </c:dLbl>
+            <c:dLbl>
+              <c:idx val="4"/>
+              <c:delete val="1"/>
+            </c:dLbl>
+            <c:dLbl>
+              <c:idx val="3"/>
+              <c:delete val="1"/>
+            </c:dLbl>
+            <c:dLbl>
+              <c:idx val="2"/>
+              <c:delete val="1"/>
+            </c:dLbl>
+            <c:dLbl>
+              <c:idx val="1"/>
+              <c:delete val="1"/>
+            </c:dLbl>
+            <c:dLbl>
+              <c:idx val="8"/>
+              <c:numFmt formatCode="0.0" sourceLinked="0"/>
+              <c:spPr/>
+              <c:txPr>
+                <a:bodyPr/>
+                <a:lstStyle/>
+                <a:p>
+                  <a:pPr>
+                    <a:defRPr sz="800" b="1" i="0">
+                      <a:solidFill>
+                        <a:srgbClr val="2E3A9E"/>
+                      </a:solidFill>
+                      <a:latin typeface="Arial"/>
+                    </a:defRPr>
+                  </a:pPr>
+                </a:p>
+              </c:txPr>
+              <c:dLblPos val="outEnd"/>
+              <c:showLegendKey val="0"/>
+              <c:showVal val="1"/>
+              <c:showCatName val="0"/>
+              <c:showSerName val="0"/>
+              <c:showPercent val="0"/>
+              <c:showBubbleSize val="0"/>
+            </c:dLbl>
+            <c:numFmt formatCode="0.0" sourceLinked="0"/>
+            <c:txPr>
+              <a:bodyPr/>
+              <a:lstStyle/>
+              <a:p>
+                <a:pPr>
+                  <a:defRPr sz="800" b="1" i="0">
+                    <a:solidFill>
+                      <a:srgbClr val="16181D"/>
+                    </a:solidFill>
+                    <a:latin typeface="Arial"/>
+                  </a:defRPr>
+                </a:pPr>
+              </a:p>
+            </c:txPr>
+            <c:dLblPos val="outEnd"/>
+            <c:showLegendKey val="0"/>
+            <c:showVal val="1"/>
+            <c:showCatName val="0"/>
+            <c:showSerName val="0"/>
+            <c:showPercent val="0"/>
+            <c:showBubbleSize val="0"/>
+            <c:showLeaderLines val="1"/>
+          </c:dLbls>
           <c:cat>
             <c:strRef>
               <c:f>Sheet1!$A$2:$A$10</c:f>
@@ -3011,7 +3455,7 @@
       <c:valAx>
         <c:axId val="-2113994440"/>
         <c:scaling>
-          <c:max val="22.6"/>
+          <c:max val="25.4"/>
           <c:min val="0.0"/>
         </c:scaling>
         <c:delete/>
@@ -3038,7 +3482,7 @@
           <a:solidFill>
             <a:srgbClr val="596070"/>
           </a:solidFill>
-          <a:latin typeface="Inter"/>
+          <a:latin typeface="Arial"/>
         </a:defRPr>
       </a:pPr>
       <a:endParaRPr lang="en-US"/>
@@ -3112,7 +3556,7 @@
                     <a:solidFill>
                       <a:srgbClr val="16181D"/>
                     </a:solidFill>
-                    <a:latin typeface="Inter"/>
+                    <a:latin typeface="Arial"/>
                   </a:defRPr>
                 </a:pPr>
               </a:p>
@@ -3226,7 +3670,7 @@
                 <a:solidFill>
                   <a:srgbClr val="596070"/>
                 </a:solidFill>
-                <a:latin typeface="Inter"/>
+                <a:latin typeface="Arial"/>
               </a:defRPr>
             </a:pPr>
           </a:p>
@@ -3268,7 +3712,7 @@
           <a:solidFill>
             <a:srgbClr val="596070"/>
           </a:solidFill>
-          <a:latin typeface="Inter"/>
+          <a:latin typeface="Arial"/>
         </a:defRPr>
       </a:pPr>
       <a:endParaRPr lang="en-US"/>
@@ -3344,7 +3788,7 @@
                         <a:solidFill>
                           <a:srgbClr val="16181D"/>
                         </a:solidFill>
-                        <a:latin typeface="Inter"/>
+                        <a:latin typeface="Arial"/>
                       </a:rPr>
                       <a:t>83</a:t>
                     </a:r>
@@ -3355,7 +3799,7 @@
                         <a:solidFill>
                           <a:srgbClr val="16181D"/>
                         </a:solidFill>
-                        <a:latin typeface="Inter"/>
+                        <a:latin typeface="Arial"/>
                       </a:rPr>
                       <a:t>record</a:t>
                     </a:r>
@@ -3371,7 +3815,7 @@
                       <a:solidFill>
                         <a:srgbClr val="16181D"/>
                       </a:solidFill>
-                      <a:latin typeface="Inter"/>
+                      <a:latin typeface="Arial"/>
                     </a:defRPr>
                   </a:pPr>
                 </a:p>
@@ -3394,7 +3838,7 @@
                     <a:solidFill>
                       <a:srgbClr val="16181D"/>
                     </a:solidFill>
-                    <a:latin typeface="Inter"/>
+                    <a:latin typeface="Arial"/>
                   </a:defRPr>
                 </a:pPr>
               </a:p>
@@ -3508,7 +3952,7 @@
                 <a:solidFill>
                   <a:srgbClr val="596070"/>
                 </a:solidFill>
-                <a:latin typeface="Inter"/>
+                <a:latin typeface="Arial"/>
               </a:defRPr>
             </a:pPr>
           </a:p>
@@ -3550,7 +3994,7 @@
           <a:solidFill>
             <a:srgbClr val="596070"/>
           </a:solidFill>
-          <a:latin typeface="Inter"/>
+          <a:latin typeface="Arial"/>
         </a:defRPr>
       </a:pPr>
       <a:endParaRPr lang="en-US"/>
@@ -3625,7 +4069,7 @@
                         <a:solidFill>
                           <a:srgbClr val="2E3A9E"/>
                         </a:solidFill>
-                        <a:latin typeface="Inter"/>
+                        <a:latin typeface="Arial"/>
                       </a:rPr>
                       <a:t>116 low</a:t>
                     </a:r>
@@ -3641,7 +4085,7 @@
                       <a:solidFill>
                         <a:srgbClr val="2E3A9E"/>
                       </a:solidFill>
-                      <a:latin typeface="Inter"/>
+                      <a:latin typeface="Arial"/>
                     </a:defRPr>
                   </a:pPr>
                 </a:p>
@@ -3664,7 +4108,7 @@
                     <a:solidFill>
                       <a:srgbClr val="2E3A9E"/>
                     </a:solidFill>
-                    <a:latin typeface="Inter"/>
+                    <a:latin typeface="Arial"/>
                   </a:defRPr>
                 </a:pPr>
               </a:p>
@@ -3780,7 +4224,7 @@
                 <a:solidFill>
                   <a:srgbClr val="596070"/>
                 </a:solidFill>
-                <a:latin typeface="Inter"/>
+                <a:latin typeface="Arial"/>
               </a:defRPr>
             </a:pPr>
           </a:p>
@@ -3824,7 +4268,7 @@
           <a:solidFill>
             <a:srgbClr val="596070"/>
           </a:solidFill>
-          <a:latin typeface="Inter"/>
+          <a:latin typeface="Arial"/>
         </a:defRPr>
       </a:pPr>
       <a:endParaRPr lang="en-US"/>
@@ -7519,7 +7963,7 @@
       <p:grpSpPr/>
       <p:sp>
         <p:nvSpPr>
-          <p:cNvPr id="47" name="chrome-1"/>
+          <p:cNvPr id="50" name="chrome-1"/>
           <p:cNvSpPr txBox="1"/>
           <p:nvPr/>
         </p:nvSpPr>
@@ -7544,7 +7988,7 @@
                 <a:solidFill>
                   <a:srgbClr val="596070"/>
                 </a:solidFill>
-                <a:latin typeface="Inter"/>
+                <a:latin typeface="Arial"/>
               </a:rPr>
               <a:t>Corvane Software (fictional company)  |  Q3 FY2026 earnings  |  Illustrative figures, non-GAAP unless stated</a:t>
             </a:r>
@@ -7553,7 +7997,7 @@
       </p:sp>
       <p:sp>
         <p:nvSpPr>
-          <p:cNvPr id="48" name="chrome-2"/>
+          <p:cNvPr id="51" name="chrome-2"/>
           <p:cNvSpPr txBox="1"/>
           <p:nvPr/>
         </p:nvSpPr>
@@ -7579,7 +8023,7 @@
                 <a:solidFill>
                   <a:srgbClr val="596070"/>
                 </a:solidFill>
-                <a:latin typeface="Inter"/>
+                <a:latin typeface="Arial"/>
               </a:rPr>
               <a:t>1</a:t>
             </a:fld>
@@ -7625,7 +8069,7 @@
                 <a:solidFill>
                   <a:srgbClr val="2E3A9E"/>
                 </a:solidFill>
-                <a:latin typeface="Inter"/>
+                <a:latin typeface="Arial"/>
               </a:rPr>
               <a:t>Q3 FY2026 RESULTS  |  HIGHLIGHTS</a:t>
             </a:r>
@@ -7671,7 +8115,7 @@
                 <a:solidFill>
                   <a:srgbClr val="16181D"/>
                 </a:solidFill>
-                <a:latin typeface="Inter"/>
+                <a:latin typeface="Arial"/>
               </a:rPr>
               <a:t>Revenue grew 21.3% to $358.2M and operating margin widened 5.4 points to 16.6%, both</a:t>
             </a:r>
@@ -7681,7 +8125,7 @@
                 <a:solidFill>
                   <a:srgbClr val="16181D"/>
                 </a:solidFill>
-                <a:latin typeface="Inter"/>
+                <a:latin typeface="Arial"/>
               </a:rPr>
               <a:t>above guidance</a:t>
             </a:r>
@@ -7697,7 +8141,7 @@
         <p:spPr>
           <a:xfrm>
             <a:off x="457200" y="1264920"/>
-            <a:ext cx="1788160" cy="2846324"/>
+            <a:ext cx="1788160" cy="1758188"/>
           </a:xfrm>
           <a:prstGeom prst="rect">
             <a:avLst/>
@@ -7756,7 +8200,7 @@
                 <a:solidFill>
                   <a:srgbClr val="596070"/>
                 </a:solidFill>
-                <a:latin typeface="Inter"/>
+                <a:latin typeface="Arial"/>
               </a:rPr>
               <a:t>Total revenue</a:t>
             </a:r>
@@ -7802,7 +8246,7 @@
                 <a:solidFill>
                   <a:srgbClr val="2E3A9E"/>
                 </a:solidFill>
-                <a:latin typeface="Inter"/>
+                <a:latin typeface="Arial"/>
               </a:rPr>
               <a:t>$358.2M</a:t>
             </a:r>
@@ -7848,7 +8292,7 @@
                 <a:solidFill>
                   <a:srgbClr val="16181D"/>
                 </a:solidFill>
-                <a:latin typeface="Inter"/>
+                <a:latin typeface="Arial"/>
               </a:rPr>
               <a:t>+21.3% year on year</a:t>
             </a:r>
@@ -7865,7 +8309,7 @@
         </p:nvGraphicFramePr>
         <p:xfrm>
           <a:off x="566928" y="1980184"/>
-          <a:ext cx="1568704" cy="2021332"/>
+          <a:ext cx="1568704" cy="933196"/>
         </p:xfrm>
         <a:graphic>
           <a:graphicData uri="http://schemas.openxmlformats.org/drawingml/2006/chart">
@@ -7882,7 +8326,7 @@
         <p:spPr>
           <a:xfrm>
             <a:off x="2355088" y="1264920"/>
-            <a:ext cx="1788160" cy="2846324"/>
+            <a:ext cx="1788160" cy="1758188"/>
           </a:xfrm>
           <a:prstGeom prst="rect">
             <a:avLst/>
@@ -7941,7 +8385,7 @@
                 <a:solidFill>
                   <a:srgbClr val="596070"/>
                 </a:solidFill>
-                <a:latin typeface="Inter"/>
+                <a:latin typeface="Arial"/>
               </a:rPr>
               <a:t>Ending ARR</a:t>
             </a:r>
@@ -7987,7 +8431,7 @@
                 <a:solidFill>
                   <a:srgbClr val="2E3A9E"/>
                 </a:solidFill>
-                <a:latin typeface="Inter"/>
+                <a:latin typeface="Arial"/>
               </a:rPr>
               <a:t>$1,498M</a:t>
             </a:r>
@@ -8033,7 +8477,7 @@
                 <a:solidFill>
                   <a:srgbClr val="16181D"/>
                 </a:solidFill>
-                <a:latin typeface="Inter"/>
+                <a:latin typeface="Arial"/>
               </a:rPr>
               <a:t>+22.2% year on year</a:t>
             </a:r>
@@ -8050,7 +8494,7 @@
         </p:nvGraphicFramePr>
         <p:xfrm>
           <a:off x="2464816" y="1980184"/>
-          <a:ext cx="1568704" cy="2021332"/>
+          <a:ext cx="1568704" cy="933196"/>
         </p:xfrm>
         <a:graphic>
           <a:graphicData uri="http://schemas.openxmlformats.org/drawingml/2006/chart">
@@ -8067,7 +8511,7 @@
         <p:spPr>
           <a:xfrm>
             <a:off x="4252976" y="1264920"/>
-            <a:ext cx="1788160" cy="2846324"/>
+            <a:ext cx="1788160" cy="1758188"/>
           </a:xfrm>
           <a:prstGeom prst="rect">
             <a:avLst/>
@@ -8126,7 +8570,7 @@
                 <a:solidFill>
                   <a:srgbClr val="596070"/>
                 </a:solidFill>
-                <a:latin typeface="Inter"/>
+                <a:latin typeface="Arial"/>
               </a:rPr>
               <a:t>Net new ARR</a:t>
             </a:r>
@@ -8172,7 +8616,7 @@
                 <a:solidFill>
                   <a:srgbClr val="2E3A9E"/>
                 </a:solidFill>
-                <a:latin typeface="Inter"/>
+                <a:latin typeface="Arial"/>
               </a:rPr>
               <a:t>$83M</a:t>
             </a:r>
@@ -8218,7 +8662,7 @@
                 <a:solidFill>
                   <a:srgbClr val="16181D"/>
                 </a:solidFill>
-                <a:latin typeface="Inter"/>
+                <a:latin typeface="Arial"/>
               </a:rPr>
               <a:t>Record; +43.1% year on year</a:t>
             </a:r>
@@ -8235,7 +8679,7 @@
         </p:nvGraphicFramePr>
         <p:xfrm>
           <a:off x="4362704" y="1980184"/>
-          <a:ext cx="1568704" cy="2021332"/>
+          <a:ext cx="1568704" cy="933196"/>
         </p:xfrm>
         <a:graphic>
           <a:graphicData uri="http://schemas.openxmlformats.org/drawingml/2006/chart">
@@ -8252,7 +8696,7 @@
         <p:spPr>
           <a:xfrm>
             <a:off x="6150864" y="1264920"/>
-            <a:ext cx="1788160" cy="2846324"/>
+            <a:ext cx="1788160" cy="1758188"/>
           </a:xfrm>
           <a:prstGeom prst="rect">
             <a:avLst/>
@@ -8311,7 +8755,7 @@
                 <a:solidFill>
                   <a:srgbClr val="596070"/>
                 </a:solidFill>
-                <a:latin typeface="Inter"/>
+                <a:latin typeface="Arial"/>
               </a:rPr>
               <a:t>Net revenue retention</a:t>
             </a:r>
@@ -8357,7 +8801,7 @@
                 <a:solidFill>
                   <a:srgbClr val="2E3A9E"/>
                 </a:solidFill>
-                <a:latin typeface="Inter"/>
+                <a:latin typeface="Arial"/>
               </a:rPr>
               <a:t>119%</a:t>
             </a:r>
@@ -8403,7 +8847,7 @@
                 <a:solidFill>
                   <a:srgbClr val="16181D"/>
                 </a:solidFill>
-                <a:latin typeface="Inter"/>
+                <a:latin typeface="Arial"/>
               </a:rPr>
               <a:t>+3 pts from the 116% low</a:t>
             </a:r>
@@ -8420,7 +8864,7 @@
         </p:nvGraphicFramePr>
         <p:xfrm>
           <a:off x="6260592" y="1980184"/>
-          <a:ext cx="1568704" cy="2021332"/>
+          <a:ext cx="1568704" cy="933196"/>
         </p:xfrm>
         <a:graphic>
           <a:graphicData uri="http://schemas.openxmlformats.org/drawingml/2006/chart">
@@ -8437,7 +8881,7 @@
         <p:spPr>
           <a:xfrm>
             <a:off x="8048752" y="1264920"/>
-            <a:ext cx="1788160" cy="2846324"/>
+            <a:ext cx="1788160" cy="1758188"/>
           </a:xfrm>
           <a:prstGeom prst="rect">
             <a:avLst/>
@@ -8496,7 +8940,7 @@
                 <a:solidFill>
                   <a:srgbClr val="596070"/>
                 </a:solidFill>
-                <a:latin typeface="Inter"/>
+                <a:latin typeface="Arial"/>
               </a:rPr>
               <a:t>Operating margin</a:t>
             </a:r>
@@ -8542,7 +8986,7 @@
                 <a:solidFill>
                   <a:srgbClr val="2E3A9E"/>
                 </a:solidFill>
-                <a:latin typeface="Inter"/>
+                <a:latin typeface="Arial"/>
               </a:rPr>
               <a:t>16.6%</a:t>
             </a:r>
@@ -8588,7 +9032,7 @@
                 <a:solidFill>
                   <a:srgbClr val="16181D"/>
                 </a:solidFill>
-                <a:latin typeface="Inter"/>
+                <a:latin typeface="Arial"/>
               </a:rPr>
               <a:t>+5.4 pts year on year</a:t>
             </a:r>
@@ -8605,7 +9049,7 @@
         </p:nvGraphicFramePr>
         <p:xfrm>
           <a:off x="8158480" y="1980184"/>
-          <a:ext cx="1568704" cy="2021332"/>
+          <a:ext cx="1568704" cy="933196"/>
         </p:xfrm>
         <a:graphic>
           <a:graphicData uri="http://schemas.openxmlformats.org/drawingml/2006/chart">
@@ -8622,7 +9066,7 @@
         <p:spPr>
           <a:xfrm>
             <a:off x="9946640" y="1264920"/>
-            <a:ext cx="1788160" cy="2846324"/>
+            <a:ext cx="1788160" cy="1758188"/>
           </a:xfrm>
           <a:prstGeom prst="rect">
             <a:avLst/>
@@ -8681,7 +9125,7 @@
                 <a:solidFill>
                   <a:srgbClr val="596070"/>
                 </a:solidFill>
-                <a:latin typeface="Inter"/>
+                <a:latin typeface="Arial"/>
               </a:rPr>
               <a:t>Free cash flow margin</a:t>
             </a:r>
@@ -8727,7 +9171,7 @@
                 <a:solidFill>
                   <a:srgbClr val="2E3A9E"/>
                 </a:solidFill>
-                <a:latin typeface="Inter"/>
+                <a:latin typeface="Arial"/>
               </a:rPr>
               <a:t>21.4%</a:t>
             </a:r>
@@ -8773,7 +9217,7 @@
                 <a:solidFill>
                   <a:srgbClr val="16181D"/>
                 </a:solidFill>
-                <a:latin typeface="Inter"/>
+                <a:latin typeface="Arial"/>
               </a:rPr>
               <a:t>+3.1 pts year on year</a:t>
             </a:r>
@@ -8790,7 +9234,7 @@
         </p:nvGraphicFramePr>
         <p:xfrm>
           <a:off x="10056368" y="1980184"/>
-          <a:ext cx="1568704" cy="2021332"/>
+          <a:ext cx="1568704" cy="933196"/>
         </p:xfrm>
         <a:graphic>
           <a:graphicData uri="http://schemas.openxmlformats.org/drawingml/2006/chart">
@@ -8800,13 +9244,59 @@
       </p:graphicFrame>
       <p:sp>
         <p:nvSpPr>
-          <p:cNvPr id="34" name="m_h"/>
+          <p:cNvPr id="34" name="t_u"/>
           <p:cNvSpPr/>
           <p:nvPr/>
         </p:nvSpPr>
         <p:spPr>
           <a:xfrm>
-            <a:off x="457200" y="4294124"/>
+            <a:off x="457200" y="3205988"/>
+            <a:ext cx="11277600" cy="121920"/>
+          </a:xfrm>
+          <a:prstGeom prst="rect">
+            <a:avLst/>
+          </a:prstGeom>
+          <a:noFill/>
+        </p:spPr>
+        <p:txBody>
+          <a:bodyPr wrap="square" lIns="0" tIns="0" rIns="0" bIns="0" anchor="t">
+            <a:noAutofit/>
+          </a:bodyPr>
+          <a:lstStyle/>
+          <a:p>
+            <a:pPr algn="l" marL="0" indent="0">
+              <a:lnSpc>
+                <a:spcPts val="960"/>
+              </a:lnSpc>
+              <a:spcBef>
+                <a:spcPts val="0"/>
+              </a:spcBef>
+              <a:spcAft>
+                <a:spcPts val="0"/>
+              </a:spcAft>
+              <a:buNone/>
+            </a:pPr>
+            <a:r>
+              <a:rPr sz="800" b="0" i="0">
+                <a:solidFill>
+                  <a:srgbClr val="596070"/>
+                </a:solidFill>
+                <a:latin typeface="Arial"/>
+              </a:rPr>
+              <a:t>Bars and line: nine quarters, Q3 FY24 to Q3 FY26, the first and last labelled (and the low on retention); Q3 FY26 in indigo</a:t>
+            </a:r>
+          </a:p>
+        </p:txBody>
+      </p:sp>
+      <p:sp>
+        <p:nvSpPr>
+          <p:cNvPr id="35" name="m_h"/>
+          <p:cNvSpPr/>
+          <p:nvPr/>
+        </p:nvSpPr>
+        <p:spPr>
+          <a:xfrm>
+            <a:off x="457200" y="3510788"/>
             <a:ext cx="4191000" cy="167640"/>
           </a:xfrm>
           <a:prstGeom prst="rect">
@@ -8837,7 +9327,7 @@
                 <a:solidFill>
                   <a:srgbClr val="16181D"/>
                 </a:solidFill>
-                <a:latin typeface="Inter"/>
+                <a:latin typeface="Arial"/>
               </a:rPr>
               <a:t>The quarter against last year</a:t>
             </a:r>
@@ -8846,13 +9336,13 @@
       </p:sp>
       <p:sp>
         <p:nvSpPr>
-          <p:cNvPr id="35" name="m_u"/>
+          <p:cNvPr id="36" name="m_u"/>
           <p:cNvSpPr/>
           <p:nvPr/>
         </p:nvSpPr>
         <p:spPr>
           <a:xfrm>
-            <a:off x="457200" y="4489196"/>
+            <a:off x="457200" y="3705860"/>
             <a:ext cx="4191000" cy="121920"/>
           </a:xfrm>
           <a:prstGeom prst="rect">
@@ -8883,7 +9373,7 @@
                 <a:solidFill>
                   <a:srgbClr val="596070"/>
                 </a:solidFill>
-                <a:latin typeface="Inter"/>
+                <a:latin typeface="Arial"/>
               </a:rPr>
               <a:t>Q3 FY26 in indigo; GAAP margin and stock compensation as reported</a:t>
             </a:r>
@@ -8892,14 +9382,14 @@
       </p:sp>
       <p:graphicFrame>
         <p:nvGraphicFramePr>
-          <p:cNvPr id="36" name="metrics"/>
+          <p:cNvPr id="37" name="metrics"/>
           <p:cNvGraphicFramePr>
             <a:graphicFrameLocks noGrp="1"/>
           </p:cNvGraphicFramePr>
           <p:nvPr/>
         </p:nvGraphicFramePr>
         <p:xfrm>
-          <a:off x="457200" y="4638548"/>
+          <a:off x="457200" y="3855212"/>
           <a:ext cx="4191000" cy="1538224"/>
         </p:xfrm>
         <a:graphic>
@@ -8907,10 +9397,10 @@
             <a:tbl>
               <a:tblPr firstRow="0" bandRow="0" lastRow="0" firstCol="0" lastCol="0" bandCol="0"/>
               <a:tblGrid>
-                <a:gridCol w="2487061"/>
-                <a:gridCol w="582124"/>
-                <a:gridCol w="583341"/>
-                <a:gridCol w="538474"/>
+                <a:gridCol w="2468725"/>
+                <a:gridCol w="588145"/>
+                <a:gridCol w="588145"/>
+                <a:gridCol w="545985"/>
               </a:tblGrid>
               <a:tr h="192278">
                 <a:tc>
@@ -8924,7 +9414,7 @@
                           <a:solidFill>
                             <a:srgbClr val="16181D"/>
                           </a:solidFill>
-                          <a:latin typeface="Inter"/>
+                          <a:latin typeface="Arial"/>
                         </a:rPr>
                         <a:t>Metric</a:t>
                       </a:r>
@@ -8932,7 +9422,7 @@
                         <a:solidFill>
                           <a:srgbClr val="16181D"/>
                         </a:solidFill>
-                        <a:latin typeface="Inter"/>
+                        <a:latin typeface="Arial"/>
                       </a:endParaRPr>
                     </a:p>
                   </a:txBody>
@@ -8965,7 +9455,7 @@
                           <a:solidFill>
                             <a:srgbClr val="16181D"/>
                           </a:solidFill>
-                          <a:latin typeface="Inter"/>
+                          <a:latin typeface="Arial"/>
                         </a:rPr>
                         <a:t>Q3 FY25</a:t>
                       </a:r>
@@ -8973,7 +9463,7 @@
                         <a:solidFill>
                           <a:srgbClr val="16181D"/>
                         </a:solidFill>
-                        <a:latin typeface="Inter"/>
+                        <a:latin typeface="Arial"/>
                       </a:endParaRPr>
                     </a:p>
                   </a:txBody>
@@ -9006,7 +9496,7 @@
                           <a:solidFill>
                             <a:srgbClr val="16181D"/>
                           </a:solidFill>
-                          <a:latin typeface="Inter"/>
+                          <a:latin typeface="Arial"/>
                         </a:rPr>
                         <a:t>Q3 FY26</a:t>
                       </a:r>
@@ -9014,7 +9504,7 @@
                         <a:solidFill>
                           <a:srgbClr val="16181D"/>
                         </a:solidFill>
-                        <a:latin typeface="Inter"/>
+                        <a:latin typeface="Arial"/>
                       </a:endParaRPr>
                     </a:p>
                   </a:txBody>
@@ -9047,7 +9537,7 @@
                           <a:solidFill>
                             <a:srgbClr val="16181D"/>
                           </a:solidFill>
-                          <a:latin typeface="Inter"/>
+                          <a:latin typeface="Arial"/>
                         </a:rPr>
                         <a:t>Change</a:t>
                       </a:r>
@@ -9055,7 +9545,7 @@
                         <a:solidFill>
                           <a:srgbClr val="16181D"/>
                         </a:solidFill>
-                        <a:latin typeface="Inter"/>
+                        <a:latin typeface="Arial"/>
                       </a:endParaRPr>
                     </a:p>
                   </a:txBody>
@@ -9090,7 +9580,7 @@
                           <a:solidFill>
                             <a:srgbClr val="16181D"/>
                           </a:solidFill>
-                          <a:latin typeface="Inter"/>
+                          <a:latin typeface="Arial"/>
                         </a:rPr>
                         <a:t>Subscription revenue ($M)</a:t>
                       </a:r>
@@ -9098,7 +9588,7 @@
                         <a:solidFill>
                           <a:srgbClr val="16181D"/>
                         </a:solidFill>
-                        <a:latin typeface="Inter"/>
+                        <a:latin typeface="Arial"/>
                       </a:endParaRPr>
                     </a:p>
                   </a:txBody>
@@ -9133,7 +9623,7 @@
                           <a:solidFill>
                             <a:srgbClr val="16181D"/>
                           </a:solidFill>
-                          <a:latin typeface="Inter"/>
+                          <a:latin typeface="Arial"/>
                         </a:rPr>
                         <a:t>280.3</a:t>
                       </a:r>
@@ -9141,7 +9631,7 @@
                         <a:solidFill>
                           <a:srgbClr val="16181D"/>
                         </a:solidFill>
-                        <a:latin typeface="Inter"/>
+                        <a:latin typeface="Arial"/>
                       </a:endParaRPr>
                     </a:p>
                   </a:txBody>
@@ -9176,7 +9666,7 @@
                           <a:solidFill>
                             <a:srgbClr val="2E3A9E"/>
                           </a:solidFill>
-                          <a:latin typeface="Inter"/>
+                          <a:latin typeface="Arial"/>
                         </a:rPr>
                         <a:t>342.8</a:t>
                       </a:r>
@@ -9184,7 +9674,7 @@
                         <a:solidFill>
                           <a:srgbClr val="2E3A9E"/>
                         </a:solidFill>
-                        <a:latin typeface="Inter"/>
+                        <a:latin typeface="Arial"/>
                       </a:endParaRPr>
                     </a:p>
                   </a:txBody>
@@ -9219,7 +9709,7 @@
                           <a:solidFill>
                             <a:srgbClr val="16181D"/>
                           </a:solidFill>
-                          <a:latin typeface="Inter"/>
+                          <a:latin typeface="Arial"/>
                         </a:rPr>
                         <a:t>+22.3%</a:t>
                       </a:r>
@@ -9227,7 +9717,7 @@
                         <a:solidFill>
                           <a:srgbClr val="16181D"/>
                         </a:solidFill>
-                        <a:latin typeface="Inter"/>
+                        <a:latin typeface="Arial"/>
                       </a:endParaRPr>
                     </a:p>
                   </a:txBody>
@@ -9264,7 +9754,7 @@
                           <a:solidFill>
                             <a:srgbClr val="16181D"/>
                           </a:solidFill>
-                          <a:latin typeface="Inter"/>
+                          <a:latin typeface="Arial"/>
                         </a:rPr>
                         <a:t>Remaining performance obligations ($M)</a:t>
                       </a:r>
@@ -9272,7 +9762,7 @@
                         <a:solidFill>
                           <a:srgbClr val="16181D"/>
                         </a:solidFill>
-                        <a:latin typeface="Inter"/>
+                        <a:latin typeface="Arial"/>
                       </a:endParaRPr>
                     </a:p>
                   </a:txBody>
@@ -9307,7 +9797,7 @@
                           <a:solidFill>
                             <a:srgbClr val="16181D"/>
                           </a:solidFill>
-                          <a:latin typeface="Inter"/>
+                          <a:latin typeface="Arial"/>
                         </a:rPr>
                         <a:t>1,384</a:t>
                       </a:r>
@@ -9315,7 +9805,7 @@
                         <a:solidFill>
                           <a:srgbClr val="16181D"/>
                         </a:solidFill>
-                        <a:latin typeface="Inter"/>
+                        <a:latin typeface="Arial"/>
                       </a:endParaRPr>
                     </a:p>
                   </a:txBody>
@@ -9350,7 +9840,7 @@
                           <a:solidFill>
                             <a:srgbClr val="2E3A9E"/>
                           </a:solidFill>
-                          <a:latin typeface="Inter"/>
+                          <a:latin typeface="Arial"/>
                         </a:rPr>
                         <a:t>1,741</a:t>
                       </a:r>
@@ -9358,7 +9848,7 @@
                         <a:solidFill>
                           <a:srgbClr val="2E3A9E"/>
                         </a:solidFill>
-                        <a:latin typeface="Inter"/>
+                        <a:latin typeface="Arial"/>
                       </a:endParaRPr>
                     </a:p>
                   </a:txBody>
@@ -9393,7 +9883,7 @@
                           <a:solidFill>
                             <a:srgbClr val="16181D"/>
                           </a:solidFill>
-                          <a:latin typeface="Inter"/>
+                          <a:latin typeface="Arial"/>
                         </a:rPr>
                         <a:t>+25.8%</a:t>
                       </a:r>
@@ -9401,7 +9891,7 @@
                         <a:solidFill>
                           <a:srgbClr val="16181D"/>
                         </a:solidFill>
-                        <a:latin typeface="Inter"/>
+                        <a:latin typeface="Arial"/>
                       </a:endParaRPr>
                     </a:p>
                   </a:txBody>
@@ -9438,7 +9928,7 @@
                           <a:solidFill>
                             <a:srgbClr val="16181D"/>
                           </a:solidFill>
-                          <a:latin typeface="Inter"/>
+                          <a:latin typeface="Arial"/>
                         </a:rPr>
                         <a:t>Customers above $100K ARR</a:t>
                       </a:r>
@@ -9446,7 +9936,7 @@
                         <a:solidFill>
                           <a:srgbClr val="16181D"/>
                         </a:solidFill>
-                        <a:latin typeface="Inter"/>
+                        <a:latin typeface="Arial"/>
                       </a:endParaRPr>
                     </a:p>
                   </a:txBody>
@@ -9481,7 +9971,7 @@
                           <a:solidFill>
                             <a:srgbClr val="16181D"/>
                           </a:solidFill>
-                          <a:latin typeface="Inter"/>
+                          <a:latin typeface="Arial"/>
                         </a:rPr>
                         <a:t>1,779</a:t>
                       </a:r>
@@ -9489,7 +9979,7 @@
                         <a:solidFill>
                           <a:srgbClr val="16181D"/>
                         </a:solidFill>
-                        <a:latin typeface="Inter"/>
+                        <a:latin typeface="Arial"/>
                       </a:endParaRPr>
                     </a:p>
                   </a:txBody>
@@ -9524,7 +10014,7 @@
                           <a:solidFill>
                             <a:srgbClr val="2E3A9E"/>
                           </a:solidFill>
-                          <a:latin typeface="Inter"/>
+                          <a:latin typeface="Arial"/>
                         </a:rPr>
                         <a:t>2,148</a:t>
                       </a:r>
@@ -9532,7 +10022,7 @@
                         <a:solidFill>
                           <a:srgbClr val="2E3A9E"/>
                         </a:solidFill>
-                        <a:latin typeface="Inter"/>
+                        <a:latin typeface="Arial"/>
                       </a:endParaRPr>
                     </a:p>
                   </a:txBody>
@@ -9567,7 +10057,7 @@
                           <a:solidFill>
                             <a:srgbClr val="16181D"/>
                           </a:solidFill>
-                          <a:latin typeface="Inter"/>
+                          <a:latin typeface="Arial"/>
                         </a:rPr>
                         <a:t>+20.7%</a:t>
                       </a:r>
@@ -9575,7 +10065,7 @@
                         <a:solidFill>
                           <a:srgbClr val="16181D"/>
                         </a:solidFill>
-                        <a:latin typeface="Inter"/>
+                        <a:latin typeface="Arial"/>
                       </a:endParaRPr>
                     </a:p>
                   </a:txBody>
@@ -9612,7 +10102,7 @@
                           <a:solidFill>
                             <a:srgbClr val="16181D"/>
                           </a:solidFill>
-                          <a:latin typeface="Inter"/>
+                          <a:latin typeface="Arial"/>
                         </a:rPr>
                         <a:t>Customers above $1M ARR</a:t>
                       </a:r>
@@ -9620,7 +10110,7 @@
                         <a:solidFill>
                           <a:srgbClr val="16181D"/>
                         </a:solidFill>
-                        <a:latin typeface="Inter"/>
+                        <a:latin typeface="Arial"/>
                       </a:endParaRPr>
                     </a:p>
                   </a:txBody>
@@ -9655,7 +10145,7 @@
                           <a:solidFill>
                             <a:srgbClr val="16181D"/>
                           </a:solidFill>
-                          <a:latin typeface="Inter"/>
+                          <a:latin typeface="Arial"/>
                         </a:rPr>
                         <a:t>81</a:t>
                       </a:r>
@@ -9663,7 +10153,7 @@
                         <a:solidFill>
                           <a:srgbClr val="16181D"/>
                         </a:solidFill>
-                        <a:latin typeface="Inter"/>
+                        <a:latin typeface="Arial"/>
                       </a:endParaRPr>
                     </a:p>
                   </a:txBody>
@@ -9698,7 +10188,7 @@
                           <a:solidFill>
                             <a:srgbClr val="2E3A9E"/>
                           </a:solidFill>
-                          <a:latin typeface="Inter"/>
+                          <a:latin typeface="Arial"/>
                         </a:rPr>
                         <a:t>109</a:t>
                       </a:r>
@@ -9706,7 +10196,7 @@
                         <a:solidFill>
                           <a:srgbClr val="2E3A9E"/>
                         </a:solidFill>
-                        <a:latin typeface="Inter"/>
+                        <a:latin typeface="Arial"/>
                       </a:endParaRPr>
                     </a:p>
                   </a:txBody>
@@ -9741,7 +10231,7 @@
                           <a:solidFill>
                             <a:srgbClr val="16181D"/>
                           </a:solidFill>
-                          <a:latin typeface="Inter"/>
+                          <a:latin typeface="Arial"/>
                         </a:rPr>
                         <a:t>+34.6%</a:t>
                       </a:r>
@@ -9749,7 +10239,7 @@
                         <a:solidFill>
                           <a:srgbClr val="16181D"/>
                         </a:solidFill>
-                        <a:latin typeface="Inter"/>
+                        <a:latin typeface="Arial"/>
                       </a:endParaRPr>
                     </a:p>
                   </a:txBody>
@@ -9786,7 +10276,7 @@
                           <a:solidFill>
                             <a:srgbClr val="16181D"/>
                           </a:solidFill>
-                          <a:latin typeface="Inter"/>
+                          <a:latin typeface="Arial"/>
                         </a:rPr>
                         <a:t>GAAP operating margin (%)</a:t>
                       </a:r>
@@ -9794,7 +10284,7 @@
                         <a:solidFill>
                           <a:srgbClr val="16181D"/>
                         </a:solidFill>
-                        <a:latin typeface="Inter"/>
+                        <a:latin typeface="Arial"/>
                       </a:endParaRPr>
                     </a:p>
                   </a:txBody>
@@ -9829,7 +10319,7 @@
                           <a:solidFill>
                             <a:srgbClr val="16181D"/>
                           </a:solidFill>
-                          <a:latin typeface="Inter"/>
+                          <a:latin typeface="Arial"/>
                         </a:rPr>
                         <a:t>(8.9)</a:t>
                       </a:r>
@@ -9837,7 +10327,7 @@
                         <a:solidFill>
                           <a:srgbClr val="16181D"/>
                         </a:solidFill>
-                        <a:latin typeface="Inter"/>
+                        <a:latin typeface="Arial"/>
                       </a:endParaRPr>
                     </a:p>
                   </a:txBody>
@@ -9872,7 +10362,7 @@
                           <a:solidFill>
                             <a:srgbClr val="2E3A9E"/>
                           </a:solidFill>
-                          <a:latin typeface="Inter"/>
+                          <a:latin typeface="Arial"/>
                         </a:rPr>
                         <a:t>(0.4)</a:t>
                       </a:r>
@@ -9880,7 +10370,7 @@
                         <a:solidFill>
                           <a:srgbClr val="2E3A9E"/>
                         </a:solidFill>
-                        <a:latin typeface="Inter"/>
+                        <a:latin typeface="Arial"/>
                       </a:endParaRPr>
                     </a:p>
                   </a:txBody>
@@ -9915,7 +10405,7 @@
                           <a:solidFill>
                             <a:srgbClr val="16181D"/>
                           </a:solidFill>
-                          <a:latin typeface="Inter"/>
+                          <a:latin typeface="Arial"/>
                         </a:rPr>
                         <a:t>+8.5 pts</a:t>
                       </a:r>
@@ -9923,7 +10413,7 @@
                         <a:solidFill>
                           <a:srgbClr val="16181D"/>
                         </a:solidFill>
-                        <a:latin typeface="Inter"/>
+                        <a:latin typeface="Arial"/>
                       </a:endParaRPr>
                     </a:p>
                   </a:txBody>
@@ -9960,7 +10450,7 @@
                           <a:solidFill>
                             <a:srgbClr val="16181D"/>
                           </a:solidFill>
-                          <a:latin typeface="Inter"/>
+                          <a:latin typeface="Arial"/>
                         </a:rPr>
                         <a:t>Stock-based compensation (% of revenue)</a:t>
                       </a:r>
@@ -9968,7 +10458,7 @@
                         <a:solidFill>
                           <a:srgbClr val="16181D"/>
                         </a:solidFill>
-                        <a:latin typeface="Inter"/>
+                        <a:latin typeface="Arial"/>
                       </a:endParaRPr>
                     </a:p>
                   </a:txBody>
@@ -10003,7 +10493,7 @@
                           <a:solidFill>
                             <a:srgbClr val="16181D"/>
                           </a:solidFill>
-                          <a:latin typeface="Inter"/>
+                          <a:latin typeface="Arial"/>
                         </a:rPr>
                         <a:t>16.2</a:t>
                       </a:r>
@@ -10011,7 +10501,7 @@
                         <a:solidFill>
                           <a:srgbClr val="16181D"/>
                         </a:solidFill>
-                        <a:latin typeface="Inter"/>
+                        <a:latin typeface="Arial"/>
                       </a:endParaRPr>
                     </a:p>
                   </a:txBody>
@@ -10046,7 +10536,7 @@
                           <a:solidFill>
                             <a:srgbClr val="2E3A9E"/>
                           </a:solidFill>
-                          <a:latin typeface="Inter"/>
+                          <a:latin typeface="Arial"/>
                         </a:rPr>
                         <a:t>14.6</a:t>
                       </a:r>
@@ -10054,7 +10544,7 @@
                         <a:solidFill>
                           <a:srgbClr val="2E3A9E"/>
                         </a:solidFill>
-                        <a:latin typeface="Inter"/>
+                        <a:latin typeface="Arial"/>
                       </a:endParaRPr>
                     </a:p>
                   </a:txBody>
@@ -10089,7 +10579,7 @@
                           <a:solidFill>
                             <a:srgbClr val="16181D"/>
                           </a:solidFill>
-                          <a:latin typeface="Inter"/>
+                          <a:latin typeface="Arial"/>
                         </a:rPr>
                         <a:t>(1.6) pts</a:t>
                       </a:r>
@@ -10097,7 +10587,7 @@
                         <a:solidFill>
                           <a:srgbClr val="16181D"/>
                         </a:solidFill>
-                        <a:latin typeface="Inter"/>
+                        <a:latin typeface="Arial"/>
                       </a:endParaRPr>
                     </a:p>
                   </a:txBody>
@@ -10134,7 +10624,7 @@
                           <a:solidFill>
                             <a:srgbClr val="16181D"/>
                           </a:solidFill>
-                          <a:latin typeface="Inter"/>
+                          <a:latin typeface="Arial"/>
                         </a:rPr>
                         <a:t>Rule of 40 (%)</a:t>
                       </a:r>
@@ -10142,7 +10632,7 @@
                         <a:solidFill>
                           <a:srgbClr val="16181D"/>
                         </a:solidFill>
-                        <a:latin typeface="Inter"/>
+                        <a:latin typeface="Arial"/>
                       </a:endParaRPr>
                     </a:p>
                   </a:txBody>
@@ -10177,7 +10667,7 @@
                           <a:solidFill>
                             <a:srgbClr val="16181D"/>
                           </a:solidFill>
-                          <a:latin typeface="Inter"/>
+                          <a:latin typeface="Arial"/>
                         </a:rPr>
                         <a:t>40.0</a:t>
                       </a:r>
@@ -10185,7 +10675,7 @@
                         <a:solidFill>
                           <a:srgbClr val="16181D"/>
                         </a:solidFill>
-                        <a:latin typeface="Inter"/>
+                        <a:latin typeface="Arial"/>
                       </a:endParaRPr>
                     </a:p>
                   </a:txBody>
@@ -10220,7 +10710,7 @@
                           <a:solidFill>
                             <a:srgbClr val="2E3A9E"/>
                           </a:solidFill>
-                          <a:latin typeface="Inter"/>
+                          <a:latin typeface="Arial"/>
                         </a:rPr>
                         <a:t>42.7</a:t>
                       </a:r>
@@ -10228,7 +10718,7 @@
                         <a:solidFill>
                           <a:srgbClr val="2E3A9E"/>
                         </a:solidFill>
-                        <a:latin typeface="Inter"/>
+                        <a:latin typeface="Arial"/>
                       </a:endParaRPr>
                     </a:p>
                   </a:txBody>
@@ -10263,7 +10753,7 @@
                           <a:solidFill>
                             <a:srgbClr val="16181D"/>
                           </a:solidFill>
-                          <a:latin typeface="Inter"/>
+                          <a:latin typeface="Arial"/>
                         </a:rPr>
                         <a:t>+2.7 pts</a:t>
                       </a:r>
@@ -10271,7 +10761,7 @@
                         <a:solidFill>
                           <a:srgbClr val="16181D"/>
                         </a:solidFill>
-                        <a:latin typeface="Inter"/>
+                        <a:latin typeface="Arial"/>
                       </a:endParaRPr>
                     </a:p>
                   </a:txBody>
@@ -10302,13 +10792,13 @@
       </p:graphicFrame>
       <p:sp>
         <p:nvSpPr>
-          <p:cNvPr id="37" name="s_h"/>
+          <p:cNvPr id="38" name="s_h"/>
           <p:cNvSpPr/>
           <p:nvPr/>
         </p:nvSpPr>
         <p:spPr>
           <a:xfrm>
-            <a:off x="4922520" y="4294124"/>
+            <a:off x="4922520" y="3510788"/>
             <a:ext cx="3352800" cy="167640"/>
           </a:xfrm>
           <a:prstGeom prst="rect">
@@ -10339,7 +10829,7 @@
                 <a:solidFill>
                   <a:srgbClr val="16181D"/>
                 </a:solidFill>
-                <a:latin typeface="Inter"/>
+                <a:latin typeface="Arial"/>
               </a:rPr>
               <a:t>Against Q3 guidance</a:t>
             </a:r>
@@ -10348,13 +10838,13 @@
       </p:sp>
       <p:sp>
         <p:nvSpPr>
-          <p:cNvPr id="38" name="s_u"/>
+          <p:cNvPr id="39" name="s_u"/>
           <p:cNvSpPr/>
           <p:nvPr/>
         </p:nvSpPr>
         <p:spPr>
           <a:xfrm>
-            <a:off x="4922520" y="4489196"/>
+            <a:off x="4922520" y="3705860"/>
             <a:ext cx="3352800" cy="121920"/>
           </a:xfrm>
           <a:prstGeom prst="rect">
@@ -10385,23 +10875,23 @@
                 <a:solidFill>
                   <a:srgbClr val="596070"/>
                 </a:solidFill>
-                <a:latin typeface="Inter"/>
+                <a:latin typeface="Arial"/>
               </a:rPr>
-              <a:t>guided in August 2026 (amber); beat against the high end in green</a:t>
+              <a:t>guided in August 2026 (grey); beat against the high end in green</a:t>
             </a:r>
           </a:p>
         </p:txBody>
       </p:sp>
       <p:graphicFrame>
         <p:nvGraphicFramePr>
-          <p:cNvPr id="39" name="score"/>
+          <p:cNvPr id="40" name="score"/>
           <p:cNvGraphicFramePr>
             <a:graphicFrameLocks noGrp="1"/>
           </p:cNvGraphicFramePr>
           <p:nvPr/>
         </p:nvGraphicFramePr>
         <p:xfrm>
-          <a:off x="4922520" y="4638548"/>
+          <a:off x="4922520" y="3855212"/>
           <a:ext cx="3352800" cy="769112"/>
         </p:xfrm>
         <a:graphic>
@@ -10409,10 +10899,10 @@
             <a:tbl>
               <a:tblPr firstRow="0" bandRow="0" lastRow="0" firstCol="0" lastCol="0" bandCol="0"/>
               <a:tblGrid>
-                <a:gridCol w="1378302"/>
-                <a:gridCol w="777776"/>
-                <a:gridCol w="451527"/>
-                <a:gridCol w="745195"/>
+                <a:gridCol w="1361302"/>
+                <a:gridCol w="749868"/>
+                <a:gridCol w="464459"/>
+                <a:gridCol w="777171"/>
               </a:tblGrid>
               <a:tr h="192278">
                 <a:tc>
@@ -10426,7 +10916,7 @@
                           <a:solidFill>
                             <a:srgbClr val="16181D"/>
                           </a:solidFill>
-                          <a:latin typeface="Inter"/>
+                          <a:latin typeface="Arial"/>
                         </a:rPr>
                         <a:t>Metric</a:t>
                       </a:r>
@@ -10434,7 +10924,7 @@
                         <a:solidFill>
                           <a:srgbClr val="16181D"/>
                         </a:solidFill>
-                        <a:latin typeface="Inter"/>
+                        <a:latin typeface="Arial"/>
                       </a:endParaRPr>
                     </a:p>
                   </a:txBody>
@@ -10467,7 +10957,7 @@
                           <a:solidFill>
                             <a:srgbClr val="16181D"/>
                           </a:solidFill>
-                          <a:latin typeface="Inter"/>
+                          <a:latin typeface="Arial"/>
                         </a:rPr>
                         <a:t>Guidance</a:t>
                       </a:r>
@@ -10475,7 +10965,7 @@
                         <a:solidFill>
                           <a:srgbClr val="16181D"/>
                         </a:solidFill>
-                        <a:latin typeface="Inter"/>
+                        <a:latin typeface="Arial"/>
                       </a:endParaRPr>
                     </a:p>
                   </a:txBody>
@@ -10508,7 +10998,7 @@
                           <a:solidFill>
                             <a:srgbClr val="16181D"/>
                           </a:solidFill>
-                          <a:latin typeface="Inter"/>
+                          <a:latin typeface="Arial"/>
                         </a:rPr>
                         <a:t>Actual</a:t>
                       </a:r>
@@ -10516,7 +11006,7 @@
                         <a:solidFill>
                           <a:srgbClr val="16181D"/>
                         </a:solidFill>
-                        <a:latin typeface="Inter"/>
+                        <a:latin typeface="Arial"/>
                       </a:endParaRPr>
                     </a:p>
                   </a:txBody>
@@ -10549,7 +11039,7 @@
                           <a:solidFill>
                             <a:srgbClr val="16181D"/>
                           </a:solidFill>
-                          <a:latin typeface="Inter"/>
+                          <a:latin typeface="Arial"/>
                         </a:rPr>
                         <a:t>vs high end</a:t>
                       </a:r>
@@ -10557,7 +11047,7 @@
                         <a:solidFill>
                           <a:srgbClr val="16181D"/>
                         </a:solidFill>
-                        <a:latin typeface="Inter"/>
+                        <a:latin typeface="Arial"/>
                       </a:endParaRPr>
                     </a:p>
                   </a:txBody>
@@ -10592,7 +11082,7 @@
                           <a:solidFill>
                             <a:srgbClr val="16181D"/>
                           </a:solidFill>
-                          <a:latin typeface="Inter"/>
+                          <a:latin typeface="Arial"/>
                         </a:rPr>
                         <a:t>Revenue ($M)</a:t>
                       </a:r>
@@ -10600,7 +11090,7 @@
                         <a:solidFill>
                           <a:srgbClr val="16181D"/>
                         </a:solidFill>
-                        <a:latin typeface="Inter"/>
+                        <a:latin typeface="Arial"/>
                       </a:endParaRPr>
                     </a:p>
                   </a:txBody>
@@ -10633,17 +11123,17 @@
                       <a:r>
                         <a:rPr sz="900" b="0" i="0">
                           <a:solidFill>
-                            <a:srgbClr val="A9650A"/>
+                            <a:srgbClr val="596070"/>
                           </a:solidFill>
-                          <a:latin typeface="Inter"/>
+                          <a:latin typeface="Arial"/>
                         </a:rPr>
                         <a:t>350.0-354.0</a:t>
                       </a:r>
                       <a:endParaRPr sz="900" b="0" i="0">
                         <a:solidFill>
-                          <a:srgbClr val="A9650A"/>
-                        </a:solidFill>
-                        <a:latin typeface="Inter"/>
+                          <a:srgbClr val="596070"/>
+                        </a:solidFill>
+                        <a:latin typeface="Arial"/>
                       </a:endParaRPr>
                     </a:p>
                   </a:txBody>
@@ -10678,7 +11168,7 @@
                           <a:solidFill>
                             <a:srgbClr val="2E3A9E"/>
                           </a:solidFill>
-                          <a:latin typeface="Inter"/>
+                          <a:latin typeface="Arial"/>
                         </a:rPr>
                         <a:t>358.2</a:t>
                       </a:r>
@@ -10686,7 +11176,7 @@
                         <a:solidFill>
                           <a:srgbClr val="2E3A9E"/>
                         </a:solidFill>
-                        <a:latin typeface="Inter"/>
+                        <a:latin typeface="Arial"/>
                       </a:endParaRPr>
                     </a:p>
                   </a:txBody>
@@ -10721,7 +11211,7 @@
                           <a:solidFill>
                             <a:srgbClr val="1F7A4D"/>
                           </a:solidFill>
-                          <a:latin typeface="Inter"/>
+                          <a:latin typeface="Arial"/>
                         </a:rPr>
                         <a:t>+4.2</a:t>
                       </a:r>
@@ -10729,7 +11219,7 @@
                         <a:solidFill>
                           <a:srgbClr val="1F7A4D"/>
                         </a:solidFill>
-                        <a:latin typeface="Inter"/>
+                        <a:latin typeface="Arial"/>
                       </a:endParaRPr>
                     </a:p>
                   </a:txBody>
@@ -10766,7 +11256,7 @@
                           <a:solidFill>
                             <a:srgbClr val="16181D"/>
                           </a:solidFill>
-                          <a:latin typeface="Inter"/>
+                          <a:latin typeface="Arial"/>
                         </a:rPr>
                         <a:t>Operating income ($M)</a:t>
                       </a:r>
@@ -10774,7 +11264,7 @@
                         <a:solidFill>
                           <a:srgbClr val="16181D"/>
                         </a:solidFill>
-                        <a:latin typeface="Inter"/>
+                        <a:latin typeface="Arial"/>
                       </a:endParaRPr>
                     </a:p>
                   </a:txBody>
@@ -10807,17 +11297,17 @@
                       <a:r>
                         <a:rPr sz="900" b="0" i="0">
                           <a:solidFill>
-                            <a:srgbClr val="A9650A"/>
+                            <a:srgbClr val="596070"/>
                           </a:solidFill>
-                          <a:latin typeface="Inter"/>
+                          <a:latin typeface="Arial"/>
                         </a:rPr>
                         <a:t>52.0-54.0</a:t>
                       </a:r>
                       <a:endParaRPr sz="900" b="0" i="0">
                         <a:solidFill>
-                          <a:srgbClr val="A9650A"/>
-                        </a:solidFill>
-                        <a:latin typeface="Inter"/>
+                          <a:srgbClr val="596070"/>
+                        </a:solidFill>
+                        <a:latin typeface="Arial"/>
                       </a:endParaRPr>
                     </a:p>
                   </a:txBody>
@@ -10852,7 +11342,7 @@
                           <a:solidFill>
                             <a:srgbClr val="2E3A9E"/>
                           </a:solidFill>
-                          <a:latin typeface="Inter"/>
+                          <a:latin typeface="Arial"/>
                         </a:rPr>
                         <a:t>59.5</a:t>
                       </a:r>
@@ -10860,7 +11350,7 @@
                         <a:solidFill>
                           <a:srgbClr val="2E3A9E"/>
                         </a:solidFill>
-                        <a:latin typeface="Inter"/>
+                        <a:latin typeface="Arial"/>
                       </a:endParaRPr>
                     </a:p>
                   </a:txBody>
@@ -10895,7 +11385,7 @@
                           <a:solidFill>
                             <a:srgbClr val="1F7A4D"/>
                           </a:solidFill>
-                          <a:latin typeface="Inter"/>
+                          <a:latin typeface="Arial"/>
                         </a:rPr>
                         <a:t>+5.5</a:t>
                       </a:r>
@@ -10903,7 +11393,7 @@
                         <a:solidFill>
                           <a:srgbClr val="1F7A4D"/>
                         </a:solidFill>
-                        <a:latin typeface="Inter"/>
+                        <a:latin typeface="Arial"/>
                       </a:endParaRPr>
                     </a:p>
                   </a:txBody>
@@ -10940,7 +11430,7 @@
                           <a:solidFill>
                             <a:srgbClr val="16181D"/>
                           </a:solidFill>
-                          <a:latin typeface="Inter"/>
+                          <a:latin typeface="Arial"/>
                         </a:rPr>
                         <a:t>Operating margin (%)</a:t>
                       </a:r>
@@ -10948,7 +11438,7 @@
                         <a:solidFill>
                           <a:srgbClr val="16181D"/>
                         </a:solidFill>
-                        <a:latin typeface="Inter"/>
+                        <a:latin typeface="Arial"/>
                       </a:endParaRPr>
                     </a:p>
                   </a:txBody>
@@ -10981,17 +11471,17 @@
                       <a:r>
                         <a:rPr sz="900" b="0" i="0">
                           <a:solidFill>
-                            <a:srgbClr val="A9650A"/>
+                            <a:srgbClr val="596070"/>
                           </a:solidFill>
-                          <a:latin typeface="Inter"/>
+                          <a:latin typeface="Arial"/>
                         </a:rPr>
                         <a:t>14.9-15.3</a:t>
                       </a:r>
                       <a:endParaRPr sz="900" b="0" i="0">
                         <a:solidFill>
-                          <a:srgbClr val="A9650A"/>
-                        </a:solidFill>
-                        <a:latin typeface="Inter"/>
+                          <a:srgbClr val="596070"/>
+                        </a:solidFill>
+                        <a:latin typeface="Arial"/>
                       </a:endParaRPr>
                     </a:p>
                   </a:txBody>
@@ -11026,7 +11516,7 @@
                           <a:solidFill>
                             <a:srgbClr val="2E3A9E"/>
                           </a:solidFill>
-                          <a:latin typeface="Inter"/>
+                          <a:latin typeface="Arial"/>
                         </a:rPr>
                         <a:t>16.6</a:t>
                       </a:r>
@@ -11034,7 +11524,7 @@
                         <a:solidFill>
                           <a:srgbClr val="2E3A9E"/>
                         </a:solidFill>
-                        <a:latin typeface="Inter"/>
+                        <a:latin typeface="Arial"/>
                       </a:endParaRPr>
                     </a:p>
                   </a:txBody>
@@ -11069,7 +11559,7 @@
                           <a:solidFill>
                             <a:srgbClr val="1F7A4D"/>
                           </a:solidFill>
-                          <a:latin typeface="Inter"/>
+                          <a:latin typeface="Arial"/>
                         </a:rPr>
                         <a:t>+1.3 pts</a:t>
                       </a:r>
@@ -11077,7 +11567,7 @@
                         <a:solidFill>
                           <a:srgbClr val="1F7A4D"/>
                         </a:solidFill>
-                        <a:latin typeface="Inter"/>
+                        <a:latin typeface="Arial"/>
                       </a:endParaRPr>
                     </a:p>
                   </a:txBody>
@@ -11108,13 +11598,13 @@
       </p:graphicFrame>
       <p:sp>
         <p:nvSpPr>
-          <p:cNvPr id="40" name="s_fn"/>
+          <p:cNvPr id="41" name="s_fn"/>
           <p:cNvSpPr/>
           <p:nvPr/>
         </p:nvSpPr>
         <p:spPr>
           <a:xfrm>
-            <a:off x="4922520" y="5435092"/>
+            <a:off x="4922520" y="4651756"/>
             <a:ext cx="3352800" cy="228600"/>
           </a:xfrm>
           <a:prstGeom prst="rect">
@@ -11145,7 +11635,7 @@
                 <a:solidFill>
                   <a:srgbClr val="596070"/>
                 </a:solidFill>
-                <a:latin typeface="Inter"/>
+                <a:latin typeface="Arial"/>
               </a:rPr>
               <a:t>Operating income and margin are non-GAAP; guided margin is the guided</a:t>
             </a:r>
@@ -11155,7 +11645,7 @@
                 <a:solidFill>
                   <a:srgbClr val="596070"/>
                 </a:solidFill>
-                <a:latin typeface="Inter"/>
+                <a:latin typeface="Arial"/>
               </a:rPr>
               <a:t>income over guided revenue at each end of the range.</a:t>
             </a:r>
@@ -11164,13 +11654,648 @@
       </p:sp>
       <p:sp>
         <p:nvSpPr>
-          <p:cNvPr id="41" name="n_h"/>
+          <p:cNvPr id="42" name="g_h"/>
           <p:cNvSpPr/>
           <p:nvPr/>
         </p:nvSpPr>
         <p:spPr>
           <a:xfrm>
-            <a:off x="8549640" y="4294124"/>
+            <a:off x="4922520" y="5063236"/>
+            <a:ext cx="3352800" cy="167640"/>
+          </a:xfrm>
+          <a:prstGeom prst="rect">
+            <a:avLst/>
+          </a:prstGeom>
+          <a:noFill/>
+        </p:spPr>
+        <p:txBody>
+          <a:bodyPr wrap="square" lIns="0" tIns="0" rIns="0" bIns="0" anchor="t">
+            <a:noAutofit/>
+          </a:bodyPr>
+          <a:lstStyle/>
+          <a:p>
+            <a:pPr algn="l" marL="0" indent="0">
+              <a:lnSpc>
+                <a:spcPts val="1320"/>
+              </a:lnSpc>
+              <a:spcBef>
+                <a:spcPts val="0"/>
+              </a:spcBef>
+              <a:spcAft>
+                <a:spcPts val="0"/>
+              </a:spcAft>
+              <a:buNone/>
+            </a:pPr>
+            <a:r>
+              <a:rPr sz="1100" b="1" i="0">
+                <a:solidFill>
+                  <a:srgbClr val="16181D"/>
+                </a:solidFill>
+                <a:latin typeface="Arial"/>
+              </a:rPr>
+              <a:t>FY2026 guidance, raised</a:t>
+            </a:r>
+          </a:p>
+        </p:txBody>
+      </p:sp>
+      <p:sp>
+        <p:nvSpPr>
+          <p:cNvPr id="43" name="g_u"/>
+          <p:cNvSpPr/>
+          <p:nvPr/>
+        </p:nvSpPr>
+        <p:spPr>
+          <a:xfrm>
+            <a:off x="4922520" y="5258308"/>
+            <a:ext cx="3352800" cy="121920"/>
+          </a:xfrm>
+          <a:prstGeom prst="rect">
+            <a:avLst/>
+          </a:prstGeom>
+          <a:noFill/>
+        </p:spPr>
+        <p:txBody>
+          <a:bodyPr wrap="square" lIns="0" tIns="0" rIns="0" bIns="0" anchor="t">
+            <a:noAutofit/>
+          </a:bodyPr>
+          <a:lstStyle/>
+          <a:p>
+            <a:pPr algn="l" marL="0" indent="0">
+              <a:lnSpc>
+                <a:spcPts val="960"/>
+              </a:lnSpc>
+              <a:spcBef>
+                <a:spcPts val="0"/>
+              </a:spcBef>
+              <a:spcAft>
+                <a:spcPts val="0"/>
+              </a:spcAft>
+              <a:buNone/>
+            </a:pPr>
+            <a:r>
+              <a:rPr sz="800" b="0" i="0">
+                <a:solidFill>
+                  <a:srgbClr val="596070"/>
+                </a:solidFill>
+                <a:latin typeface="Arial"/>
+              </a:rPr>
+              <a:t>issued 26 October 2026; new guidance in amber, August's in grey</a:t>
+            </a:r>
+          </a:p>
+        </p:txBody>
+      </p:sp>
+      <p:graphicFrame>
+        <p:nvGraphicFramePr>
+          <p:cNvPr id="44" name="fyg"/>
+          <p:cNvGraphicFramePr>
+            <a:graphicFrameLocks noGrp="1"/>
+          </p:cNvGraphicFramePr>
+          <p:nvPr/>
+        </p:nvGraphicFramePr>
+        <p:xfrm>
+          <a:off x="4922520" y="5407660"/>
+          <a:ext cx="3352800" cy="769112"/>
+        </p:xfrm>
+        <a:graphic>
+          <a:graphicData uri="http://schemas.openxmlformats.org/drawingml/2006/table">
+            <a:tbl>
+              <a:tblPr firstRow="0" bandRow="0" lastRow="0" firstCol="0" lastCol="0" bandCol="0"/>
+              <a:tblGrid>
+                <a:gridCol w="1440854"/>
+                <a:gridCol w="955972"/>
+                <a:gridCol w="955974"/>
+              </a:tblGrid>
+              <a:tr h="192278">
+                <a:tc>
+                  <a:txBody>
+                    <a:bodyPr wrap="square"/>
+                    <a:lstStyle/>
+                    <a:p>
+                      <a:pPr algn="l"/>
+                      <a:r>
+                        <a:rPr sz="900" b="1" i="0">
+                          <a:solidFill>
+                            <a:srgbClr val="16181D"/>
+                          </a:solidFill>
+                          <a:latin typeface="Arial"/>
+                        </a:rPr>
+                        <a:t>Metric</a:t>
+                      </a:r>
+                      <a:endParaRPr sz="900" b="1" i="0">
+                        <a:solidFill>
+                          <a:srgbClr val="16181D"/>
+                        </a:solidFill>
+                        <a:latin typeface="Arial"/>
+                      </a:endParaRPr>
+                    </a:p>
+                  </a:txBody>
+                  <a:tcPr marL="27432" marR="27432" marT="27432" marB="27432" anchor="ctr">
+                    <a:lnL w="0">
+                      <a:noFill/>
+                    </a:lnL>
+                    <a:lnR w="0">
+                      <a:noFill/>
+                    </a:lnR>
+                    <a:lnT w="0">
+                      <a:noFill/>
+                    </a:lnT>
+                    <a:lnB w="9525">
+                      <a:solidFill>
+                        <a:srgbClr val="16181D"/>
+                      </a:solidFill>
+                    </a:lnB>
+                    <a:noFill/>
+                  </a:tcPr>
+                </a:tc>
+                <a:tc>
+                  <a:txBody>
+                    <a:bodyPr wrap="square"/>
+                    <a:lstStyle/>
+                    <a:p>
+                      <a:pPr algn="r"/>
+                      <a:r>
+                        <a:rPr sz="900" b="1" i="0">
+                          <a:solidFill>
+                            <a:srgbClr val="16181D"/>
+                          </a:solidFill>
+                          <a:latin typeface="Arial"/>
+                        </a:rPr>
+                        <a:t>Now</a:t>
+                      </a:r>
+                      <a:endParaRPr sz="900" b="1" i="0">
+                        <a:solidFill>
+                          <a:srgbClr val="16181D"/>
+                        </a:solidFill>
+                        <a:latin typeface="Arial"/>
+                      </a:endParaRPr>
+                    </a:p>
+                  </a:txBody>
+                  <a:tcPr marL="27432" marR="27432" marT="27432" marB="27432" anchor="ctr">
+                    <a:lnL w="0">
+                      <a:noFill/>
+                    </a:lnL>
+                    <a:lnR w="0">
+                      <a:noFill/>
+                    </a:lnR>
+                    <a:lnT w="0">
+                      <a:noFill/>
+                    </a:lnT>
+                    <a:lnB w="9525">
+                      <a:solidFill>
+                        <a:srgbClr val="16181D"/>
+                      </a:solidFill>
+                    </a:lnB>
+                    <a:noFill/>
+                  </a:tcPr>
+                </a:tc>
+                <a:tc>
+                  <a:txBody>
+                    <a:bodyPr wrap="square"/>
+                    <a:lstStyle/>
+                    <a:p>
+                      <a:pPr algn="r"/>
+                      <a:r>
+                        <a:rPr sz="900" b="1" i="0">
+                          <a:solidFill>
+                            <a:srgbClr val="16181D"/>
+                          </a:solidFill>
+                          <a:latin typeface="Arial"/>
+                        </a:rPr>
+                        <a:t>August</a:t>
+                      </a:r>
+                      <a:endParaRPr sz="900" b="1" i="0">
+                        <a:solidFill>
+                          <a:srgbClr val="16181D"/>
+                        </a:solidFill>
+                        <a:latin typeface="Arial"/>
+                      </a:endParaRPr>
+                    </a:p>
+                  </a:txBody>
+                  <a:tcPr marL="27432" marR="27432" marT="27432" marB="27432" anchor="ctr">
+                    <a:lnL w="0">
+                      <a:noFill/>
+                    </a:lnL>
+                    <a:lnR w="0">
+                      <a:noFill/>
+                    </a:lnR>
+                    <a:lnT w="0">
+                      <a:noFill/>
+                    </a:lnT>
+                    <a:lnB w="9525">
+                      <a:solidFill>
+                        <a:srgbClr val="16181D"/>
+                      </a:solidFill>
+                    </a:lnB>
+                    <a:noFill/>
+                  </a:tcPr>
+                </a:tc>
+              </a:tr>
+              <a:tr h="192278">
+                <a:tc>
+                  <a:txBody>
+                    <a:bodyPr wrap="square"/>
+                    <a:lstStyle/>
+                    <a:p>
+                      <a:pPr algn="l"/>
+                      <a:r>
+                        <a:rPr sz="900" b="0" i="0">
+                          <a:solidFill>
+                            <a:srgbClr val="16181D"/>
+                          </a:solidFill>
+                          <a:latin typeface="Arial"/>
+                        </a:rPr>
+                        <a:t>Revenue ($M)</a:t>
+                      </a:r>
+                      <a:endParaRPr sz="900" b="0" i="0">
+                        <a:solidFill>
+                          <a:srgbClr val="16181D"/>
+                        </a:solidFill>
+                        <a:latin typeface="Arial"/>
+                      </a:endParaRPr>
+                    </a:p>
+                  </a:txBody>
+                  <a:tcPr marL="27432" marR="27432" marT="27432" marB="27432" anchor="ctr">
+                    <a:lnL w="0">
+                      <a:noFill/>
+                    </a:lnL>
+                    <a:lnR w="0">
+                      <a:noFill/>
+                    </a:lnR>
+                    <a:lnT w="9525">
+                      <a:solidFill>
+                        <a:srgbClr val="16181D"/>
+                      </a:solidFill>
+                    </a:lnT>
+                    <a:lnB w="6350">
+                      <a:solidFill>
+                        <a:srgbClr val="D3D7DF"/>
+                      </a:solidFill>
+                    </a:lnB>
+                    <a:noFill/>
+                  </a:tcPr>
+                </a:tc>
+                <a:tc>
+                  <a:txBody>
+                    <a:bodyPr wrap="square"/>
+                    <a:lstStyle/>
+                    <a:p>
+                      <a:pPr algn="r"/>
+                      <a:r>
+                        <a:rPr sz="900" b="1" i="0">
+                          <a:solidFill>
+                            <a:srgbClr val="A9650A"/>
+                          </a:solidFill>
+                          <a:latin typeface="Arial"/>
+                        </a:rPr>
+                        <a:t>1,394.4-1,398.4</a:t>
+                      </a:r>
+                      <a:endParaRPr sz="900" b="1" i="0">
+                        <a:solidFill>
+                          <a:srgbClr val="A9650A"/>
+                        </a:solidFill>
+                        <a:latin typeface="Arial"/>
+                      </a:endParaRPr>
+                    </a:p>
+                  </a:txBody>
+                  <a:tcPr marL="27432" marR="27432" marT="27432" marB="27432" anchor="ctr">
+                    <a:lnL w="0">
+                      <a:noFill/>
+                    </a:lnL>
+                    <a:lnR w="0">
+                      <a:noFill/>
+                    </a:lnR>
+                    <a:lnT w="9525">
+                      <a:solidFill>
+                        <a:srgbClr val="16181D"/>
+                      </a:solidFill>
+                    </a:lnT>
+                    <a:lnB w="6350">
+                      <a:solidFill>
+                        <a:srgbClr val="D3D7DF"/>
+                      </a:solidFill>
+                    </a:lnB>
+                    <a:noFill/>
+                  </a:tcPr>
+                </a:tc>
+                <a:tc>
+                  <a:txBody>
+                    <a:bodyPr wrap="square"/>
+                    <a:lstStyle/>
+                    <a:p>
+                      <a:pPr algn="r"/>
+                      <a:r>
+                        <a:rPr sz="900" b="0" i="0">
+                          <a:solidFill>
+                            <a:srgbClr val="596070"/>
+                          </a:solidFill>
+                          <a:latin typeface="Arial"/>
+                        </a:rPr>
+                        <a:t>1,379.0-1,389.0</a:t>
+                      </a:r>
+                      <a:endParaRPr sz="900" b="0" i="0">
+                        <a:solidFill>
+                          <a:srgbClr val="596070"/>
+                        </a:solidFill>
+                        <a:latin typeface="Arial"/>
+                      </a:endParaRPr>
+                    </a:p>
+                  </a:txBody>
+                  <a:tcPr marL="27432" marR="27432" marT="27432" marB="27432" anchor="ctr">
+                    <a:lnL w="0">
+                      <a:noFill/>
+                    </a:lnL>
+                    <a:lnR w="0">
+                      <a:noFill/>
+                    </a:lnR>
+                    <a:lnT w="9525">
+                      <a:solidFill>
+                        <a:srgbClr val="16181D"/>
+                      </a:solidFill>
+                    </a:lnT>
+                    <a:lnB w="6350">
+                      <a:solidFill>
+                        <a:srgbClr val="D3D7DF"/>
+                      </a:solidFill>
+                    </a:lnB>
+                    <a:noFill/>
+                  </a:tcPr>
+                </a:tc>
+              </a:tr>
+              <a:tr h="192278">
+                <a:tc>
+                  <a:txBody>
+                    <a:bodyPr wrap="square"/>
+                    <a:lstStyle/>
+                    <a:p>
+                      <a:pPr algn="l"/>
+                      <a:r>
+                        <a:rPr sz="900" b="0" i="0">
+                          <a:solidFill>
+                            <a:srgbClr val="16181D"/>
+                          </a:solidFill>
+                          <a:latin typeface="Arial"/>
+                        </a:rPr>
+                        <a:t>Growth year on year (%)</a:t>
+                      </a:r>
+                      <a:endParaRPr sz="900" b="0" i="0">
+                        <a:solidFill>
+                          <a:srgbClr val="16181D"/>
+                        </a:solidFill>
+                        <a:latin typeface="Arial"/>
+                      </a:endParaRPr>
+                    </a:p>
+                  </a:txBody>
+                  <a:tcPr marL="27432" marR="27432" marT="27432" marB="27432" anchor="ctr">
+                    <a:lnL w="0">
+                      <a:noFill/>
+                    </a:lnL>
+                    <a:lnR w="0">
+                      <a:noFill/>
+                    </a:lnR>
+                    <a:lnT w="6350">
+                      <a:solidFill>
+                        <a:srgbClr val="D3D7DF"/>
+                      </a:solidFill>
+                    </a:lnT>
+                    <a:lnB w="6350">
+                      <a:solidFill>
+                        <a:srgbClr val="D3D7DF"/>
+                      </a:solidFill>
+                    </a:lnB>
+                    <a:noFill/>
+                  </a:tcPr>
+                </a:tc>
+                <a:tc>
+                  <a:txBody>
+                    <a:bodyPr wrap="square"/>
+                    <a:lstStyle/>
+                    <a:p>
+                      <a:pPr algn="r"/>
+                      <a:r>
+                        <a:rPr sz="900" b="1" i="0">
+                          <a:solidFill>
+                            <a:srgbClr val="A9650A"/>
+                          </a:solidFill>
+                          <a:latin typeface="Arial"/>
+                        </a:rPr>
+                        <a:t>20.9-21.3</a:t>
+                      </a:r>
+                      <a:endParaRPr sz="900" b="1" i="0">
+                        <a:solidFill>
+                          <a:srgbClr val="A9650A"/>
+                        </a:solidFill>
+                        <a:latin typeface="Arial"/>
+                      </a:endParaRPr>
+                    </a:p>
+                  </a:txBody>
+                  <a:tcPr marL="27432" marR="27432" marT="27432" marB="27432" anchor="ctr">
+                    <a:lnL w="0">
+                      <a:noFill/>
+                    </a:lnL>
+                    <a:lnR w="0">
+                      <a:noFill/>
+                    </a:lnR>
+                    <a:lnT w="6350">
+                      <a:solidFill>
+                        <a:srgbClr val="D3D7DF"/>
+                      </a:solidFill>
+                    </a:lnT>
+                    <a:lnB w="6350">
+                      <a:solidFill>
+                        <a:srgbClr val="D3D7DF"/>
+                      </a:solidFill>
+                    </a:lnB>
+                    <a:noFill/>
+                  </a:tcPr>
+                </a:tc>
+                <a:tc>
+                  <a:txBody>
+                    <a:bodyPr wrap="square"/>
+                    <a:lstStyle/>
+                    <a:p>
+                      <a:pPr algn="r"/>
+                      <a:r>
+                        <a:rPr sz="900" b="0" i="0">
+                          <a:solidFill>
+                            <a:srgbClr val="596070"/>
+                          </a:solidFill>
+                          <a:latin typeface="Arial"/>
+                        </a:rPr>
+                        <a:t>19.6-20.4</a:t>
+                      </a:r>
+                      <a:endParaRPr sz="900" b="0" i="0">
+                        <a:solidFill>
+                          <a:srgbClr val="596070"/>
+                        </a:solidFill>
+                        <a:latin typeface="Arial"/>
+                      </a:endParaRPr>
+                    </a:p>
+                  </a:txBody>
+                  <a:tcPr marL="27432" marR="27432" marT="27432" marB="27432" anchor="ctr">
+                    <a:lnL w="0">
+                      <a:noFill/>
+                    </a:lnL>
+                    <a:lnR w="0">
+                      <a:noFill/>
+                    </a:lnR>
+                    <a:lnT w="6350">
+                      <a:solidFill>
+                        <a:srgbClr val="D3D7DF"/>
+                      </a:solidFill>
+                    </a:lnT>
+                    <a:lnB w="6350">
+                      <a:solidFill>
+                        <a:srgbClr val="D3D7DF"/>
+                      </a:solidFill>
+                    </a:lnB>
+                    <a:noFill/>
+                  </a:tcPr>
+                </a:tc>
+              </a:tr>
+              <a:tr h="192278">
+                <a:tc>
+                  <a:txBody>
+                    <a:bodyPr wrap="square"/>
+                    <a:lstStyle/>
+                    <a:p>
+                      <a:pPr algn="l"/>
+                      <a:r>
+                        <a:rPr sz="900" b="0" i="0">
+                          <a:solidFill>
+                            <a:srgbClr val="16181D"/>
+                          </a:solidFill>
+                          <a:latin typeface="Arial"/>
+                        </a:rPr>
+                        <a:t>Operating margin (%)</a:t>
+                      </a:r>
+                      <a:endParaRPr sz="900" b="0" i="0">
+                        <a:solidFill>
+                          <a:srgbClr val="16181D"/>
+                        </a:solidFill>
+                        <a:latin typeface="Arial"/>
+                      </a:endParaRPr>
+                    </a:p>
+                  </a:txBody>
+                  <a:tcPr marL="27432" marR="27432" marT="27432" marB="27432" anchor="ctr">
+                    <a:lnL w="0">
+                      <a:noFill/>
+                    </a:lnL>
+                    <a:lnR w="0">
+                      <a:noFill/>
+                    </a:lnR>
+                    <a:lnT w="6350">
+                      <a:solidFill>
+                        <a:srgbClr val="D3D7DF"/>
+                      </a:solidFill>
+                    </a:lnT>
+                    <a:lnB w="9525">
+                      <a:solidFill>
+                        <a:srgbClr val="16181D"/>
+                      </a:solidFill>
+                    </a:lnB>
+                    <a:noFill/>
+                  </a:tcPr>
+                </a:tc>
+                <a:tc>
+                  <a:txBody>
+                    <a:bodyPr wrap="square"/>
+                    <a:lstStyle/>
+                    <a:p>
+                      <a:pPr algn="r"/>
+                      <a:r>
+                        <a:rPr sz="900" b="1" i="0">
+                          <a:solidFill>
+                            <a:srgbClr val="A9650A"/>
+                          </a:solidFill>
+                          <a:latin typeface="Arial"/>
+                        </a:rPr>
+                        <a:t>15.9-16.0</a:t>
+                      </a:r>
+                      <a:endParaRPr sz="900" b="1" i="0">
+                        <a:solidFill>
+                          <a:srgbClr val="A9650A"/>
+                        </a:solidFill>
+                        <a:latin typeface="Arial"/>
+                      </a:endParaRPr>
+                    </a:p>
+                  </a:txBody>
+                  <a:tcPr marL="27432" marR="27432" marT="27432" marB="27432" anchor="ctr">
+                    <a:lnL w="0">
+                      <a:noFill/>
+                    </a:lnL>
+                    <a:lnR w="0">
+                      <a:noFill/>
+                    </a:lnR>
+                    <a:lnT w="6350">
+                      <a:solidFill>
+                        <a:srgbClr val="D3D7DF"/>
+                      </a:solidFill>
+                    </a:lnT>
+                    <a:lnB w="9525">
+                      <a:solidFill>
+                        <a:srgbClr val="16181D"/>
+                      </a:solidFill>
+                    </a:lnB>
+                    <a:noFill/>
+                  </a:tcPr>
+                </a:tc>
+                <a:tc>
+                  <a:txBody>
+                    <a:bodyPr wrap="square"/>
+                    <a:lstStyle/>
+                    <a:p>
+                      <a:pPr algn="r"/>
+                      <a:r>
+                        <a:rPr sz="900" b="0" i="0">
+                          <a:solidFill>
+                            <a:srgbClr val="596070"/>
+                          </a:solidFill>
+                          <a:latin typeface="Arial"/>
+                        </a:rPr>
+                        <a:t>15.5-15.7</a:t>
+                      </a:r>
+                      <a:endParaRPr sz="900" b="0" i="0">
+                        <a:solidFill>
+                          <a:srgbClr val="596070"/>
+                        </a:solidFill>
+                        <a:latin typeface="Arial"/>
+                      </a:endParaRPr>
+                    </a:p>
+                  </a:txBody>
+                  <a:tcPr marL="27432" marR="27432" marT="27432" marB="27432" anchor="ctr">
+                    <a:lnL w="0">
+                      <a:noFill/>
+                    </a:lnL>
+                    <a:lnR w="0">
+                      <a:noFill/>
+                    </a:lnR>
+                    <a:lnT w="6350">
+                      <a:solidFill>
+                        <a:srgbClr val="D3D7DF"/>
+                      </a:solidFill>
+                    </a:lnT>
+                    <a:lnB w="9525">
+                      <a:solidFill>
+                        <a:srgbClr val="16181D"/>
+                      </a:solidFill>
+                    </a:lnB>
+                    <a:noFill/>
+                  </a:tcPr>
+                </a:tc>
+              </a:tr>
+            </a:tbl>
+          </a:graphicData>
+        </a:graphic>
+      </p:graphicFrame>
+      <p:sp>
+        <p:nvSpPr>
+          <p:cNvPr id="45" name="n_h"/>
+          <p:cNvSpPr/>
+          <p:nvPr/>
+        </p:nvSpPr>
+        <p:spPr>
+          <a:xfrm>
+            <a:off x="8549640" y="3510788"/>
             <a:ext cx="3185160" cy="152400"/>
           </a:xfrm>
           <a:prstGeom prst="rect">
@@ -11201,7 +12326,7 @@
                 <a:solidFill>
                   <a:srgbClr val="16181D"/>
                 </a:solidFill>
-                <a:latin typeface="Inter"/>
+                <a:latin typeface="Arial"/>
               </a:rPr>
               <a:t>What drove the quarter</a:t>
             </a:r>
@@ -11210,13 +12335,13 @@
       </p:sp>
       <p:sp>
         <p:nvSpPr>
-          <p:cNvPr id="42" name="n1"/>
+          <p:cNvPr id="46" name="n1"/>
           <p:cNvSpPr/>
           <p:nvPr/>
         </p:nvSpPr>
         <p:spPr>
           <a:xfrm>
-            <a:off x="8549640" y="4501388"/>
+            <a:off x="8549640" y="3718052"/>
             <a:ext cx="3185160" cy="476250"/>
           </a:xfrm>
           <a:prstGeom prst="rect">
@@ -11240,7 +12365,7 @@
               <a:spcAft>
                 <a:spcPts val="300"/>
               </a:spcAft>
-              <a:buFont typeface="Inter"/>
+              <a:buFont typeface="Arial"/>
               <a:buChar char="•"/>
             </a:pPr>
             <a:r>
@@ -11248,9 +12373,9 @@
                 <a:solidFill>
                   <a:srgbClr val="16181D"/>
                 </a:solidFill>
-                <a:latin typeface="Inter"/>
+                <a:latin typeface="Arial"/>
               </a:rPr>
-              <a:t>Net new ARR of $83M was a record, $17M above</a:t>
+              <a:t>Net new ARR of $83M was a record, $17M above the</a:t>
             </a:r>
             <a:br/>
             <a:r>
@@ -11258,9 +12383,9 @@
                 <a:solidFill>
                   <a:srgbClr val="16181D"/>
                 </a:solidFill>
-                <a:latin typeface="Inter"/>
+                <a:latin typeface="Arial"/>
               </a:rPr>
-              <a:t>the prior high, as customers above $1M ARR rose</a:t>
+              <a:t>prior high, as customers above $1M ARR rose 34.6%</a:t>
             </a:r>
             <a:br/>
             <a:r>
@@ -11268,22 +12393,22 @@
                 <a:solidFill>
                   <a:srgbClr val="16181D"/>
                 </a:solidFill>
-                <a:latin typeface="Inter"/>
+                <a:latin typeface="Arial"/>
               </a:rPr>
-              <a:t>34.6% to 109.</a:t>
+              <a:t>to 109.</a:t>
             </a:r>
           </a:p>
         </p:txBody>
       </p:sp>
       <p:sp>
         <p:nvSpPr>
-          <p:cNvPr id="43" name="n2"/>
+          <p:cNvPr id="47" name="n2"/>
           <p:cNvSpPr/>
           <p:nvPr/>
         </p:nvSpPr>
         <p:spPr>
           <a:xfrm>
-            <a:off x="8549640" y="5032502"/>
+            <a:off x="8549640" y="4249166"/>
             <a:ext cx="3185160" cy="330200"/>
           </a:xfrm>
           <a:prstGeom prst="rect">
@@ -11307,7 +12432,7 @@
               <a:spcAft>
                 <a:spcPts val="300"/>
               </a:spcAft>
-              <a:buFont typeface="Inter"/>
+              <a:buFont typeface="Arial"/>
               <a:buChar char="•"/>
             </a:pPr>
             <a:r>
@@ -11315,9 +12440,9 @@
                 <a:solidFill>
                   <a:srgbClr val="16181D"/>
                 </a:solidFill>
-                <a:latin typeface="Inter"/>
+                <a:latin typeface="Arial"/>
               </a:rPr>
-              <a:t>Net revenue retention rose for a third quarter, to</a:t>
+              <a:t>Net revenue retention rose for a third quarter, to 119%</a:t>
             </a:r>
             <a:br/>
             <a:r>
@@ -11325,22 +12450,22 @@
                 <a:solidFill>
                   <a:srgbClr val="16181D"/>
                 </a:solidFill>
-                <a:latin typeface="Inter"/>
+                <a:latin typeface="Arial"/>
               </a:rPr>
-              <a:t>119% from 116%.</a:t>
+              <a:t>from 116%.</a:t>
             </a:r>
           </a:p>
         </p:txBody>
       </p:sp>
       <p:sp>
         <p:nvSpPr>
-          <p:cNvPr id="44" name="n3"/>
+          <p:cNvPr id="48" name="n3"/>
           <p:cNvSpPr/>
           <p:nvPr/>
         </p:nvSpPr>
         <p:spPr>
           <a:xfrm>
-            <a:off x="8549640" y="5417566"/>
+            <a:off x="8549640" y="4634230"/>
             <a:ext cx="3185160" cy="330200"/>
           </a:xfrm>
           <a:prstGeom prst="rect">
@@ -11364,7 +12489,7 @@
               <a:spcAft>
                 <a:spcPts val="300"/>
               </a:spcAft>
-              <a:buFont typeface="Inter"/>
+              <a:buFont typeface="Arial"/>
               <a:buChar char="•"/>
             </a:pPr>
             <a:r>
@@ -11372,7 +12497,7 @@
                 <a:solidFill>
                   <a:srgbClr val="16181D"/>
                 </a:solidFill>
-                <a:latin typeface="Inter"/>
+                <a:latin typeface="Arial"/>
               </a:rPr>
               <a:t>Sales and marketing fell to 35.8% of revenue from</a:t>
             </a:r>
@@ -11382,7 +12507,7 @@
                 <a:solidFill>
                   <a:srgbClr val="16181D"/>
                 </a:solidFill>
-                <a:latin typeface="Inter"/>
+                <a:latin typeface="Arial"/>
               </a:rPr>
               <a:t>38.9%, 3.1 of the 5.4 points of margin gained.</a:t>
             </a:r>
@@ -11391,64 +12516,7 @@
       </p:sp>
       <p:sp>
         <p:nvSpPr>
-          <p:cNvPr id="45" name="n4"/>
-          <p:cNvSpPr/>
-          <p:nvPr/>
-        </p:nvSpPr>
-        <p:spPr>
-          <a:xfrm>
-            <a:off x="8549640" y="5802630"/>
-            <a:ext cx="3185160" cy="330200"/>
-          </a:xfrm>
-          <a:prstGeom prst="rect">
-            <a:avLst/>
-          </a:prstGeom>
-          <a:noFill/>
-        </p:spPr>
-        <p:txBody>
-          <a:bodyPr wrap="square" lIns="0" tIns="0" rIns="0" bIns="0" anchor="t">
-            <a:noAutofit/>
-          </a:bodyPr>
-          <a:lstStyle/>
-          <a:p>
-            <a:pPr algn="l" lvl="0" marL="109728" indent="-109728">
-              <a:lnSpc>
-                <a:spcPts val="1150"/>
-              </a:lnSpc>
-              <a:spcBef>
-                <a:spcPts val="0"/>
-              </a:spcBef>
-              <a:spcAft>
-                <a:spcPts val="300"/>
-              </a:spcAft>
-              <a:buFont typeface="Inter"/>
-              <a:buChar char="•"/>
-            </a:pPr>
-            <a:r>
-              <a:rPr sz="1000" b="0" i="0">
-                <a:solidFill>
-                  <a:srgbClr val="16181D"/>
-                </a:solidFill>
-                <a:latin typeface="Inter"/>
-              </a:rPr>
-              <a:t>FY2026 revenue guidance raised to $1,394.4-</a:t>
-            </a:r>
-            <a:br/>
-            <a:r>
-              <a:rPr sz="1000" b="0" i="0">
-                <a:solidFill>
-                  <a:srgbClr val="16181D"/>
-                </a:solidFill>
-                <a:latin typeface="Inter"/>
-              </a:rPr>
-              <a:t>1,398.4M.</a:t>
-            </a:r>
-          </a:p>
-        </p:txBody>
-      </p:sp>
-      <p:sp>
-        <p:nvSpPr>
-          <p:cNvPr id="46" name="source"/>
+          <p:cNvPr id="49" name="source"/>
           <p:cNvSpPr/>
           <p:nvPr/>
         </p:nvSpPr>
@@ -11485,9 +12553,9 @@
                 <a:solidFill>
                   <a:srgbClr val="596070"/>
                 </a:solidFill>
-                <a:latin typeface="Inter"/>
+                <a:latin typeface="Arial"/>
               </a:rPr>
-              <a:t>Source: Corvane Software management accounts (fictional; illustrative figures). Non-GAAP unless stated; fiscal year ends December. Bars: nine quarters, Q3 FY24 to Q3 FY26; Q3 FY26 in indigo.</a:t>
+              <a:t>Source: Corvane Software management accounts (fictional; illustrative figures). Non-GAAP unless stated; fiscal year ends December.</a:t>
             </a:r>
           </a:p>
         </p:txBody>
@@ -11540,7 +12608,7 @@
                 <a:solidFill>
                   <a:srgbClr val="596070"/>
                 </a:solidFill>
-                <a:latin typeface="Inter"/>
+                <a:latin typeface="Arial"/>
               </a:rPr>
               <a:t>Corvane Software (fictional company)  |  Q3 FY2026 earnings  |  Illustrative figures, non-GAAP unless stated</a:t>
             </a:r>
@@ -11575,7 +12643,7 @@
                 <a:solidFill>
                   <a:srgbClr val="596070"/>
                 </a:solidFill>
-                <a:latin typeface="Inter"/>
+                <a:latin typeface="Arial"/>
               </a:rPr>
               <a:t>1</a:t>
             </a:fld>
@@ -11621,7 +12689,7 @@
                 <a:solidFill>
                   <a:srgbClr val="2E3A9E"/>
                 </a:solidFill>
-                <a:latin typeface="Inter"/>
+                <a:latin typeface="Arial"/>
               </a:rPr>
               <a:t>Q3 FY2026 RESULTS  |  REVENUE AND ARR</a:t>
             </a:r>
@@ -11667,7 +12735,7 @@
                 <a:solidFill>
                   <a:srgbClr val="16181D"/>
                 </a:solidFill>
-                <a:latin typeface="Inter"/>
+                <a:latin typeface="Arial"/>
               </a:rPr>
               <a:t>ARR grew 22.2% to $1,498M on a record $83M of net new ARR</a:t>
             </a:r>
@@ -11713,7 +12781,7 @@
                 <a:solidFill>
                   <a:srgbClr val="16181D"/>
                 </a:solidFill>
-                <a:latin typeface="Inter"/>
+                <a:latin typeface="Arial"/>
               </a:rPr>
               <a:t>Total revenue</a:t>
             </a:r>
@@ -11759,7 +12827,7 @@
                 <a:solidFill>
                   <a:srgbClr val="596070"/>
                 </a:solidFill>
-                <a:latin typeface="Inter"/>
+                <a:latin typeface="Arial"/>
               </a:rPr>
               <a:t>$M by fiscal quarter; growth on the same quarter a year before beneath</a:t>
             </a:r>
@@ -11823,7 +12891,7 @@
                 <a:solidFill>
                   <a:srgbClr val="16181D"/>
                 </a:solidFill>
-                <a:latin typeface="Inter"/>
+                <a:latin typeface="Arial"/>
               </a:rPr>
               <a:t>Net new ARR</a:t>
             </a:r>
@@ -11869,7 +12937,7 @@
                 <a:solidFill>
                   <a:srgbClr val="596070"/>
                 </a:solidFill>
-                <a:latin typeface="Inter"/>
+                <a:latin typeface="Arial"/>
               </a:rPr>
               <a:t>$M added in the quarter; ending ARR ($M) and its growth beneath</a:t>
             </a:r>
@@ -11933,7 +13001,7 @@
                 <a:solidFill>
                   <a:srgbClr val="16181D"/>
                 </a:solidFill>
-                <a:latin typeface="Inter"/>
+                <a:latin typeface="Arial"/>
               </a:rPr>
               <a:t>What moved</a:t>
             </a:r>
@@ -11972,7 +13040,7 @@
               <a:spcAft>
                 <a:spcPts val="300"/>
               </a:spcAft>
-              <a:buFont typeface="Inter"/>
+              <a:buFont typeface="Arial"/>
               <a:buChar char="•"/>
             </a:pPr>
             <a:r>
@@ -11980,7 +13048,7 @@
                 <a:solidFill>
                   <a:srgbClr val="16181D"/>
                 </a:solidFill>
-                <a:latin typeface="Inter"/>
+                <a:latin typeface="Arial"/>
               </a:rPr>
               <a:t>Net new ARR of $83M was 43.1% above Q3</a:t>
             </a:r>
@@ -11990,9 +13058,9 @@
                 <a:solidFill>
                   <a:srgbClr val="16181D"/>
                 </a:solidFill>
-                <a:latin typeface="Inter"/>
+                <a:latin typeface="Arial"/>
               </a:rPr>
-              <a:t>FY25's $58M and $17M above the prior</a:t>
+              <a:t>FY25's $58M and $17M above the prior record</a:t>
             </a:r>
             <a:br/>
             <a:r>
@@ -12000,9 +13068,9 @@
                 <a:solidFill>
                   <a:srgbClr val="16181D"/>
                 </a:solidFill>
-                <a:latin typeface="Inter"/>
+                <a:latin typeface="Arial"/>
               </a:rPr>
-              <a:t>record of $66M.</a:t>
+              <a:t>of $66M.</a:t>
             </a:r>
           </a:p>
         </p:txBody>
@@ -12039,7 +13107,7 @@
               <a:spcAft>
                 <a:spcPts val="300"/>
               </a:spcAft>
-              <a:buFont typeface="Inter"/>
+              <a:buFont typeface="Arial"/>
               <a:buChar char="•"/>
             </a:pPr>
             <a:r>
@@ -12047,9 +13115,9 @@
                 <a:solidFill>
                   <a:srgbClr val="16181D"/>
                 </a:solidFill>
-                <a:latin typeface="Inter"/>
+                <a:latin typeface="Arial"/>
               </a:rPr>
-              <a:t>ARR growth of 22.2% ran 0.9 points ahead</a:t>
+              <a:t>ARR growth of 22.2% ran 0.9 points ahead of</a:t>
             </a:r>
             <a:br/>
             <a:r>
@@ -12057,9 +13125,9 @@
                 <a:solidFill>
                   <a:srgbClr val="16181D"/>
                 </a:solidFill>
-                <a:latin typeface="Inter"/>
+                <a:latin typeface="Arial"/>
               </a:rPr>
-              <a:t>of revenue growth.</a:t>
+              <a:t>revenue growth.</a:t>
             </a:r>
           </a:p>
         </p:txBody>
@@ -12073,7 +13141,7 @@
         <p:spPr>
           <a:xfrm>
             <a:off x="8953218" y="2121662"/>
-            <a:ext cx="2781582" cy="476250"/>
+            <a:ext cx="2781582" cy="622300"/>
           </a:xfrm>
           <a:prstGeom prst="rect">
             <a:avLst/>
@@ -12096,7 +13164,7 @@
               <a:spcAft>
                 <a:spcPts val="300"/>
               </a:spcAft>
-              <a:buFont typeface="Inter"/>
+              <a:buFont typeface="Arial"/>
               <a:buChar char="•"/>
             </a:pPr>
             <a:r>
@@ -12104,9 +13172,9 @@
                 <a:solidFill>
                   <a:srgbClr val="16181D"/>
                 </a:solidFill>
-                <a:latin typeface="Inter"/>
+                <a:latin typeface="Arial"/>
               </a:rPr>
-              <a:t>ARR growth rose to 22.2% after four</a:t>
+              <a:t>ARR growth rose to 22.2% after four quarters</a:t>
             </a:r>
             <a:br/>
             <a:r>
@@ -12114,9 +13182,9 @@
                 <a:solidFill>
                   <a:srgbClr val="16181D"/>
                 </a:solidFill>
-                <a:latin typeface="Inter"/>
+                <a:latin typeface="Arial"/>
               </a:rPr>
-              <a:t>quarters at 21.0-21.1%; revenue growth held</a:t>
+              <a:t>between 21.0% and 21.1%; revenue growth</a:t>
             </a:r>
             <a:br/>
             <a:r>
@@ -12124,9 +13192,19 @@
                 <a:solidFill>
                   <a:srgbClr val="16181D"/>
                 </a:solidFill>
-                <a:latin typeface="Inter"/>
+                <a:latin typeface="Arial"/>
               </a:rPr>
-              <a:t>at 21.3-21.7% for five quarters.</a:t>
+              <a:t>held between 21.3% and 21.7% for five</a:t>
+            </a:r>
+            <a:br/>
+            <a:r>
+              <a:rPr sz="1000" b="0" i="0">
+                <a:solidFill>
+                  <a:srgbClr val="16181D"/>
+                </a:solidFill>
+                <a:latin typeface="Arial"/>
+              </a:rPr>
+              <a:t>quarters.</a:t>
             </a:r>
           </a:p>
         </p:txBody>
@@ -12139,7 +13217,7 @@
         </p:nvSpPr>
         <p:spPr>
           <a:xfrm>
-            <a:off x="8953218" y="2652776"/>
+            <a:off x="8953218" y="2798826"/>
             <a:ext cx="2781582" cy="167640"/>
           </a:xfrm>
           <a:prstGeom prst="rect">
@@ -12170,7 +13248,7 @@
                 <a:solidFill>
                   <a:srgbClr val="16181D"/>
                 </a:solidFill>
-                <a:latin typeface="Inter"/>
+                <a:latin typeface="Arial"/>
               </a:rPr>
               <a:t>Revenue by type</a:t>
             </a:r>
@@ -12185,7 +13263,7 @@
         </p:nvSpPr>
         <p:spPr>
           <a:xfrm>
-            <a:off x="8953218" y="2875280"/>
+            <a:off x="8953218" y="3021330"/>
             <a:ext cx="2781582" cy="121920"/>
           </a:xfrm>
           <a:prstGeom prst="rect">
@@ -12216,7 +13294,7 @@
                 <a:solidFill>
                   <a:srgbClr val="596070"/>
                 </a:solidFill>
-                <a:latin typeface="Inter"/>
+                <a:latin typeface="Arial"/>
               </a:rPr>
               <a:t>subscription 95.7% of revenue in Q3 FY26</a:t>
             </a:r>
@@ -12232,7 +13310,7 @@
           <p:nvPr/>
         </p:nvGraphicFramePr>
         <p:xfrm>
-          <a:off x="8953218" y="3052064"/>
+          <a:off x="8953218" y="3198114"/>
           <a:ext cx="2781582" cy="769112"/>
         </p:xfrm>
         <a:graphic>
@@ -12240,10 +13318,10 @@
             <a:tbl>
               <a:tblPr firstRow="0" bandRow="0" lastRow="0" firstCol="0" lastCol="0" bandCol="0"/>
               <a:tblGrid>
-                <a:gridCol w="938569"/>
-                <a:gridCol w="630602"/>
-                <a:gridCol w="631921"/>
-                <a:gridCol w="580490"/>
+                <a:gridCol w="961942"/>
+                <a:gridCol w="632579"/>
+                <a:gridCol w="632579"/>
+                <a:gridCol w="554482"/>
               </a:tblGrid>
               <a:tr h="192278">
                 <a:tc>
@@ -12257,7 +13335,7 @@
                           <a:solidFill>
                             <a:srgbClr val="16181D"/>
                           </a:solidFill>
-                          <a:latin typeface="Inter"/>
+                          <a:latin typeface="Arial"/>
                         </a:rPr>
                         <a:t>$M</a:t>
                       </a:r>
@@ -12265,7 +13343,7 @@
                         <a:solidFill>
                           <a:srgbClr val="16181D"/>
                         </a:solidFill>
-                        <a:latin typeface="Inter"/>
+                        <a:latin typeface="Arial"/>
                       </a:endParaRPr>
                     </a:p>
                   </a:txBody>
@@ -12298,7 +13376,7 @@
                           <a:solidFill>
                             <a:srgbClr val="16181D"/>
                           </a:solidFill>
-                          <a:latin typeface="Inter"/>
+                          <a:latin typeface="Arial"/>
                         </a:rPr>
                         <a:t>Q3 FY25</a:t>
                       </a:r>
@@ -12306,7 +13384,7 @@
                         <a:solidFill>
                           <a:srgbClr val="16181D"/>
                         </a:solidFill>
-                        <a:latin typeface="Inter"/>
+                        <a:latin typeface="Arial"/>
                       </a:endParaRPr>
                     </a:p>
                   </a:txBody>
@@ -12339,7 +13417,7 @@
                           <a:solidFill>
                             <a:srgbClr val="16181D"/>
                           </a:solidFill>
-                          <a:latin typeface="Inter"/>
+                          <a:latin typeface="Arial"/>
                         </a:rPr>
                         <a:t>Q3 FY26</a:t>
                       </a:r>
@@ -12347,7 +13425,7 @@
                         <a:solidFill>
                           <a:srgbClr val="16181D"/>
                         </a:solidFill>
-                        <a:latin typeface="Inter"/>
+                        <a:latin typeface="Arial"/>
                       </a:endParaRPr>
                     </a:p>
                   </a:txBody>
@@ -12380,7 +13458,7 @@
                           <a:solidFill>
                             <a:srgbClr val="16181D"/>
                           </a:solidFill>
-                          <a:latin typeface="Inter"/>
+                          <a:latin typeface="Arial"/>
                         </a:rPr>
                         <a:t>Y/Y (%)</a:t>
                       </a:r>
@@ -12388,7 +13466,7 @@
                         <a:solidFill>
                           <a:srgbClr val="16181D"/>
                         </a:solidFill>
-                        <a:latin typeface="Inter"/>
+                        <a:latin typeface="Arial"/>
                       </a:endParaRPr>
                     </a:p>
                   </a:txBody>
@@ -12423,7 +13501,7 @@
                           <a:solidFill>
                             <a:srgbClr val="16181D"/>
                           </a:solidFill>
-                          <a:latin typeface="Inter"/>
+                          <a:latin typeface="Arial"/>
                         </a:rPr>
                         <a:t>Subscription</a:t>
                       </a:r>
@@ -12431,7 +13509,7 @@
                         <a:solidFill>
                           <a:srgbClr val="16181D"/>
                         </a:solidFill>
-                        <a:latin typeface="Inter"/>
+                        <a:latin typeface="Arial"/>
                       </a:endParaRPr>
                     </a:p>
                   </a:txBody>
@@ -12466,7 +13544,7 @@
                           <a:solidFill>
                             <a:srgbClr val="16181D"/>
                           </a:solidFill>
-                          <a:latin typeface="Inter"/>
+                          <a:latin typeface="Arial"/>
                         </a:rPr>
                         <a:t>280.3</a:t>
                       </a:r>
@@ -12474,7 +13552,7 @@
                         <a:solidFill>
                           <a:srgbClr val="16181D"/>
                         </a:solidFill>
-                        <a:latin typeface="Inter"/>
+                        <a:latin typeface="Arial"/>
                       </a:endParaRPr>
                     </a:p>
                   </a:txBody>
@@ -12509,7 +13587,7 @@
                           <a:solidFill>
                             <a:srgbClr val="2E3A9E"/>
                           </a:solidFill>
-                          <a:latin typeface="Inter"/>
+                          <a:latin typeface="Arial"/>
                         </a:rPr>
                         <a:t>342.8</a:t>
                       </a:r>
@@ -12517,7 +13595,7 @@
                         <a:solidFill>
                           <a:srgbClr val="2E3A9E"/>
                         </a:solidFill>
-                        <a:latin typeface="Inter"/>
+                        <a:latin typeface="Arial"/>
                       </a:endParaRPr>
                     </a:p>
                   </a:txBody>
@@ -12552,7 +13630,7 @@
                           <a:solidFill>
                             <a:srgbClr val="16181D"/>
                           </a:solidFill>
-                          <a:latin typeface="Inter"/>
+                          <a:latin typeface="Arial"/>
                         </a:rPr>
                         <a:t>22.3</a:t>
                       </a:r>
@@ -12560,7 +13638,7 @@
                         <a:solidFill>
                           <a:srgbClr val="16181D"/>
                         </a:solidFill>
-                        <a:latin typeface="Inter"/>
+                        <a:latin typeface="Arial"/>
                       </a:endParaRPr>
                     </a:p>
                   </a:txBody>
@@ -12597,7 +13675,7 @@
                           <a:solidFill>
                             <a:srgbClr val="16181D"/>
                           </a:solidFill>
-                          <a:latin typeface="Inter"/>
+                          <a:latin typeface="Arial"/>
                         </a:rPr>
                         <a:t>Services</a:t>
                       </a:r>
@@ -12605,7 +13683,7 @@
                         <a:solidFill>
                           <a:srgbClr val="16181D"/>
                         </a:solidFill>
-                        <a:latin typeface="Inter"/>
+                        <a:latin typeface="Arial"/>
                       </a:endParaRPr>
                     </a:p>
                   </a:txBody>
@@ -12640,7 +13718,7 @@
                           <a:solidFill>
                             <a:srgbClr val="16181D"/>
                           </a:solidFill>
-                          <a:latin typeface="Inter"/>
+                          <a:latin typeface="Arial"/>
                         </a:rPr>
                         <a:t>14.9</a:t>
                       </a:r>
@@ -12648,7 +13726,7 @@
                         <a:solidFill>
                           <a:srgbClr val="16181D"/>
                         </a:solidFill>
-                        <a:latin typeface="Inter"/>
+                        <a:latin typeface="Arial"/>
                       </a:endParaRPr>
                     </a:p>
                   </a:txBody>
@@ -12683,7 +13761,7 @@
                           <a:solidFill>
                             <a:srgbClr val="2E3A9E"/>
                           </a:solidFill>
-                          <a:latin typeface="Inter"/>
+                          <a:latin typeface="Arial"/>
                         </a:rPr>
                         <a:t>15.4</a:t>
                       </a:r>
@@ -12691,7 +13769,7 @@
                         <a:solidFill>
                           <a:srgbClr val="2E3A9E"/>
                         </a:solidFill>
-                        <a:latin typeface="Inter"/>
+                        <a:latin typeface="Arial"/>
                       </a:endParaRPr>
                     </a:p>
                   </a:txBody>
@@ -12726,7 +13804,7 @@
                           <a:solidFill>
                             <a:srgbClr val="16181D"/>
                           </a:solidFill>
-                          <a:latin typeface="Inter"/>
+                          <a:latin typeface="Arial"/>
                         </a:rPr>
                         <a:t>3.4</a:t>
                       </a:r>
@@ -12734,7 +13812,7 @@
                         <a:solidFill>
                           <a:srgbClr val="16181D"/>
                         </a:solidFill>
-                        <a:latin typeface="Inter"/>
+                        <a:latin typeface="Arial"/>
                       </a:endParaRPr>
                     </a:p>
                   </a:txBody>
@@ -12771,7 +13849,7 @@
                           <a:solidFill>
                             <a:srgbClr val="16181D"/>
                           </a:solidFill>
-                          <a:latin typeface="Inter"/>
+                          <a:latin typeface="Arial"/>
                         </a:rPr>
                         <a:t>Total revenue</a:t>
                       </a:r>
@@ -12779,7 +13857,7 @@
                         <a:solidFill>
                           <a:srgbClr val="16181D"/>
                         </a:solidFill>
-                        <a:latin typeface="Inter"/>
+                        <a:latin typeface="Arial"/>
                       </a:endParaRPr>
                     </a:p>
                   </a:txBody>
@@ -12814,7 +13892,7 @@
                           <a:solidFill>
                             <a:srgbClr val="16181D"/>
                           </a:solidFill>
-                          <a:latin typeface="Inter"/>
+                          <a:latin typeface="Arial"/>
                         </a:rPr>
                         <a:t>295.2</a:t>
                       </a:r>
@@ -12822,7 +13900,7 @@
                         <a:solidFill>
                           <a:srgbClr val="16181D"/>
                         </a:solidFill>
-                        <a:latin typeface="Inter"/>
+                        <a:latin typeface="Arial"/>
                       </a:endParaRPr>
                     </a:p>
                   </a:txBody>
@@ -12857,7 +13935,7 @@
                           <a:solidFill>
                             <a:srgbClr val="2E3A9E"/>
                           </a:solidFill>
-                          <a:latin typeface="Inter"/>
+                          <a:latin typeface="Arial"/>
                         </a:rPr>
                         <a:t>358.2</a:t>
                       </a:r>
@@ -12865,7 +13943,7 @@
                         <a:solidFill>
                           <a:srgbClr val="2E3A9E"/>
                         </a:solidFill>
-                        <a:latin typeface="Inter"/>
+                        <a:latin typeface="Arial"/>
                       </a:endParaRPr>
                     </a:p>
                   </a:txBody>
@@ -12900,7 +13978,7 @@
                           <a:solidFill>
                             <a:srgbClr val="16181D"/>
                           </a:solidFill>
-                          <a:latin typeface="Inter"/>
+                          <a:latin typeface="Arial"/>
                         </a:rPr>
                         <a:t>21.3</a:t>
                       </a:r>
@@ -12908,7 +13986,7 @@
                         <a:solidFill>
                           <a:srgbClr val="16181D"/>
                         </a:solidFill>
-                        <a:latin typeface="Inter"/>
+                        <a:latin typeface="Arial"/>
                       </a:endParaRPr>
                     </a:p>
                   </a:txBody>
@@ -12945,8 +14023,8 @@
         </p:nvSpPr>
         <p:spPr>
           <a:xfrm>
-            <a:off x="8953218" y="3876040"/>
-            <a:ext cx="2781582" cy="342900"/>
+            <a:off x="8953218" y="4022090"/>
+            <a:ext cx="2781582" cy="228600"/>
           </a:xfrm>
           <a:prstGeom prst="rect">
             <a:avLst/>
@@ -12976,7 +14054,7 @@
                 <a:solidFill>
                   <a:srgbClr val="596070"/>
                 </a:solidFill>
-                <a:latin typeface="Inter"/>
+                <a:latin typeface="Arial"/>
               </a:rPr>
               <a:t>ARR: annualised value of subscription contracts in force at</a:t>
             </a:r>
@@ -12986,19 +14064,9 @@
                 <a:solidFill>
                   <a:srgbClr val="596070"/>
                 </a:solidFill>
-                <a:latin typeface="Inter"/>
+                <a:latin typeface="Arial"/>
               </a:rPr>
-              <a:t>quarter end. Net new ARR: the change in ARR over the</a:t>
-            </a:r>
-            <a:br/>
-            <a:r>
-              <a:rPr sz="750" b="0" i="0">
-                <a:solidFill>
-                  <a:srgbClr val="596070"/>
-                </a:solidFill>
-                <a:latin typeface="Inter"/>
-              </a:rPr>
-              <a:t>quarter.</a:t>
+              <a:t>quarter end. Net new ARR: the change in ARR over the quarter.</a:t>
             </a:r>
           </a:p>
         </p:txBody>
@@ -13042,7 +14110,7 @@
                 <a:solidFill>
                   <a:srgbClr val="596070"/>
                 </a:solidFill>
-                <a:latin typeface="Inter"/>
+                <a:latin typeface="Arial"/>
               </a:rPr>
               <a:t>Source: Corvane Software management accounts (fictional; illustrative figures). Non-GAAP unless stated; fiscal year ends December.</a:t>
             </a:r>
@@ -13057,8 +14125,8 @@
         </p:nvSpPr>
         <p:spPr>
           <a:xfrm>
-            <a:off x="919687" y="5357104"/>
-            <a:ext cx="337777" cy="121920"/>
+            <a:off x="924300" y="5357104"/>
+            <a:ext cx="328550" cy="121920"/>
           </a:xfrm>
           <a:prstGeom prst="rect">
             <a:avLst/>
@@ -13088,7 +14156,7 @@
                 <a:solidFill>
                   <a:srgbClr val="16181D"/>
                 </a:solidFill>
-                <a:latin typeface="Inter"/>
+                <a:latin typeface="Arial"/>
               </a:rPr>
               <a:t>27.0%</a:t>
             </a:r>
@@ -13103,8 +14171,8 @@
         </p:nvSpPr>
         <p:spPr>
           <a:xfrm>
-            <a:off x="1301106" y="5357104"/>
-            <a:ext cx="352015" cy="121920"/>
+            <a:off x="1312839" y="5357104"/>
+            <a:ext cx="328550" cy="121920"/>
           </a:xfrm>
           <a:prstGeom prst="rect">
             <a:avLst/>
@@ -13134,7 +14202,7 @@
                 <a:solidFill>
                   <a:srgbClr val="16181D"/>
                 </a:solidFill>
-                <a:latin typeface="Inter"/>
+                <a:latin typeface="Arial"/>
               </a:rPr>
               <a:t>25.0%</a:t>
             </a:r>
@@ -13149,8 +14217,8 @@
         </p:nvSpPr>
         <p:spPr>
           <a:xfrm>
-            <a:off x="1688851" y="5357104"/>
-            <a:ext cx="353602" cy="121920"/>
+            <a:off x="1701377" y="5357104"/>
+            <a:ext cx="328550" cy="121920"/>
           </a:xfrm>
           <a:prstGeom prst="rect">
             <a:avLst/>
@@ -13180,7 +14248,7 @@
                 <a:solidFill>
                   <a:srgbClr val="16181D"/>
                 </a:solidFill>
-                <a:latin typeface="Inter"/>
+                <a:latin typeface="Arial"/>
               </a:rPr>
               <a:t>24.0%</a:t>
             </a:r>
@@ -13195,8 +14263,8 @@
         </p:nvSpPr>
         <p:spPr>
           <a:xfrm>
-            <a:off x="2077463" y="5357104"/>
-            <a:ext cx="353454" cy="121920"/>
+            <a:off x="2089915" y="5357104"/>
+            <a:ext cx="328550" cy="121920"/>
           </a:xfrm>
           <a:prstGeom prst="rect">
             <a:avLst/>
@@ -13226,7 +14294,7 @@
                 <a:solidFill>
                   <a:srgbClr val="16181D"/>
                 </a:solidFill>
-                <a:latin typeface="Inter"/>
+                <a:latin typeface="Arial"/>
               </a:rPr>
               <a:t>23.0%</a:t>
             </a:r>
@@ -13241,8 +14309,8 @@
         </p:nvSpPr>
         <p:spPr>
           <a:xfrm>
-            <a:off x="2478305" y="5357104"/>
-            <a:ext cx="328847" cy="121920"/>
+            <a:off x="2478454" y="5357104"/>
+            <a:ext cx="328550" cy="121920"/>
           </a:xfrm>
           <a:prstGeom prst="rect">
             <a:avLst/>
@@ -13272,7 +14340,7 @@
                 <a:solidFill>
                   <a:srgbClr val="16181D"/>
                 </a:solidFill>
-                <a:latin typeface="Inter"/>
+                <a:latin typeface="Arial"/>
               </a:rPr>
               <a:t>21.7%</a:t>
             </a:r>
@@ -13287,8 +14355,8 @@
         </p:nvSpPr>
         <p:spPr>
           <a:xfrm>
-            <a:off x="2862056" y="5357104"/>
-            <a:ext cx="338422" cy="121920"/>
+            <a:off x="2866992" y="5357104"/>
+            <a:ext cx="328550" cy="121920"/>
           </a:xfrm>
           <a:prstGeom prst="rect">
             <a:avLst/>
@@ -13318,7 +14386,7 @@
                 <a:solidFill>
                   <a:srgbClr val="16181D"/>
                 </a:solidFill>
-                <a:latin typeface="Inter"/>
+                <a:latin typeface="Arial"/>
               </a:rPr>
               <a:t>21.4%</a:t>
             </a:r>
@@ -13333,8 +14401,8 @@
         </p:nvSpPr>
         <p:spPr>
           <a:xfrm>
-            <a:off x="3253199" y="5357104"/>
-            <a:ext cx="333213" cy="121920"/>
+            <a:off x="3255531" y="5357104"/>
+            <a:ext cx="328550" cy="121920"/>
           </a:xfrm>
           <a:prstGeom prst="rect">
             <a:avLst/>
@@ -13364,7 +14432,7 @@
                 <a:solidFill>
                   <a:srgbClr val="16181D"/>
                 </a:solidFill>
-                <a:latin typeface="Inter"/>
+                <a:latin typeface="Arial"/>
               </a:rPr>
               <a:t>21.6%</a:t>
             </a:r>
@@ -13379,8 +14447,8 @@
         </p:nvSpPr>
         <p:spPr>
           <a:xfrm>
-            <a:off x="3639133" y="5357104"/>
-            <a:ext cx="338422" cy="121920"/>
+            <a:off x="3644069" y="5357104"/>
+            <a:ext cx="328550" cy="121920"/>
           </a:xfrm>
           <a:prstGeom prst="rect">
             <a:avLst/>
@@ -13410,7 +14478,7 @@
                 <a:solidFill>
                   <a:srgbClr val="16181D"/>
                 </a:solidFill>
-                <a:latin typeface="Inter"/>
+                <a:latin typeface="Arial"/>
               </a:rPr>
               <a:t>21.4%</a:t>
             </a:r>
@@ -13425,8 +14493,8 @@
         </p:nvSpPr>
         <p:spPr>
           <a:xfrm>
-            <a:off x="4022562" y="5357104"/>
-            <a:ext cx="348641" cy="121920"/>
+            <a:off x="4032608" y="5357104"/>
+            <a:ext cx="328550" cy="121920"/>
           </a:xfrm>
           <a:prstGeom prst="rect">
             <a:avLst/>
@@ -13456,7 +14524,7 @@
                 <a:solidFill>
                   <a:srgbClr val="2E3A9E"/>
                 </a:solidFill>
-                <a:latin typeface="Inter"/>
+                <a:latin typeface="Arial"/>
               </a:rPr>
               <a:t>21.3%</a:t>
             </a:r>
@@ -13471,8 +14539,8 @@
         </p:nvSpPr>
         <p:spPr>
           <a:xfrm>
-            <a:off x="679312" y="5357104"/>
-            <a:ext cx="214994" cy="121920"/>
+            <a:off x="690077" y="5357104"/>
+            <a:ext cx="204229" cy="121920"/>
           </a:xfrm>
           <a:prstGeom prst="rect">
             <a:avLst/>
@@ -13502,7 +14570,7 @@
                 <a:solidFill>
                   <a:srgbClr val="596070"/>
                 </a:solidFill>
-                <a:latin typeface="Inter"/>
+                <a:latin typeface="Arial"/>
               </a:rPr>
               <a:t>Y/Y</a:t>
             </a:r>
@@ -13517,8 +14585,8 @@
         </p:nvSpPr>
         <p:spPr>
           <a:xfrm>
-            <a:off x="5198652" y="5357104"/>
-            <a:ext cx="275864" cy="121920"/>
+            <a:off x="5189226" y="5357104"/>
+            <a:ext cx="294716" cy="121920"/>
           </a:xfrm>
           <a:prstGeom prst="rect">
             <a:avLst/>
@@ -13548,7 +14616,7 @@
                 <a:solidFill>
                   <a:srgbClr val="16181D"/>
                 </a:solidFill>
-                <a:latin typeface="Inter"/>
+                <a:latin typeface="Arial"/>
               </a:rPr>
               <a:t>1,012</a:t>
             </a:r>
@@ -13563,8 +14631,8 @@
         </p:nvSpPr>
         <p:spPr>
           <a:xfrm>
-            <a:off x="5575904" y="5357104"/>
-            <a:ext cx="298437" cy="121920"/>
+            <a:off x="5577765" y="5357104"/>
+            <a:ext cx="294716" cy="121920"/>
           </a:xfrm>
           <a:prstGeom prst="rect">
             <a:avLst/>
@@ -13594,7 +14662,7 @@
                 <a:solidFill>
                   <a:srgbClr val="16181D"/>
                 </a:solidFill>
-                <a:latin typeface="Inter"/>
+                <a:latin typeface="Arial"/>
               </a:rPr>
               <a:t>1,068</a:t>
             </a:r>
@@ -13609,8 +14677,8 @@
         </p:nvSpPr>
         <p:spPr>
           <a:xfrm>
-            <a:off x="5990314" y="5357104"/>
-            <a:ext cx="246694" cy="121920"/>
+            <a:off x="5970073" y="5357104"/>
+            <a:ext cx="287175" cy="121920"/>
           </a:xfrm>
           <a:prstGeom prst="rect">
             <a:avLst/>
@@ -13640,7 +14708,7 @@
                 <a:solidFill>
                   <a:srgbClr val="16181D"/>
                 </a:solidFill>
-                <a:latin typeface="Inter"/>
+                <a:latin typeface="Arial"/>
               </a:rPr>
               <a:t>1,115</a:t>
             </a:r>
@@ -13655,8 +14723,8 @@
         </p:nvSpPr>
         <p:spPr>
           <a:xfrm>
-            <a:off x="6367467" y="5357104"/>
-            <a:ext cx="269465" cy="121920"/>
+            <a:off x="6354841" y="5357104"/>
+            <a:ext cx="294716" cy="121920"/>
           </a:xfrm>
           <a:prstGeom prst="rect">
             <a:avLst/>
@@ -13686,7 +14754,7 @@
                 <a:solidFill>
                   <a:srgbClr val="16181D"/>
                 </a:solidFill>
-                <a:latin typeface="Inter"/>
+                <a:latin typeface="Arial"/>
               </a:rPr>
               <a:t>1,168</a:t>
             </a:r>
@@ -13701,8 +14769,8 @@
         </p:nvSpPr>
         <p:spPr>
           <a:xfrm>
-            <a:off x="6741743" y="5357104"/>
-            <a:ext cx="297990" cy="121920"/>
+            <a:off x="6743380" y="5357104"/>
+            <a:ext cx="294716" cy="121920"/>
           </a:xfrm>
           <a:prstGeom prst="rect">
             <a:avLst/>
@@ -13732,7 +14800,7 @@
                 <a:solidFill>
                   <a:srgbClr val="16181D"/>
                 </a:solidFill>
-                <a:latin typeface="Inter"/>
+                <a:latin typeface="Arial"/>
               </a:rPr>
               <a:t>1,226</a:t>
             </a:r>
@@ -13747,8 +14815,8 @@
         </p:nvSpPr>
         <p:spPr>
           <a:xfrm>
-            <a:off x="7130281" y="5357104"/>
-            <a:ext cx="297990" cy="121920"/>
+            <a:off x="7131918" y="5357104"/>
+            <a:ext cx="294716" cy="121920"/>
           </a:xfrm>
           <a:prstGeom prst="rect">
             <a:avLst/>
@@ -13778,7 +14846,7 @@
                 <a:solidFill>
                   <a:srgbClr val="16181D"/>
                 </a:solidFill>
-                <a:latin typeface="Inter"/>
+                <a:latin typeface="Arial"/>
               </a:rPr>
               <a:t>1,292</a:t>
             </a:r>
@@ -13793,8 +14861,8 @@
         </p:nvSpPr>
         <p:spPr>
           <a:xfrm>
-            <a:off x="7517951" y="5357104"/>
-            <a:ext cx="299727" cy="121920"/>
+            <a:off x="7520457" y="5357104"/>
+            <a:ext cx="294716" cy="121920"/>
           </a:xfrm>
           <a:prstGeom prst="rect">
             <a:avLst/>
@@ -13824,7 +14892,7 @@
                 <a:solidFill>
                   <a:srgbClr val="16181D"/>
                 </a:solidFill>
-                <a:latin typeface="Inter"/>
+                <a:latin typeface="Arial"/>
               </a:rPr>
               <a:t>1,349</a:t>
             </a:r>
@@ -13839,8 +14907,8 @@
         </p:nvSpPr>
         <p:spPr>
           <a:xfrm>
-            <a:off x="7917454" y="5357104"/>
-            <a:ext cx="277799" cy="121920"/>
+            <a:off x="7908995" y="5357104"/>
+            <a:ext cx="294716" cy="121920"/>
           </a:xfrm>
           <a:prstGeom prst="rect">
             <a:avLst/>
@@ -13870,7 +14938,7 @@
                 <a:solidFill>
                   <a:srgbClr val="16181D"/>
                 </a:solidFill>
-                <a:latin typeface="Inter"/>
+                <a:latin typeface="Arial"/>
               </a:rPr>
               <a:t>1,415</a:t>
             </a:r>
@@ -13885,8 +14953,8 @@
         </p:nvSpPr>
         <p:spPr>
           <a:xfrm>
-            <a:off x="8285379" y="5357104"/>
-            <a:ext cx="319025" cy="121920"/>
+            <a:off x="8297534" y="5357104"/>
+            <a:ext cx="294716" cy="121920"/>
           </a:xfrm>
           <a:prstGeom prst="rect">
             <a:avLst/>
@@ -13916,7 +14984,7 @@
                 <a:solidFill>
                   <a:srgbClr val="2E3A9E"/>
                 </a:solidFill>
-                <a:latin typeface="Inter"/>
+                <a:latin typeface="Arial"/>
               </a:rPr>
               <a:t>1,498</a:t>
             </a:r>
@@ -13931,8 +14999,8 @@
         </p:nvSpPr>
         <p:spPr>
           <a:xfrm>
-            <a:off x="4900979" y="5357104"/>
-            <a:ext cx="241336" cy="121920"/>
+            <a:off x="4887336" y="5357104"/>
+            <a:ext cx="254979" cy="121920"/>
           </a:xfrm>
           <a:prstGeom prst="rect">
             <a:avLst/>
@@ -13962,7 +15030,7 @@
                 <a:solidFill>
                   <a:srgbClr val="596070"/>
                 </a:solidFill>
-                <a:latin typeface="Inter"/>
+                <a:latin typeface="Arial"/>
               </a:rPr>
               <a:t>ARR</a:t>
             </a:r>
@@ -13977,8 +15045,8 @@
         </p:nvSpPr>
         <p:spPr>
           <a:xfrm>
-            <a:off x="5160899" y="5506456"/>
-            <a:ext cx="351370" cy="121920"/>
+            <a:off x="5172309" y="5506456"/>
+            <a:ext cx="328550" cy="121920"/>
           </a:xfrm>
           <a:prstGeom prst="rect">
             <a:avLst/>
@@ -14008,7 +15076,7 @@
                 <a:solidFill>
                   <a:srgbClr val="16181D"/>
                 </a:solidFill>
-                <a:latin typeface="Inter"/>
+                <a:latin typeface="Arial"/>
               </a:rPr>
               <a:t>26.5%</a:t>
             </a:r>
@@ -14023,8 +15091,8 @@
         </p:nvSpPr>
         <p:spPr>
           <a:xfrm>
-            <a:off x="5548619" y="5506456"/>
-            <a:ext cx="353007" cy="121920"/>
+            <a:off x="5560848" y="5506456"/>
+            <a:ext cx="328550" cy="121920"/>
           </a:xfrm>
           <a:prstGeom prst="rect">
             <a:avLst/>
@@ -14054,7 +15122,7 @@
                 <a:solidFill>
                   <a:srgbClr val="16181D"/>
                 </a:solidFill>
-                <a:latin typeface="Inter"/>
+                <a:latin typeface="Arial"/>
               </a:rPr>
               <a:t>26.2%</a:t>
             </a:r>
@@ -14069,8 +15137,8 @@
         </p:nvSpPr>
         <p:spPr>
           <a:xfrm>
-            <a:off x="5937604" y="5506456"/>
-            <a:ext cx="352114" cy="121920"/>
+            <a:off x="5949386" y="5506456"/>
+            <a:ext cx="328550" cy="121920"/>
           </a:xfrm>
           <a:prstGeom prst="rect">
             <a:avLst/>
@@ -14100,7 +15168,7 @@
                 <a:solidFill>
                   <a:srgbClr val="16181D"/>
                 </a:solidFill>
-                <a:latin typeface="Inter"/>
+                <a:latin typeface="Arial"/>
               </a:rPr>
               <a:t>24.3%</a:t>
             </a:r>
@@ -14115,8 +15183,8 @@
         </p:nvSpPr>
         <p:spPr>
           <a:xfrm>
-            <a:off x="6332988" y="5506456"/>
-            <a:ext cx="338422" cy="121920"/>
+            <a:off x="6337924" y="5506456"/>
+            <a:ext cx="328550" cy="121920"/>
           </a:xfrm>
           <a:prstGeom prst="rect">
             <a:avLst/>
@@ -14146,7 +15214,7 @@
                 <a:solidFill>
                   <a:srgbClr val="16181D"/>
                 </a:solidFill>
-                <a:latin typeface="Inter"/>
+                <a:latin typeface="Arial"/>
               </a:rPr>
               <a:t>21.4%</a:t>
             </a:r>
@@ -14161,8 +15229,8 @@
         </p:nvSpPr>
         <p:spPr>
           <a:xfrm>
-            <a:off x="6738072" y="5506456"/>
-            <a:ext cx="305332" cy="121920"/>
+            <a:off x="6726463" y="5506456"/>
+            <a:ext cx="328550" cy="121920"/>
           </a:xfrm>
           <a:prstGeom prst="rect">
             <a:avLst/>
@@ -14192,7 +15260,7 @@
                 <a:solidFill>
                   <a:srgbClr val="16181D"/>
                 </a:solidFill>
-                <a:latin typeface="Inter"/>
+                <a:latin typeface="Arial"/>
               </a:rPr>
               <a:t>21.1%</a:t>
             </a:r>
@@ -14207,8 +15275,8 @@
         </p:nvSpPr>
         <p:spPr>
           <a:xfrm>
-            <a:off x="7112124" y="5506456"/>
-            <a:ext cx="334304" cy="121920"/>
+            <a:off x="7115001" y="5506456"/>
+            <a:ext cx="328550" cy="121920"/>
           </a:xfrm>
           <a:prstGeom prst="rect">
             <a:avLst/>
@@ -14238,7 +15306,7 @@
                 <a:solidFill>
                   <a:srgbClr val="16181D"/>
                 </a:solidFill>
-                <a:latin typeface="Inter"/>
+                <a:latin typeface="Arial"/>
               </a:rPr>
               <a:t>21.0%</a:t>
             </a:r>
@@ -14253,8 +15321,8 @@
         </p:nvSpPr>
         <p:spPr>
           <a:xfrm>
-            <a:off x="7500663" y="5506456"/>
-            <a:ext cx="334304" cy="121920"/>
+            <a:off x="7503540" y="5506456"/>
+            <a:ext cx="328550" cy="121920"/>
           </a:xfrm>
           <a:prstGeom prst="rect">
             <a:avLst/>
@@ -14284,7 +15352,7 @@
                 <a:solidFill>
                   <a:srgbClr val="16181D"/>
                 </a:solidFill>
-                <a:latin typeface="Inter"/>
+                <a:latin typeface="Arial"/>
               </a:rPr>
               <a:t>21.0%</a:t>
             </a:r>
@@ -14299,8 +15367,8 @@
         </p:nvSpPr>
         <p:spPr>
           <a:xfrm>
-            <a:off x="7903687" y="5506456"/>
-            <a:ext cx="305332" cy="121920"/>
+            <a:off x="7892078" y="5506456"/>
+            <a:ext cx="328550" cy="121920"/>
           </a:xfrm>
           <a:prstGeom prst="rect">
             <a:avLst/>
@@ -14330,7 +15398,7 @@
                 <a:solidFill>
                   <a:srgbClr val="16181D"/>
                 </a:solidFill>
-                <a:latin typeface="Inter"/>
+                <a:latin typeface="Arial"/>
               </a:rPr>
               <a:t>21.1%</a:t>
             </a:r>
@@ -14345,8 +15413,8 @@
         </p:nvSpPr>
         <p:spPr>
           <a:xfrm>
-            <a:off x="8260103" y="5506456"/>
-            <a:ext cx="369577" cy="121920"/>
+            <a:off x="8280617" y="5506456"/>
+            <a:ext cx="328550" cy="121920"/>
           </a:xfrm>
           <a:prstGeom prst="rect">
             <a:avLst/>
@@ -14376,7 +15444,7 @@
                 <a:solidFill>
                   <a:srgbClr val="2E3A9E"/>
                 </a:solidFill>
-                <a:latin typeface="Inter"/>
+                <a:latin typeface="Arial"/>
               </a:rPr>
               <a:t>22.2%</a:t>
             </a:r>
@@ -14391,8 +15459,8 @@
         </p:nvSpPr>
         <p:spPr>
           <a:xfrm>
-            <a:off x="4927321" y="5506456"/>
-            <a:ext cx="214994" cy="121920"/>
+            <a:off x="4938086" y="5506456"/>
+            <a:ext cx="204229" cy="121920"/>
           </a:xfrm>
           <a:prstGeom prst="rect">
             <a:avLst/>
@@ -14422,7 +15490,7 @@
                 <a:solidFill>
                   <a:srgbClr val="596070"/>
                 </a:solidFill>
-                <a:latin typeface="Inter"/>
+                <a:latin typeface="Arial"/>
               </a:rPr>
               <a:t>Y/Y</a:t>
             </a:r>
@@ -14477,7 +15545,7 @@
                 <a:solidFill>
                   <a:srgbClr val="596070"/>
                 </a:solidFill>
-                <a:latin typeface="Inter"/>
+                <a:latin typeface="Arial"/>
               </a:rPr>
               <a:t>Corvane Software (fictional company)  |  Q3 FY2026 earnings  |  Illustrative figures, non-GAAP unless stated</a:t>
             </a:r>
@@ -14512,7 +15580,7 @@
                 <a:solidFill>
                   <a:srgbClr val="596070"/>
                 </a:solidFill>
-                <a:latin typeface="Inter"/>
+                <a:latin typeface="Arial"/>
               </a:rPr>
               <a:t>1</a:t>
             </a:fld>
@@ -14558,7 +15626,7 @@
                 <a:solidFill>
                   <a:srgbClr val="2E3A9E"/>
                 </a:solidFill>
-                <a:latin typeface="Inter"/>
+                <a:latin typeface="Arial"/>
               </a:rPr>
               <a:t>Q3 FY2026 RESULTS  |  UNIT ECONOMICS AND COHORTS</a:t>
             </a:r>
@@ -14604,7 +15672,7 @@
                 <a:solidFill>
                   <a:srgbClr val="16181D"/>
                 </a:solidFill>
-                <a:latin typeface="Inter"/>
+                <a:latin typeface="Arial"/>
               </a:rPr>
               <a:t>Net revenue retention rose for a third quarter to 119%, and the FY2024 cohort expanded</a:t>
             </a:r>
@@ -14614,7 +15682,7 @@
                 <a:solidFill>
                   <a:srgbClr val="16181D"/>
                 </a:solidFill>
-                <a:latin typeface="Inter"/>
+                <a:latin typeface="Arial"/>
               </a:rPr>
               <a:t>fastest in its second year</a:t>
             </a:r>
@@ -14660,7 +15728,7 @@
                 <a:solidFill>
                   <a:srgbClr val="16181D"/>
                 </a:solidFill>
-                <a:latin typeface="Inter"/>
+                <a:latin typeface="Arial"/>
               </a:rPr>
               <a:t>Net and gross revenue retention</a:t>
             </a:r>
@@ -14706,7 +15774,7 @@
                 <a:solidFill>
                   <a:srgbClr val="596070"/>
                 </a:solidFill>
-                <a:latin typeface="Inter"/>
+                <a:latin typeface="Arial"/>
               </a:rPr>
               <a:t>net retention (%, trailing four quarters) plotted; gross retention (GRR, %) beneath</a:t>
             </a:r>
@@ -14770,7 +15838,7 @@
                 <a:solidFill>
                   <a:srgbClr val="16181D"/>
                 </a:solidFill>
-                <a:latin typeface="Inter"/>
+                <a:latin typeface="Arial"/>
               </a:rPr>
               <a:t>Unit economics</a:t>
             </a:r>
@@ -14816,7 +15884,7 @@
                 <a:solidFill>
                   <a:srgbClr val="596070"/>
                 </a:solidFill>
-                <a:latin typeface="Inter"/>
+                <a:latin typeface="Arial"/>
               </a:rPr>
               <a:t>non-GAAP, last five quarters; Q3 FY26 in indigo</a:t>
             </a:r>
@@ -14840,12 +15908,12 @@
             <a:tbl>
               <a:tblPr firstRow="0" bandRow="0" lastRow="0" firstCol="0" lastCol="0" bandCol="0"/>
               <a:tblGrid>
-                <a:gridCol w="2826528"/>
-                <a:gridCol w="592835"/>
-                <a:gridCol w="597781"/>
-                <a:gridCol w="560020"/>
-                <a:gridCol w="591972"/>
-                <a:gridCol w="594487"/>
+                <a:gridCol w="2873517"/>
+                <a:gridCol w="578021"/>
+                <a:gridCol w="578021"/>
+                <a:gridCol w="578021"/>
+                <a:gridCol w="578021"/>
+                <a:gridCol w="578022"/>
               </a:tblGrid>
               <a:tr h="192278">
                 <a:tc>
@@ -14859,7 +15927,7 @@
                           <a:solidFill>
                             <a:srgbClr val="16181D"/>
                           </a:solidFill>
-                          <a:latin typeface="Inter"/>
+                          <a:latin typeface="Arial"/>
                         </a:rPr>
                         <a:t>Metric</a:t>
                       </a:r>
@@ -14867,7 +15935,7 @@
                         <a:solidFill>
                           <a:srgbClr val="16181D"/>
                         </a:solidFill>
-                        <a:latin typeface="Inter"/>
+                        <a:latin typeface="Arial"/>
                       </a:endParaRPr>
                     </a:p>
                   </a:txBody>
@@ -14900,7 +15968,7 @@
                           <a:solidFill>
                             <a:srgbClr val="16181D"/>
                           </a:solidFill>
-                          <a:latin typeface="Inter"/>
+                          <a:latin typeface="Arial"/>
                         </a:rPr>
                         <a:t>Q3'25</a:t>
                       </a:r>
@@ -14908,7 +15976,7 @@
                         <a:solidFill>
                           <a:srgbClr val="16181D"/>
                         </a:solidFill>
-                        <a:latin typeface="Inter"/>
+                        <a:latin typeface="Arial"/>
                       </a:endParaRPr>
                     </a:p>
                   </a:txBody>
@@ -14941,7 +16009,7 @@
                           <a:solidFill>
                             <a:srgbClr val="16181D"/>
                           </a:solidFill>
-                          <a:latin typeface="Inter"/>
+                          <a:latin typeface="Arial"/>
                         </a:rPr>
                         <a:t>Q4'25</a:t>
                       </a:r>
@@ -14949,7 +16017,7 @@
                         <a:solidFill>
                           <a:srgbClr val="16181D"/>
                         </a:solidFill>
-                        <a:latin typeface="Inter"/>
+                        <a:latin typeface="Arial"/>
                       </a:endParaRPr>
                     </a:p>
                   </a:txBody>
@@ -14982,7 +16050,7 @@
                           <a:solidFill>
                             <a:srgbClr val="16181D"/>
                           </a:solidFill>
-                          <a:latin typeface="Inter"/>
+                          <a:latin typeface="Arial"/>
                         </a:rPr>
                         <a:t>Q1'26</a:t>
                       </a:r>
@@ -14990,7 +16058,7 @@
                         <a:solidFill>
                           <a:srgbClr val="16181D"/>
                         </a:solidFill>
-                        <a:latin typeface="Inter"/>
+                        <a:latin typeface="Arial"/>
                       </a:endParaRPr>
                     </a:p>
                   </a:txBody>
@@ -15023,7 +16091,7 @@
                           <a:solidFill>
                             <a:srgbClr val="16181D"/>
                           </a:solidFill>
-                          <a:latin typeface="Inter"/>
+                          <a:latin typeface="Arial"/>
                         </a:rPr>
                         <a:t>Q2'26</a:t>
                       </a:r>
@@ -15031,7 +16099,7 @@
                         <a:solidFill>
                           <a:srgbClr val="16181D"/>
                         </a:solidFill>
-                        <a:latin typeface="Inter"/>
+                        <a:latin typeface="Arial"/>
                       </a:endParaRPr>
                     </a:p>
                   </a:txBody>
@@ -15064,7 +16132,7 @@
                           <a:solidFill>
                             <a:srgbClr val="16181D"/>
                           </a:solidFill>
-                          <a:latin typeface="Inter"/>
+                          <a:latin typeface="Arial"/>
                         </a:rPr>
                         <a:t>Q3'26</a:t>
                       </a:r>
@@ -15072,7 +16140,7 @@
                         <a:solidFill>
                           <a:srgbClr val="16181D"/>
                         </a:solidFill>
-                        <a:latin typeface="Inter"/>
+                        <a:latin typeface="Arial"/>
                       </a:endParaRPr>
                     </a:p>
                   </a:txBody>
@@ -15107,7 +16175,7 @@
                           <a:solidFill>
                             <a:srgbClr val="16181D"/>
                           </a:solidFill>
-                          <a:latin typeface="Inter"/>
+                          <a:latin typeface="Arial"/>
                         </a:rPr>
                         <a:t>Gross margin (%)</a:t>
                       </a:r>
@@ -15115,7 +16183,7 @@
                         <a:solidFill>
                           <a:srgbClr val="16181D"/>
                         </a:solidFill>
-                        <a:latin typeface="Inter"/>
+                        <a:latin typeface="Arial"/>
                       </a:endParaRPr>
                     </a:p>
                   </a:txBody>
@@ -15150,7 +16218,7 @@
                           <a:solidFill>
                             <a:srgbClr val="16181D"/>
                           </a:solidFill>
-                          <a:latin typeface="Inter"/>
+                          <a:latin typeface="Arial"/>
                         </a:rPr>
                         <a:t>79.6</a:t>
                       </a:r>
@@ -15158,7 +16226,7 @@
                         <a:solidFill>
                           <a:srgbClr val="16181D"/>
                         </a:solidFill>
-                        <a:latin typeface="Inter"/>
+                        <a:latin typeface="Arial"/>
                       </a:endParaRPr>
                     </a:p>
                   </a:txBody>
@@ -15193,7 +16261,7 @@
                           <a:solidFill>
                             <a:srgbClr val="16181D"/>
                           </a:solidFill>
-                          <a:latin typeface="Inter"/>
+                          <a:latin typeface="Arial"/>
                         </a:rPr>
                         <a:t>79.9</a:t>
                       </a:r>
@@ -15201,7 +16269,7 @@
                         <a:solidFill>
                           <a:srgbClr val="16181D"/>
                         </a:solidFill>
-                        <a:latin typeface="Inter"/>
+                        <a:latin typeface="Arial"/>
                       </a:endParaRPr>
                     </a:p>
                   </a:txBody>
@@ -15236,7 +16304,7 @@
                           <a:solidFill>
                             <a:srgbClr val="16181D"/>
                           </a:solidFill>
-                          <a:latin typeface="Inter"/>
+                          <a:latin typeface="Arial"/>
                         </a:rPr>
                         <a:t>80.1</a:t>
                       </a:r>
@@ -15244,7 +16312,7 @@
                         <a:solidFill>
                           <a:srgbClr val="16181D"/>
                         </a:solidFill>
-                        <a:latin typeface="Inter"/>
+                        <a:latin typeface="Arial"/>
                       </a:endParaRPr>
                     </a:p>
                   </a:txBody>
@@ -15279,7 +16347,7 @@
                           <a:solidFill>
                             <a:srgbClr val="16181D"/>
                           </a:solidFill>
-                          <a:latin typeface="Inter"/>
+                          <a:latin typeface="Arial"/>
                         </a:rPr>
                         <a:t>80.3</a:t>
                       </a:r>
@@ -15287,7 +16355,7 @@
                         <a:solidFill>
                           <a:srgbClr val="16181D"/>
                         </a:solidFill>
-                        <a:latin typeface="Inter"/>
+                        <a:latin typeface="Arial"/>
                       </a:endParaRPr>
                     </a:p>
                   </a:txBody>
@@ -15322,7 +16390,7 @@
                           <a:solidFill>
                             <a:srgbClr val="2E3A9E"/>
                           </a:solidFill>
-                          <a:latin typeface="Inter"/>
+                          <a:latin typeface="Arial"/>
                         </a:rPr>
                         <a:t>80.4</a:t>
                       </a:r>
@@ -15330,7 +16398,7 @@
                         <a:solidFill>
                           <a:srgbClr val="2E3A9E"/>
                         </a:solidFill>
-                        <a:latin typeface="Inter"/>
+                        <a:latin typeface="Arial"/>
                       </a:endParaRPr>
                     </a:p>
                   </a:txBody>
@@ -15367,7 +16435,7 @@
                           <a:solidFill>
                             <a:srgbClr val="16181D"/>
                           </a:solidFill>
-                          <a:latin typeface="Inter"/>
+                          <a:latin typeface="Arial"/>
                         </a:rPr>
                         <a:t>Sales and marketing (% of revenue)</a:t>
                       </a:r>
@@ -15375,7 +16443,7 @@
                         <a:solidFill>
                           <a:srgbClr val="16181D"/>
                         </a:solidFill>
-                        <a:latin typeface="Inter"/>
+                        <a:latin typeface="Arial"/>
                       </a:endParaRPr>
                     </a:p>
                   </a:txBody>
@@ -15410,7 +16478,7 @@
                           <a:solidFill>
                             <a:srgbClr val="16181D"/>
                           </a:solidFill>
-                          <a:latin typeface="Inter"/>
+                          <a:latin typeface="Arial"/>
                         </a:rPr>
                         <a:t>38.9</a:t>
                       </a:r>
@@ -15418,7 +16486,7 @@
                         <a:solidFill>
                           <a:srgbClr val="16181D"/>
                         </a:solidFill>
-                        <a:latin typeface="Inter"/>
+                        <a:latin typeface="Arial"/>
                       </a:endParaRPr>
                     </a:p>
                   </a:txBody>
@@ -15453,7 +16521,7 @@
                           <a:solidFill>
                             <a:srgbClr val="16181D"/>
                           </a:solidFill>
-                          <a:latin typeface="Inter"/>
+                          <a:latin typeface="Arial"/>
                         </a:rPr>
                         <a:t>38.1</a:t>
                       </a:r>
@@ -15461,7 +16529,7 @@
                         <a:solidFill>
                           <a:srgbClr val="16181D"/>
                         </a:solidFill>
-                        <a:latin typeface="Inter"/>
+                        <a:latin typeface="Arial"/>
                       </a:endParaRPr>
                     </a:p>
                   </a:txBody>
@@ -15496,7 +16564,7 @@
                           <a:solidFill>
                             <a:srgbClr val="16181D"/>
                           </a:solidFill>
-                          <a:latin typeface="Inter"/>
+                          <a:latin typeface="Arial"/>
                         </a:rPr>
                         <a:t>37.0</a:t>
                       </a:r>
@@ -15504,7 +16572,7 @@
                         <a:solidFill>
                           <a:srgbClr val="16181D"/>
                         </a:solidFill>
-                        <a:latin typeface="Inter"/>
+                        <a:latin typeface="Arial"/>
                       </a:endParaRPr>
                     </a:p>
                   </a:txBody>
@@ -15539,7 +16607,7 @@
                           <a:solidFill>
                             <a:srgbClr val="16181D"/>
                           </a:solidFill>
-                          <a:latin typeface="Inter"/>
+                          <a:latin typeface="Arial"/>
                         </a:rPr>
                         <a:t>36.2</a:t>
                       </a:r>
@@ -15547,7 +16615,7 @@
                         <a:solidFill>
                           <a:srgbClr val="16181D"/>
                         </a:solidFill>
-                        <a:latin typeface="Inter"/>
+                        <a:latin typeface="Arial"/>
                       </a:endParaRPr>
                     </a:p>
                   </a:txBody>
@@ -15582,7 +16650,7 @@
                           <a:solidFill>
                             <a:srgbClr val="2E3A9E"/>
                           </a:solidFill>
-                          <a:latin typeface="Inter"/>
+                          <a:latin typeface="Arial"/>
                         </a:rPr>
                         <a:t>35.8</a:t>
                       </a:r>
@@ -15590,7 +16658,7 @@
                         <a:solidFill>
                           <a:srgbClr val="2E3A9E"/>
                         </a:solidFill>
-                        <a:latin typeface="Inter"/>
+                        <a:latin typeface="Arial"/>
                       </a:endParaRPr>
                     </a:p>
                   </a:txBody>
@@ -15627,7 +16695,7 @@
                           <a:solidFill>
                             <a:srgbClr val="16181D"/>
                           </a:solidFill>
-                          <a:latin typeface="Inter"/>
+                          <a:latin typeface="Arial"/>
                         </a:rPr>
                         <a:t>CAC payback (months)</a:t>
                       </a:r>
@@ -15635,7 +16703,7 @@
                         <a:solidFill>
                           <a:srgbClr val="16181D"/>
                         </a:solidFill>
-                        <a:latin typeface="Inter"/>
+                        <a:latin typeface="Arial"/>
                       </a:endParaRPr>
                     </a:p>
                   </a:txBody>
@@ -15670,7 +16738,7 @@
                           <a:solidFill>
                             <a:srgbClr val="16181D"/>
                           </a:solidFill>
-                          <a:latin typeface="Inter"/>
+                          <a:latin typeface="Arial"/>
                         </a:rPr>
                         <a:t>28.8</a:t>
                       </a:r>
@@ -15678,7 +16746,7 @@
                         <a:solidFill>
                           <a:srgbClr val="16181D"/>
                         </a:solidFill>
-                        <a:latin typeface="Inter"/>
+                        <a:latin typeface="Arial"/>
                       </a:endParaRPr>
                     </a:p>
                   </a:txBody>
@@ -15713,7 +16781,7 @@
                           <a:solidFill>
                             <a:srgbClr val="16181D"/>
                           </a:solidFill>
-                          <a:latin typeface="Inter"/>
+                          <a:latin typeface="Arial"/>
                         </a:rPr>
                         <a:t>26.1</a:t>
                       </a:r>
@@ -15721,7 +16789,7 @@
                         <a:solidFill>
                           <a:srgbClr val="16181D"/>
                         </a:solidFill>
-                        <a:latin typeface="Inter"/>
+                        <a:latin typeface="Arial"/>
                       </a:endParaRPr>
                     </a:p>
                   </a:txBody>
@@ -15756,7 +16824,7 @@
                           <a:solidFill>
                             <a:srgbClr val="16181D"/>
                           </a:solidFill>
-                          <a:latin typeface="Inter"/>
+                          <a:latin typeface="Arial"/>
                         </a:rPr>
                         <a:t>31.2</a:t>
                       </a:r>
@@ -15764,7 +16832,7 @@
                         <a:solidFill>
                           <a:srgbClr val="16181D"/>
                         </a:solidFill>
-                        <a:latin typeface="Inter"/>
+                        <a:latin typeface="Arial"/>
                       </a:endParaRPr>
                     </a:p>
                   </a:txBody>
@@ -15799,7 +16867,7 @@
                           <a:solidFill>
                             <a:srgbClr val="16181D"/>
                           </a:solidFill>
-                          <a:latin typeface="Inter"/>
+                          <a:latin typeface="Arial"/>
                         </a:rPr>
                         <a:t>27.1</a:t>
                       </a:r>
@@ -15807,7 +16875,7 @@
                         <a:solidFill>
                           <a:srgbClr val="16181D"/>
                         </a:solidFill>
-                        <a:latin typeface="Inter"/>
+                        <a:latin typeface="Arial"/>
                       </a:endParaRPr>
                     </a:p>
                   </a:txBody>
@@ -15842,7 +16910,7 @@
                           <a:solidFill>
                             <a:srgbClr val="16181D"/>
                           </a:solidFill>
-                          <a:latin typeface="Inter"/>
+                          <a:latin typeface="Arial"/>
                         </a:rPr>
                         <a:t>22.2</a:t>
                       </a:r>
@@ -15850,7 +16918,7 @@
                         <a:solidFill>
                           <a:srgbClr val="16181D"/>
                         </a:solidFill>
-                        <a:latin typeface="Inter"/>
+                        <a:latin typeface="Arial"/>
                       </a:endParaRPr>
                     </a:p>
                   </a:txBody>
@@ -15887,7 +16955,7 @@
                           <a:solidFill>
                             <a:srgbClr val="16181D"/>
                           </a:solidFill>
-                          <a:latin typeface="Inter"/>
+                          <a:latin typeface="Arial"/>
                         </a:rPr>
                         <a:t>ARR magic number (x)</a:t>
                       </a:r>
@@ -15895,7 +16963,7 @@
                         <a:solidFill>
                           <a:srgbClr val="16181D"/>
                         </a:solidFill>
-                        <a:latin typeface="Inter"/>
+                        <a:latin typeface="Arial"/>
                       </a:endParaRPr>
                     </a:p>
                   </a:txBody>
@@ -15930,7 +16998,7 @@
                           <a:solidFill>
                             <a:srgbClr val="16181D"/>
                           </a:solidFill>
-                          <a:latin typeface="Inter"/>
+                          <a:latin typeface="Arial"/>
                         </a:rPr>
                         <a:t>0.52</a:t>
                       </a:r>
@@ -15938,7 +17006,7 @@
                         <a:solidFill>
                           <a:srgbClr val="16181D"/>
                         </a:solidFill>
-                        <a:latin typeface="Inter"/>
+                        <a:latin typeface="Arial"/>
                       </a:endParaRPr>
                     </a:p>
                   </a:txBody>
@@ -15973,7 +17041,7 @@
                           <a:solidFill>
                             <a:srgbClr val="16181D"/>
                           </a:solidFill>
-                          <a:latin typeface="Inter"/>
+                          <a:latin typeface="Arial"/>
                         </a:rPr>
                         <a:t>0.57</a:t>
                       </a:r>
@@ -15981,7 +17049,7 @@
                         <a:solidFill>
                           <a:srgbClr val="16181D"/>
                         </a:solidFill>
-                        <a:latin typeface="Inter"/>
+                        <a:latin typeface="Arial"/>
                       </a:endParaRPr>
                     </a:p>
                   </a:txBody>
@@ -16016,7 +17084,7 @@
                           <a:solidFill>
                             <a:srgbClr val="16181D"/>
                           </a:solidFill>
-                          <a:latin typeface="Inter"/>
+                          <a:latin typeface="Arial"/>
                         </a:rPr>
                         <a:t>0.48</a:t>
                       </a:r>
@@ -16024,7 +17092,7 @@
                         <a:solidFill>
                           <a:srgbClr val="16181D"/>
                         </a:solidFill>
-                        <a:latin typeface="Inter"/>
+                        <a:latin typeface="Arial"/>
                       </a:endParaRPr>
                     </a:p>
                   </a:txBody>
@@ -16059,7 +17127,7 @@
                           <a:solidFill>
                             <a:srgbClr val="16181D"/>
                           </a:solidFill>
-                          <a:latin typeface="Inter"/>
+                          <a:latin typeface="Arial"/>
                         </a:rPr>
                         <a:t>0.55</a:t>
                       </a:r>
@@ -16067,7 +17135,7 @@
                         <a:solidFill>
                           <a:srgbClr val="16181D"/>
                         </a:solidFill>
-                        <a:latin typeface="Inter"/>
+                        <a:latin typeface="Arial"/>
                       </a:endParaRPr>
                     </a:p>
                   </a:txBody>
@@ -16102,7 +17170,7 @@
                           <a:solidFill>
                             <a:srgbClr val="16181D"/>
                           </a:solidFill>
-                          <a:latin typeface="Inter"/>
+                          <a:latin typeface="Arial"/>
                         </a:rPr>
                         <a:t>0.67</a:t>
                       </a:r>
@@ -16110,7 +17178,7 @@
                         <a:solidFill>
                           <a:srgbClr val="16181D"/>
                         </a:solidFill>
-                        <a:latin typeface="Inter"/>
+                        <a:latin typeface="Arial"/>
                       </a:endParaRPr>
                     </a:p>
                   </a:txBody>
@@ -16147,7 +17215,7 @@
                           <a:solidFill>
                             <a:srgbClr val="16181D"/>
                           </a:solidFill>
-                          <a:latin typeface="Inter"/>
+                          <a:latin typeface="Arial"/>
                         </a:rPr>
                         <a:t>Free cash flow margin (%)</a:t>
                       </a:r>
@@ -16155,7 +17223,7 @@
                         <a:solidFill>
                           <a:srgbClr val="16181D"/>
                         </a:solidFill>
-                        <a:latin typeface="Inter"/>
+                        <a:latin typeface="Arial"/>
                       </a:endParaRPr>
                     </a:p>
                   </a:txBody>
@@ -16190,7 +17258,7 @@
                           <a:solidFill>
                             <a:srgbClr val="16181D"/>
                           </a:solidFill>
-                          <a:latin typeface="Inter"/>
+                          <a:latin typeface="Arial"/>
                         </a:rPr>
                         <a:t>18.3</a:t>
                       </a:r>
@@ -16198,7 +17266,7 @@
                         <a:solidFill>
                           <a:srgbClr val="16181D"/>
                         </a:solidFill>
-                        <a:latin typeface="Inter"/>
+                        <a:latin typeface="Arial"/>
                       </a:endParaRPr>
                     </a:p>
                   </a:txBody>
@@ -16233,7 +17301,7 @@
                           <a:solidFill>
                             <a:srgbClr val="16181D"/>
                           </a:solidFill>
-                          <a:latin typeface="Inter"/>
+                          <a:latin typeface="Arial"/>
                         </a:rPr>
                         <a:t>21.5</a:t>
                       </a:r>
@@ -16241,7 +17309,7 @@
                         <a:solidFill>
                           <a:srgbClr val="16181D"/>
                         </a:solidFill>
-                        <a:latin typeface="Inter"/>
+                        <a:latin typeface="Arial"/>
                       </a:endParaRPr>
                     </a:p>
                   </a:txBody>
@@ -16276,7 +17344,7 @@
                           <a:solidFill>
                             <a:srgbClr val="16181D"/>
                           </a:solidFill>
-                          <a:latin typeface="Inter"/>
+                          <a:latin typeface="Arial"/>
                         </a:rPr>
                         <a:t>19.4</a:t>
                       </a:r>
@@ -16284,7 +17352,7 @@
                         <a:solidFill>
                           <a:srgbClr val="16181D"/>
                         </a:solidFill>
-                        <a:latin typeface="Inter"/>
+                        <a:latin typeface="Arial"/>
                       </a:endParaRPr>
                     </a:p>
                   </a:txBody>
@@ -16319,7 +17387,7 @@
                           <a:solidFill>
                             <a:srgbClr val="16181D"/>
                           </a:solidFill>
-                          <a:latin typeface="Inter"/>
+                          <a:latin typeface="Arial"/>
                         </a:rPr>
                         <a:t>19.3</a:t>
                       </a:r>
@@ -16327,7 +17395,7 @@
                         <a:solidFill>
                           <a:srgbClr val="16181D"/>
                         </a:solidFill>
-                        <a:latin typeface="Inter"/>
+                        <a:latin typeface="Arial"/>
                       </a:endParaRPr>
                     </a:p>
                   </a:txBody>
@@ -16362,7 +17430,7 @@
                           <a:solidFill>
                             <a:srgbClr val="2E3A9E"/>
                           </a:solidFill>
-                          <a:latin typeface="Inter"/>
+                          <a:latin typeface="Arial"/>
                         </a:rPr>
                         <a:t>21.4</a:t>
                       </a:r>
@@ -16370,7 +17438,7 @@
                         <a:solidFill>
                           <a:srgbClr val="2E3A9E"/>
                         </a:solidFill>
-                        <a:latin typeface="Inter"/>
+                        <a:latin typeface="Arial"/>
                       </a:endParaRPr>
                     </a:p>
                   </a:txBody>
@@ -16407,7 +17475,7 @@
                           <a:solidFill>
                             <a:srgbClr val="16181D"/>
                           </a:solidFill>
-                          <a:latin typeface="Inter"/>
+                          <a:latin typeface="Arial"/>
                         </a:rPr>
                         <a:t>Rule of 40 (%)</a:t>
                       </a:r>
@@ -16415,7 +17483,7 @@
                         <a:solidFill>
                           <a:srgbClr val="16181D"/>
                         </a:solidFill>
-                        <a:latin typeface="Inter"/>
+                        <a:latin typeface="Arial"/>
                       </a:endParaRPr>
                     </a:p>
                   </a:txBody>
@@ -16450,7 +17518,7 @@
                           <a:solidFill>
                             <a:srgbClr val="16181D"/>
                           </a:solidFill>
-                          <a:latin typeface="Inter"/>
+                          <a:latin typeface="Arial"/>
                         </a:rPr>
                         <a:t>40.0</a:t>
                       </a:r>
@@ -16458,7 +17526,7 @@
                         <a:solidFill>
                           <a:srgbClr val="16181D"/>
                         </a:solidFill>
-                        <a:latin typeface="Inter"/>
+                        <a:latin typeface="Arial"/>
                       </a:endParaRPr>
                     </a:p>
                   </a:txBody>
@@ -16493,7 +17561,7 @@
                           <a:solidFill>
                             <a:srgbClr val="16181D"/>
                           </a:solidFill>
-                          <a:latin typeface="Inter"/>
+                          <a:latin typeface="Arial"/>
                         </a:rPr>
                         <a:t>42.9</a:t>
                       </a:r>
@@ -16501,7 +17569,7 @@
                         <a:solidFill>
                           <a:srgbClr val="16181D"/>
                         </a:solidFill>
-                        <a:latin typeface="Inter"/>
+                        <a:latin typeface="Arial"/>
                       </a:endParaRPr>
                     </a:p>
                   </a:txBody>
@@ -16536,7 +17604,7 @@
                           <a:solidFill>
                             <a:srgbClr val="16181D"/>
                           </a:solidFill>
-                          <a:latin typeface="Inter"/>
+                          <a:latin typeface="Arial"/>
                         </a:rPr>
                         <a:t>41.0</a:t>
                       </a:r>
@@ -16544,7 +17612,7 @@
                         <a:solidFill>
                           <a:srgbClr val="16181D"/>
                         </a:solidFill>
-                        <a:latin typeface="Inter"/>
+                        <a:latin typeface="Arial"/>
                       </a:endParaRPr>
                     </a:p>
                   </a:txBody>
@@ -16579,7 +17647,7 @@
                           <a:solidFill>
                             <a:srgbClr val="16181D"/>
                           </a:solidFill>
-                          <a:latin typeface="Inter"/>
+                          <a:latin typeface="Arial"/>
                         </a:rPr>
                         <a:t>40.7</a:t>
                       </a:r>
@@ -16587,7 +17655,7 @@
                         <a:solidFill>
                           <a:srgbClr val="16181D"/>
                         </a:solidFill>
-                        <a:latin typeface="Inter"/>
+                        <a:latin typeface="Arial"/>
                       </a:endParaRPr>
                     </a:p>
                   </a:txBody>
@@ -16622,7 +17690,7 @@
                           <a:solidFill>
                             <a:srgbClr val="2E3A9E"/>
                           </a:solidFill>
-                          <a:latin typeface="Inter"/>
+                          <a:latin typeface="Arial"/>
                         </a:rPr>
                         <a:t>42.7</a:t>
                       </a:r>
@@ -16630,7 +17698,7 @@
                         <a:solidFill>
                           <a:srgbClr val="2E3A9E"/>
                         </a:solidFill>
-                        <a:latin typeface="Inter"/>
+                        <a:latin typeface="Arial"/>
                       </a:endParaRPr>
                     </a:p>
                   </a:txBody>
@@ -16667,7 +17735,7 @@
                           <a:solidFill>
                             <a:srgbClr val="16181D"/>
                           </a:solidFill>
-                          <a:latin typeface="Inter"/>
+                          <a:latin typeface="Arial"/>
                         </a:rPr>
                         <a:t>Customers above $100K ARR</a:t>
                       </a:r>
@@ -16675,7 +17743,7 @@
                         <a:solidFill>
                           <a:srgbClr val="16181D"/>
                         </a:solidFill>
-                        <a:latin typeface="Inter"/>
+                        <a:latin typeface="Arial"/>
                       </a:endParaRPr>
                     </a:p>
                   </a:txBody>
@@ -16710,7 +17778,7 @@
                           <a:solidFill>
                             <a:srgbClr val="16181D"/>
                           </a:solidFill>
-                          <a:latin typeface="Inter"/>
+                          <a:latin typeface="Arial"/>
                         </a:rPr>
                         <a:t>1,779</a:t>
                       </a:r>
@@ -16718,7 +17786,7 @@
                         <a:solidFill>
                           <a:srgbClr val="16181D"/>
                         </a:solidFill>
-                        <a:latin typeface="Inter"/>
+                        <a:latin typeface="Arial"/>
                       </a:endParaRPr>
                     </a:p>
                   </a:txBody>
@@ -16753,7 +17821,7 @@
                           <a:solidFill>
                             <a:srgbClr val="16181D"/>
                           </a:solidFill>
-                          <a:latin typeface="Inter"/>
+                          <a:latin typeface="Arial"/>
                         </a:rPr>
                         <a:t>1,858</a:t>
                       </a:r>
@@ -16761,7 +17829,7 @@
                         <a:solidFill>
                           <a:srgbClr val="16181D"/>
                         </a:solidFill>
-                        <a:latin typeface="Inter"/>
+                        <a:latin typeface="Arial"/>
                       </a:endParaRPr>
                     </a:p>
                   </a:txBody>
@@ -16796,7 +17864,7 @@
                           <a:solidFill>
                             <a:srgbClr val="16181D"/>
                           </a:solidFill>
-                          <a:latin typeface="Inter"/>
+                          <a:latin typeface="Arial"/>
                         </a:rPr>
                         <a:t>1,931</a:t>
                       </a:r>
@@ -16804,7 +17872,7 @@
                         <a:solidFill>
                           <a:srgbClr val="16181D"/>
                         </a:solidFill>
-                        <a:latin typeface="Inter"/>
+                        <a:latin typeface="Arial"/>
                       </a:endParaRPr>
                     </a:p>
                   </a:txBody>
@@ -16839,7 +17907,7 @@
                           <a:solidFill>
                             <a:srgbClr val="16181D"/>
                           </a:solidFill>
-                          <a:latin typeface="Inter"/>
+                          <a:latin typeface="Arial"/>
                         </a:rPr>
                         <a:t>2,032</a:t>
                       </a:r>
@@ -16847,7 +17915,7 @@
                         <a:solidFill>
                           <a:srgbClr val="16181D"/>
                         </a:solidFill>
-                        <a:latin typeface="Inter"/>
+                        <a:latin typeface="Arial"/>
                       </a:endParaRPr>
                     </a:p>
                   </a:txBody>
@@ -16882,7 +17950,7 @@
                           <a:solidFill>
                             <a:srgbClr val="2E3A9E"/>
                           </a:solidFill>
-                          <a:latin typeface="Inter"/>
+                          <a:latin typeface="Arial"/>
                         </a:rPr>
                         <a:t>2,148</a:t>
                       </a:r>
@@ -16890,7 +17958,7 @@
                         <a:solidFill>
                           <a:srgbClr val="2E3A9E"/>
                         </a:solidFill>
-                        <a:latin typeface="Inter"/>
+                        <a:latin typeface="Arial"/>
                       </a:endParaRPr>
                     </a:p>
                   </a:txBody>
@@ -16958,7 +18026,7 @@
                 <a:solidFill>
                   <a:srgbClr val="16181D"/>
                 </a:solidFill>
-                <a:latin typeface="Inter"/>
+                <a:latin typeface="Arial"/>
               </a:rPr>
               <a:t>ARR by annual cohort, as a multiple of first-year ARR</a:t>
             </a:r>
@@ -17004,7 +18072,7 @@
                 <a:solidFill>
                   <a:srgbClr val="596070"/>
                 </a:solidFill>
-                <a:latin typeface="Inter"/>
+                <a:latin typeface="Arial"/>
               </a:rPr>
               <a:t>x, by years since the cohort landed; FY2024 cohort in indigo</a:t>
             </a:r>
@@ -17068,9 +18136,9 @@
                 <a:solidFill>
                   <a:srgbClr val="596070"/>
                 </a:solidFill>
-                <a:latin typeface="Inter"/>
+                <a:latin typeface="Arial"/>
               </a:rPr>
-              <a:t>A cohort is the customers landed in a fiscal year; its ARR is indexed to the end of that year. The FY2025 cohort has</a:t>
+              <a:t>A cohort is the customers landed in a fiscal year; its ARR is indexed to the end of that year. The FY2025 cohort has one</a:t>
             </a:r>
             <a:br/>
             <a:r>
@@ -17078,9 +18146,9 @@
                 <a:solidFill>
                   <a:srgbClr val="596070"/>
                 </a:solidFill>
-                <a:latin typeface="Inter"/>
+                <a:latin typeface="Arial"/>
               </a:rPr>
-              <a:t>one year and is not drawn. CAC payback: prior-quarter sales and marketing over net new ARR times gross margin,</a:t>
+              <a:t>year and is not drawn. CAC payback: prior-quarter sales and marketing over net new ARR times gross margin, in months.</a:t>
             </a:r>
             <a:br/>
             <a:r>
@@ -17088,9 +18156,9 @@
                 <a:solidFill>
                   <a:srgbClr val="596070"/>
                 </a:solidFill>
-                <a:latin typeface="Inter"/>
+                <a:latin typeface="Arial"/>
               </a:rPr>
-              <a:t>in months. ARR magic number: net new ARR over prior-quarter sales and marketing.</a:t>
+              <a:t>ARR magic number: net new ARR over prior-quarter sales and marketing.</a:t>
             </a:r>
           </a:p>
         </p:txBody>
@@ -17134,7 +18202,7 @@
                 <a:solidFill>
                   <a:srgbClr val="596070"/>
                 </a:solidFill>
-                <a:latin typeface="Inter"/>
+                <a:latin typeface="Arial"/>
               </a:rPr>
               <a:t>Source: Corvane Software management accounts (fictional; illustrative figures). Non-GAAP unless stated; fiscal year ends December.</a:t>
             </a:r>
@@ -17149,8 +18217,8 @@
         </p:nvSpPr>
         <p:spPr>
           <a:xfrm>
-            <a:off x="1235427" y="3713328"/>
-            <a:ext cx="166228" cy="121920"/>
+            <a:off x="1241802" y="3713328"/>
+            <a:ext cx="153478" cy="121920"/>
           </a:xfrm>
           <a:prstGeom prst="rect">
             <a:avLst/>
@@ -17180,7 +18248,7 @@
                 <a:solidFill>
                   <a:srgbClr val="16181D"/>
                 </a:solidFill>
-                <a:latin typeface="Inter"/>
+                <a:latin typeface="Arial"/>
               </a:rPr>
               <a:t>93</a:t>
             </a:r>
@@ -17195,8 +18263,8 @@
         </p:nvSpPr>
         <p:spPr>
           <a:xfrm>
-            <a:off x="1805386" y="3713328"/>
-            <a:ext cx="166228" cy="121920"/>
+            <a:off x="1811761" y="3713328"/>
+            <a:ext cx="153478" cy="121920"/>
           </a:xfrm>
           <a:prstGeom prst="rect">
             <a:avLst/>
@@ -17226,7 +18294,7 @@
                 <a:solidFill>
                   <a:srgbClr val="16181D"/>
                 </a:solidFill>
-                <a:latin typeface="Inter"/>
+                <a:latin typeface="Arial"/>
               </a:rPr>
               <a:t>93</a:t>
             </a:r>
@@ -17241,8 +18309,8 @@
         </p:nvSpPr>
         <p:spPr>
           <a:xfrm>
-            <a:off x="2375741" y="3713328"/>
-            <a:ext cx="165434" cy="121920"/>
+            <a:off x="2381719" y="3713328"/>
+            <a:ext cx="153478" cy="121920"/>
           </a:xfrm>
           <a:prstGeom prst="rect">
             <a:avLst/>
@@ -17272,7 +18340,7 @@
                 <a:solidFill>
                   <a:srgbClr val="16181D"/>
                 </a:solidFill>
-                <a:latin typeface="Inter"/>
+                <a:latin typeface="Arial"/>
               </a:rPr>
               <a:t>92</a:t>
             </a:r>
@@ -17287,8 +18355,8 @@
         </p:nvSpPr>
         <p:spPr>
           <a:xfrm>
-            <a:off x="2945699" y="3713328"/>
-            <a:ext cx="165434" cy="121920"/>
+            <a:off x="2951677" y="3713328"/>
+            <a:ext cx="153478" cy="121920"/>
           </a:xfrm>
           <a:prstGeom prst="rect">
             <a:avLst/>
@@ -17318,7 +18386,7 @@
                 <a:solidFill>
                   <a:srgbClr val="16181D"/>
                 </a:solidFill>
-                <a:latin typeface="Inter"/>
+                <a:latin typeface="Arial"/>
               </a:rPr>
               <a:t>92</a:t>
             </a:r>
@@ -17333,8 +18401,8 @@
         </p:nvSpPr>
         <p:spPr>
           <a:xfrm>
-            <a:off x="3515658" y="3713328"/>
-            <a:ext cx="165434" cy="121920"/>
+            <a:off x="3521636" y="3713328"/>
+            <a:ext cx="153478" cy="121920"/>
           </a:xfrm>
           <a:prstGeom prst="rect">
             <a:avLst/>
@@ -17364,7 +18432,7 @@
                 <a:solidFill>
                   <a:srgbClr val="16181D"/>
                 </a:solidFill>
-                <a:latin typeface="Inter"/>
+                <a:latin typeface="Arial"/>
               </a:rPr>
               <a:t>92</a:t>
             </a:r>
@@ -17379,8 +18447,8 @@
         </p:nvSpPr>
         <p:spPr>
           <a:xfrm>
-            <a:off x="4085219" y="3713328"/>
-            <a:ext cx="166228" cy="121920"/>
+            <a:off x="4091594" y="3713328"/>
+            <a:ext cx="153478" cy="121920"/>
           </a:xfrm>
           <a:prstGeom prst="rect">
             <a:avLst/>
@@ -17410,7 +18478,7 @@
                 <a:solidFill>
                   <a:srgbClr val="16181D"/>
                 </a:solidFill>
-                <a:latin typeface="Inter"/>
+                <a:latin typeface="Arial"/>
               </a:rPr>
               <a:t>93</a:t>
             </a:r>
@@ -17425,8 +18493,8 @@
         </p:nvSpPr>
         <p:spPr>
           <a:xfrm>
-            <a:off x="4655177" y="3713328"/>
-            <a:ext cx="166228" cy="121920"/>
+            <a:off x="4661552" y="3713328"/>
+            <a:ext cx="153478" cy="121920"/>
           </a:xfrm>
           <a:prstGeom prst="rect">
             <a:avLst/>
@@ -17456,7 +18524,7 @@
                 <a:solidFill>
                   <a:srgbClr val="16181D"/>
                 </a:solidFill>
-                <a:latin typeface="Inter"/>
+                <a:latin typeface="Arial"/>
               </a:rPr>
               <a:t>93</a:t>
             </a:r>
@@ -17471,8 +18539,8 @@
         </p:nvSpPr>
         <p:spPr>
           <a:xfrm>
-            <a:off x="5225135" y="3713328"/>
-            <a:ext cx="166228" cy="121920"/>
+            <a:off x="5231510" y="3713328"/>
+            <a:ext cx="153478" cy="121920"/>
           </a:xfrm>
           <a:prstGeom prst="rect">
             <a:avLst/>
@@ -17502,7 +18570,7 @@
                 <a:solidFill>
                   <a:srgbClr val="16181D"/>
                 </a:solidFill>
-                <a:latin typeface="Inter"/>
+                <a:latin typeface="Arial"/>
               </a:rPr>
               <a:t>93</a:t>
             </a:r>
@@ -17517,8 +18585,8 @@
         </p:nvSpPr>
         <p:spPr>
           <a:xfrm>
-            <a:off x="5793655" y="3713328"/>
-            <a:ext cx="169105" cy="121920"/>
+            <a:off x="5801469" y="3713328"/>
+            <a:ext cx="153478" cy="121920"/>
           </a:xfrm>
           <a:prstGeom prst="rect">
             <a:avLst/>
@@ -17548,7 +18616,7 @@
                 <a:solidFill>
                   <a:srgbClr val="16181D"/>
                 </a:solidFill>
-                <a:latin typeface="Inter"/>
+                <a:latin typeface="Arial"/>
               </a:rPr>
               <a:t>94</a:t>
             </a:r>
@@ -17563,8 +18631,8 @@
         </p:nvSpPr>
         <p:spPr>
           <a:xfrm>
-            <a:off x="786521" y="3713328"/>
-            <a:ext cx="247041" cy="121920"/>
+            <a:off x="767322" y="3713328"/>
+            <a:ext cx="266240" cy="121920"/>
           </a:xfrm>
           <a:prstGeom prst="rect">
             <a:avLst/>
@@ -17594,7 +18662,7 @@
                 <a:solidFill>
                   <a:srgbClr val="596070"/>
                 </a:solidFill>
-                <a:latin typeface="Inter"/>
+                <a:latin typeface="Arial"/>
               </a:rPr>
               <a:t>GRR</a:t>
             </a:r>
@@ -17649,7 +18717,7 @@
                 <a:solidFill>
                   <a:srgbClr val="596070"/>
                 </a:solidFill>
-                <a:latin typeface="Inter"/>
+                <a:latin typeface="Arial"/>
               </a:rPr>
               <a:t>Corvane Software (fictional company)  |  Q3 FY2026 earnings  |  Illustrative figures, non-GAAP unless stated</a:t>
             </a:r>
@@ -17684,7 +18752,7 @@
                 <a:solidFill>
                   <a:srgbClr val="596070"/>
                 </a:solidFill>
-                <a:latin typeface="Inter"/>
+                <a:latin typeface="Arial"/>
               </a:rPr>
               <a:t>1</a:t>
             </a:fld>
@@ -17730,7 +18798,7 @@
                 <a:solidFill>
                   <a:srgbClr val="2E3A9E"/>
                 </a:solidFill>
-                <a:latin typeface="Inter"/>
+                <a:latin typeface="Arial"/>
               </a:rPr>
               <a:t>Q3 FY2026 RESULTS  |  MARGIN</a:t>
             </a:r>
@@ -17776,7 +18844,7 @@
                 <a:solidFill>
                   <a:srgbClr val="16181D"/>
                 </a:solidFill>
-                <a:latin typeface="Inter"/>
+                <a:latin typeface="Arial"/>
               </a:rPr>
               <a:t>Operating margin widened 5.4 points to 16.6%, 3.1 of them from sales and marketing</a:t>
             </a:r>
@@ -17822,7 +18890,7 @@
                 <a:solidFill>
                   <a:srgbClr val="16181D"/>
                 </a:solidFill>
-                <a:latin typeface="Inter"/>
+                <a:latin typeface="Arial"/>
               </a:rPr>
               <a:t>Operating margin bridge, Q3 FY25 to Q3 FY26</a:t>
             </a:r>
@@ -17868,7 +18936,7 @@
                 <a:solidFill>
                   <a:srgbClr val="596070"/>
                 </a:solidFill>
-                <a:latin typeface="Inter"/>
+                <a:latin typeface="Arial"/>
               </a:rPr>
               <a:t>% of revenue; each step is the fall in that cost line's share of revenue (gross margin: its rise)</a:t>
             </a:r>
@@ -17932,7 +19000,7 @@
                 <a:solidFill>
                   <a:srgbClr val="16181D"/>
                 </a:solidFill>
-                <a:latin typeface="Inter"/>
+                <a:latin typeface="Arial"/>
               </a:rPr>
               <a:t>Cost structure</a:t>
             </a:r>
@@ -17978,7 +19046,7 @@
                 <a:solidFill>
                   <a:srgbClr val="596070"/>
                 </a:solidFill>
-                <a:latin typeface="Inter"/>
+                <a:latin typeface="Arial"/>
               </a:rPr>
               <a:t>% of revenue, last five quarters</a:t>
             </a:r>
@@ -18002,12 +19070,12 @@
             <a:tbl>
               <a:tblPr firstRow="0" bandRow="0" lastRow="0" firstCol="0" lastCol="0" bandCol="0"/>
               <a:tblGrid>
-                <a:gridCol w="2128394"/>
-                <a:gridCol w="579918"/>
-                <a:gridCol w="584756"/>
-                <a:gridCol w="547818"/>
-                <a:gridCol w="579073"/>
-                <a:gridCol w="581532"/>
+                <a:gridCol w="2178055"/>
+                <a:gridCol w="564687"/>
+                <a:gridCol w="564687"/>
+                <a:gridCol w="564687"/>
+                <a:gridCol w="564687"/>
+                <a:gridCol w="564688"/>
               </a:tblGrid>
               <a:tr h="192278">
                 <a:tc>
@@ -18021,7 +19089,7 @@
                           <a:solidFill>
                             <a:srgbClr val="16181D"/>
                           </a:solidFill>
-                          <a:latin typeface="Inter"/>
+                          <a:latin typeface="Arial"/>
                         </a:rPr>
                         <a:t>% of revenue</a:t>
                       </a:r>
@@ -18029,7 +19097,7 @@
                         <a:solidFill>
                           <a:srgbClr val="16181D"/>
                         </a:solidFill>
-                        <a:latin typeface="Inter"/>
+                        <a:latin typeface="Arial"/>
                       </a:endParaRPr>
                     </a:p>
                   </a:txBody>
@@ -18062,7 +19130,7 @@
                           <a:solidFill>
                             <a:srgbClr val="16181D"/>
                           </a:solidFill>
-                          <a:latin typeface="Inter"/>
+                          <a:latin typeface="Arial"/>
                         </a:rPr>
                         <a:t>Q3'25</a:t>
                       </a:r>
@@ -18070,7 +19138,7 @@
                         <a:solidFill>
                           <a:srgbClr val="16181D"/>
                         </a:solidFill>
-                        <a:latin typeface="Inter"/>
+                        <a:latin typeface="Arial"/>
                       </a:endParaRPr>
                     </a:p>
                   </a:txBody>
@@ -18103,7 +19171,7 @@
                           <a:solidFill>
                             <a:srgbClr val="16181D"/>
                           </a:solidFill>
-                          <a:latin typeface="Inter"/>
+                          <a:latin typeface="Arial"/>
                         </a:rPr>
                         <a:t>Q4'25</a:t>
                       </a:r>
@@ -18111,7 +19179,7 @@
                         <a:solidFill>
                           <a:srgbClr val="16181D"/>
                         </a:solidFill>
-                        <a:latin typeface="Inter"/>
+                        <a:latin typeface="Arial"/>
                       </a:endParaRPr>
                     </a:p>
                   </a:txBody>
@@ -18144,7 +19212,7 @@
                           <a:solidFill>
                             <a:srgbClr val="16181D"/>
                           </a:solidFill>
-                          <a:latin typeface="Inter"/>
+                          <a:latin typeface="Arial"/>
                         </a:rPr>
                         <a:t>Q1'26</a:t>
                       </a:r>
@@ -18152,7 +19220,7 @@
                         <a:solidFill>
                           <a:srgbClr val="16181D"/>
                         </a:solidFill>
-                        <a:latin typeface="Inter"/>
+                        <a:latin typeface="Arial"/>
                       </a:endParaRPr>
                     </a:p>
                   </a:txBody>
@@ -18185,7 +19253,7 @@
                           <a:solidFill>
                             <a:srgbClr val="16181D"/>
                           </a:solidFill>
-                          <a:latin typeface="Inter"/>
+                          <a:latin typeface="Arial"/>
                         </a:rPr>
                         <a:t>Q2'26</a:t>
                       </a:r>
@@ -18193,7 +19261,7 @@
                         <a:solidFill>
                           <a:srgbClr val="16181D"/>
                         </a:solidFill>
-                        <a:latin typeface="Inter"/>
+                        <a:latin typeface="Arial"/>
                       </a:endParaRPr>
                     </a:p>
                   </a:txBody>
@@ -18226,7 +19294,7 @@
                           <a:solidFill>
                             <a:srgbClr val="16181D"/>
                           </a:solidFill>
-                          <a:latin typeface="Inter"/>
+                          <a:latin typeface="Arial"/>
                         </a:rPr>
                         <a:t>Q3'26</a:t>
                       </a:r>
@@ -18234,7 +19302,7 @@
                         <a:solidFill>
                           <a:srgbClr val="16181D"/>
                         </a:solidFill>
-                        <a:latin typeface="Inter"/>
+                        <a:latin typeface="Arial"/>
                       </a:endParaRPr>
                     </a:p>
                   </a:txBody>
@@ -18269,7 +19337,7 @@
                           <a:solidFill>
                             <a:srgbClr val="16181D"/>
                           </a:solidFill>
-                          <a:latin typeface="Inter"/>
+                          <a:latin typeface="Arial"/>
                         </a:rPr>
                         <a:t>Gross margin</a:t>
                       </a:r>
@@ -18277,7 +19345,7 @@
                         <a:solidFill>
                           <a:srgbClr val="16181D"/>
                         </a:solidFill>
-                        <a:latin typeface="Inter"/>
+                        <a:latin typeface="Arial"/>
                       </a:endParaRPr>
                     </a:p>
                   </a:txBody>
@@ -18312,7 +19380,7 @@
                           <a:solidFill>
                             <a:srgbClr val="16181D"/>
                           </a:solidFill>
-                          <a:latin typeface="Inter"/>
+                          <a:latin typeface="Arial"/>
                         </a:rPr>
                         <a:t>79.6</a:t>
                       </a:r>
@@ -18320,7 +19388,7 @@
                         <a:solidFill>
                           <a:srgbClr val="16181D"/>
                         </a:solidFill>
-                        <a:latin typeface="Inter"/>
+                        <a:latin typeface="Arial"/>
                       </a:endParaRPr>
                     </a:p>
                   </a:txBody>
@@ -18355,7 +19423,7 @@
                           <a:solidFill>
                             <a:srgbClr val="16181D"/>
                           </a:solidFill>
-                          <a:latin typeface="Inter"/>
+                          <a:latin typeface="Arial"/>
                         </a:rPr>
                         <a:t>79.9</a:t>
                       </a:r>
@@ -18363,7 +19431,7 @@
                         <a:solidFill>
                           <a:srgbClr val="16181D"/>
                         </a:solidFill>
-                        <a:latin typeface="Inter"/>
+                        <a:latin typeface="Arial"/>
                       </a:endParaRPr>
                     </a:p>
                   </a:txBody>
@@ -18398,7 +19466,7 @@
                           <a:solidFill>
                             <a:srgbClr val="16181D"/>
                           </a:solidFill>
-                          <a:latin typeface="Inter"/>
+                          <a:latin typeface="Arial"/>
                         </a:rPr>
                         <a:t>80.1</a:t>
                       </a:r>
@@ -18406,7 +19474,7 @@
                         <a:solidFill>
                           <a:srgbClr val="16181D"/>
                         </a:solidFill>
-                        <a:latin typeface="Inter"/>
+                        <a:latin typeface="Arial"/>
                       </a:endParaRPr>
                     </a:p>
                   </a:txBody>
@@ -18441,7 +19509,7 @@
                           <a:solidFill>
                             <a:srgbClr val="16181D"/>
                           </a:solidFill>
-                          <a:latin typeface="Inter"/>
+                          <a:latin typeface="Arial"/>
                         </a:rPr>
                         <a:t>80.3</a:t>
                       </a:r>
@@ -18449,7 +19517,7 @@
                         <a:solidFill>
                           <a:srgbClr val="16181D"/>
                         </a:solidFill>
-                        <a:latin typeface="Inter"/>
+                        <a:latin typeface="Arial"/>
                       </a:endParaRPr>
                     </a:p>
                   </a:txBody>
@@ -18484,7 +19552,7 @@
                           <a:solidFill>
                             <a:srgbClr val="2E3A9E"/>
                           </a:solidFill>
-                          <a:latin typeface="Inter"/>
+                          <a:latin typeface="Arial"/>
                         </a:rPr>
                         <a:t>80.4</a:t>
                       </a:r>
@@ -18492,7 +19560,7 @@
                         <a:solidFill>
                           <a:srgbClr val="2E3A9E"/>
                         </a:solidFill>
-                        <a:latin typeface="Inter"/>
+                        <a:latin typeface="Arial"/>
                       </a:endParaRPr>
                     </a:p>
                   </a:txBody>
@@ -18529,7 +19597,7 @@
                           <a:solidFill>
                             <a:srgbClr val="16181D"/>
                           </a:solidFill>
-                          <a:latin typeface="Inter"/>
+                          <a:latin typeface="Arial"/>
                         </a:rPr>
                         <a:t>Sales and marketing</a:t>
                       </a:r>
@@ -18537,7 +19605,7 @@
                         <a:solidFill>
                           <a:srgbClr val="16181D"/>
                         </a:solidFill>
-                        <a:latin typeface="Inter"/>
+                        <a:latin typeface="Arial"/>
                       </a:endParaRPr>
                     </a:p>
                   </a:txBody>
@@ -18572,7 +19640,7 @@
                           <a:solidFill>
                             <a:srgbClr val="16181D"/>
                           </a:solidFill>
-                          <a:latin typeface="Inter"/>
+                          <a:latin typeface="Arial"/>
                         </a:rPr>
                         <a:t>38.9</a:t>
                       </a:r>
@@ -18580,7 +19648,7 @@
                         <a:solidFill>
                           <a:srgbClr val="16181D"/>
                         </a:solidFill>
-                        <a:latin typeface="Inter"/>
+                        <a:latin typeface="Arial"/>
                       </a:endParaRPr>
                     </a:p>
                   </a:txBody>
@@ -18615,7 +19683,7 @@
                           <a:solidFill>
                             <a:srgbClr val="16181D"/>
                           </a:solidFill>
-                          <a:latin typeface="Inter"/>
+                          <a:latin typeface="Arial"/>
                         </a:rPr>
                         <a:t>38.1</a:t>
                       </a:r>
@@ -18623,7 +19691,7 @@
                         <a:solidFill>
                           <a:srgbClr val="16181D"/>
                         </a:solidFill>
-                        <a:latin typeface="Inter"/>
+                        <a:latin typeface="Arial"/>
                       </a:endParaRPr>
                     </a:p>
                   </a:txBody>
@@ -18658,7 +19726,7 @@
                           <a:solidFill>
                             <a:srgbClr val="16181D"/>
                           </a:solidFill>
-                          <a:latin typeface="Inter"/>
+                          <a:latin typeface="Arial"/>
                         </a:rPr>
                         <a:t>37.0</a:t>
                       </a:r>
@@ -18666,7 +19734,7 @@
                         <a:solidFill>
                           <a:srgbClr val="16181D"/>
                         </a:solidFill>
-                        <a:latin typeface="Inter"/>
+                        <a:latin typeface="Arial"/>
                       </a:endParaRPr>
                     </a:p>
                   </a:txBody>
@@ -18701,7 +19769,7 @@
                           <a:solidFill>
                             <a:srgbClr val="16181D"/>
                           </a:solidFill>
-                          <a:latin typeface="Inter"/>
+                          <a:latin typeface="Arial"/>
                         </a:rPr>
                         <a:t>36.2</a:t>
                       </a:r>
@@ -18709,7 +19777,7 @@
                         <a:solidFill>
                           <a:srgbClr val="16181D"/>
                         </a:solidFill>
-                        <a:latin typeface="Inter"/>
+                        <a:latin typeface="Arial"/>
                       </a:endParaRPr>
                     </a:p>
                   </a:txBody>
@@ -18744,7 +19812,7 @@
                           <a:solidFill>
                             <a:srgbClr val="2E3A9E"/>
                           </a:solidFill>
-                          <a:latin typeface="Inter"/>
+                          <a:latin typeface="Arial"/>
                         </a:rPr>
                         <a:t>35.8</a:t>
                       </a:r>
@@ -18752,7 +19820,7 @@
                         <a:solidFill>
                           <a:srgbClr val="2E3A9E"/>
                         </a:solidFill>
-                        <a:latin typeface="Inter"/>
+                        <a:latin typeface="Arial"/>
                       </a:endParaRPr>
                     </a:p>
                   </a:txBody>
@@ -18789,7 +19857,7 @@
                           <a:solidFill>
                             <a:srgbClr val="16181D"/>
                           </a:solidFill>
-                          <a:latin typeface="Inter"/>
+                          <a:latin typeface="Arial"/>
                         </a:rPr>
                         <a:t>Research and development</a:t>
                       </a:r>
@@ -18797,7 +19865,7 @@
                         <a:solidFill>
                           <a:srgbClr val="16181D"/>
                         </a:solidFill>
-                        <a:latin typeface="Inter"/>
+                        <a:latin typeface="Arial"/>
                       </a:endParaRPr>
                     </a:p>
                   </a:txBody>
@@ -18832,7 +19900,7 @@
                           <a:solidFill>
                             <a:srgbClr val="16181D"/>
                           </a:solidFill>
-                          <a:latin typeface="Inter"/>
+                          <a:latin typeface="Arial"/>
                         </a:rPr>
                         <a:t>20.4</a:t>
                       </a:r>
@@ -18840,7 +19908,7 @@
                         <a:solidFill>
                           <a:srgbClr val="16181D"/>
                         </a:solidFill>
-                        <a:latin typeface="Inter"/>
+                        <a:latin typeface="Arial"/>
                       </a:endParaRPr>
                     </a:p>
                   </a:txBody>
@@ -18875,7 +19943,7 @@
                           <a:solidFill>
                             <a:srgbClr val="16181D"/>
                           </a:solidFill>
-                          <a:latin typeface="Inter"/>
+                          <a:latin typeface="Arial"/>
                         </a:rPr>
                         <a:t>20.1</a:t>
                       </a:r>
@@ -18883,7 +19951,7 @@
                         <a:solidFill>
                           <a:srgbClr val="16181D"/>
                         </a:solidFill>
-                        <a:latin typeface="Inter"/>
+                        <a:latin typeface="Arial"/>
                       </a:endParaRPr>
                     </a:p>
                   </a:txBody>
@@ -18918,7 +19986,7 @@
                           <a:solidFill>
                             <a:srgbClr val="16181D"/>
                           </a:solidFill>
-                          <a:latin typeface="Inter"/>
+                          <a:latin typeface="Arial"/>
                         </a:rPr>
                         <a:t>19.9</a:t>
                       </a:r>
@@ -18926,7 +19994,7 @@
                         <a:solidFill>
                           <a:srgbClr val="16181D"/>
                         </a:solidFill>
-                        <a:latin typeface="Inter"/>
+                        <a:latin typeface="Arial"/>
                       </a:endParaRPr>
                     </a:p>
                   </a:txBody>
@@ -18961,7 +20029,7 @@
                           <a:solidFill>
                             <a:srgbClr val="16181D"/>
                           </a:solidFill>
-                          <a:latin typeface="Inter"/>
+                          <a:latin typeface="Arial"/>
                         </a:rPr>
                         <a:t>19.7</a:t>
                       </a:r>
@@ -18969,7 +20037,7 @@
                         <a:solidFill>
                           <a:srgbClr val="16181D"/>
                         </a:solidFill>
-                        <a:latin typeface="Inter"/>
+                        <a:latin typeface="Arial"/>
                       </a:endParaRPr>
                     </a:p>
                   </a:txBody>
@@ -19004,7 +20072,7 @@
                           <a:solidFill>
                             <a:srgbClr val="2E3A9E"/>
                           </a:solidFill>
-                          <a:latin typeface="Inter"/>
+                          <a:latin typeface="Arial"/>
                         </a:rPr>
                         <a:t>19.5</a:t>
                       </a:r>
@@ -19012,7 +20080,7 @@
                         <a:solidFill>
                           <a:srgbClr val="2E3A9E"/>
                         </a:solidFill>
-                        <a:latin typeface="Inter"/>
+                        <a:latin typeface="Arial"/>
                       </a:endParaRPr>
                     </a:p>
                   </a:txBody>
@@ -19049,7 +20117,7 @@
                           <a:solidFill>
                             <a:srgbClr val="16181D"/>
                           </a:solidFill>
-                          <a:latin typeface="Inter"/>
+                          <a:latin typeface="Arial"/>
                         </a:rPr>
                         <a:t>General and administrative</a:t>
                       </a:r>
@@ -19057,7 +20125,7 @@
                         <a:solidFill>
                           <a:srgbClr val="16181D"/>
                         </a:solidFill>
-                        <a:latin typeface="Inter"/>
+                        <a:latin typeface="Arial"/>
                       </a:endParaRPr>
                     </a:p>
                   </a:txBody>
@@ -19092,7 +20160,7 @@
                           <a:solidFill>
                             <a:srgbClr val="16181D"/>
                           </a:solidFill>
-                          <a:latin typeface="Inter"/>
+                          <a:latin typeface="Arial"/>
                         </a:rPr>
                         <a:t>9.1</a:t>
                       </a:r>
@@ -19100,7 +20168,7 @@
                         <a:solidFill>
                           <a:srgbClr val="16181D"/>
                         </a:solidFill>
-                        <a:latin typeface="Inter"/>
+                        <a:latin typeface="Arial"/>
                       </a:endParaRPr>
                     </a:p>
                   </a:txBody>
@@ -19135,7 +20203,7 @@
                           <a:solidFill>
                             <a:srgbClr val="16181D"/>
                           </a:solidFill>
-                          <a:latin typeface="Inter"/>
+                          <a:latin typeface="Arial"/>
                         </a:rPr>
                         <a:t>8.9</a:t>
                       </a:r>
@@ -19143,7 +20211,7 @@
                         <a:solidFill>
                           <a:srgbClr val="16181D"/>
                         </a:solidFill>
-                        <a:latin typeface="Inter"/>
+                        <a:latin typeface="Arial"/>
                       </a:endParaRPr>
                     </a:p>
                   </a:txBody>
@@ -19178,7 +20246,7 @@
                           <a:solidFill>
                             <a:srgbClr val="16181D"/>
                           </a:solidFill>
-                          <a:latin typeface="Inter"/>
+                          <a:latin typeface="Arial"/>
                         </a:rPr>
                         <a:t>8.7</a:t>
                       </a:r>
@@ -19186,7 +20254,7 @@
                         <a:solidFill>
                           <a:srgbClr val="16181D"/>
                         </a:solidFill>
-                        <a:latin typeface="Inter"/>
+                        <a:latin typeface="Arial"/>
                       </a:endParaRPr>
                     </a:p>
                   </a:txBody>
@@ -19221,7 +20289,7 @@
                           <a:solidFill>
                             <a:srgbClr val="16181D"/>
                           </a:solidFill>
-                          <a:latin typeface="Inter"/>
+                          <a:latin typeface="Arial"/>
                         </a:rPr>
                         <a:t>8.6</a:t>
                       </a:r>
@@ -19229,7 +20297,7 @@
                         <a:solidFill>
                           <a:srgbClr val="16181D"/>
                         </a:solidFill>
-                        <a:latin typeface="Inter"/>
+                        <a:latin typeface="Arial"/>
                       </a:endParaRPr>
                     </a:p>
                   </a:txBody>
@@ -19264,7 +20332,7 @@
                           <a:solidFill>
                             <a:srgbClr val="2E3A9E"/>
                           </a:solidFill>
-                          <a:latin typeface="Inter"/>
+                          <a:latin typeface="Arial"/>
                         </a:rPr>
                         <a:t>8.5</a:t>
                       </a:r>
@@ -19272,7 +20340,7 @@
                         <a:solidFill>
                           <a:srgbClr val="2E3A9E"/>
                         </a:solidFill>
-                        <a:latin typeface="Inter"/>
+                        <a:latin typeface="Arial"/>
                       </a:endParaRPr>
                     </a:p>
                   </a:txBody>
@@ -19309,7 +20377,7 @@
                           <a:solidFill>
                             <a:srgbClr val="16181D"/>
                           </a:solidFill>
-                          <a:latin typeface="Inter"/>
+                          <a:latin typeface="Arial"/>
                         </a:rPr>
                         <a:t>Operating margin</a:t>
                       </a:r>
@@ -19317,7 +20385,7 @@
                         <a:solidFill>
                           <a:srgbClr val="16181D"/>
                         </a:solidFill>
-                        <a:latin typeface="Inter"/>
+                        <a:latin typeface="Arial"/>
                       </a:endParaRPr>
                     </a:p>
                   </a:txBody>
@@ -19352,7 +20420,7 @@
                           <a:solidFill>
                             <a:srgbClr val="16181D"/>
                           </a:solidFill>
-                          <a:latin typeface="Inter"/>
+                          <a:latin typeface="Arial"/>
                         </a:rPr>
                         <a:t>11.2</a:t>
                       </a:r>
@@ -19360,7 +20428,7 @@
                         <a:solidFill>
                           <a:srgbClr val="16181D"/>
                         </a:solidFill>
-                        <a:latin typeface="Inter"/>
+                        <a:latin typeface="Arial"/>
                       </a:endParaRPr>
                     </a:p>
                   </a:txBody>
@@ -19395,7 +20463,7 @@
                           <a:solidFill>
                             <a:srgbClr val="16181D"/>
                           </a:solidFill>
-                          <a:latin typeface="Inter"/>
+                          <a:latin typeface="Arial"/>
                         </a:rPr>
                         <a:t>12.8</a:t>
                       </a:r>
@@ -19403,7 +20471,7 @@
                         <a:solidFill>
                           <a:srgbClr val="16181D"/>
                         </a:solidFill>
-                        <a:latin typeface="Inter"/>
+                        <a:latin typeface="Arial"/>
                       </a:endParaRPr>
                     </a:p>
                   </a:txBody>
@@ -19438,7 +20506,7 @@
                           <a:solidFill>
                             <a:srgbClr val="16181D"/>
                           </a:solidFill>
-                          <a:latin typeface="Inter"/>
+                          <a:latin typeface="Arial"/>
                         </a:rPr>
                         <a:t>14.5</a:t>
                       </a:r>
@@ -19446,7 +20514,7 @@
                         <a:solidFill>
                           <a:srgbClr val="16181D"/>
                         </a:solidFill>
-                        <a:latin typeface="Inter"/>
+                        <a:latin typeface="Arial"/>
                       </a:endParaRPr>
                     </a:p>
                   </a:txBody>
@@ -19481,7 +20549,7 @@
                           <a:solidFill>
                             <a:srgbClr val="16181D"/>
                           </a:solidFill>
-                          <a:latin typeface="Inter"/>
+                          <a:latin typeface="Arial"/>
                         </a:rPr>
                         <a:t>15.8</a:t>
                       </a:r>
@@ -19489,7 +20557,7 @@
                         <a:solidFill>
                           <a:srgbClr val="16181D"/>
                         </a:solidFill>
-                        <a:latin typeface="Inter"/>
+                        <a:latin typeface="Arial"/>
                       </a:endParaRPr>
                     </a:p>
                   </a:txBody>
@@ -19524,7 +20592,7 @@
                           <a:solidFill>
                             <a:srgbClr val="16181D"/>
                           </a:solidFill>
-                          <a:latin typeface="Inter"/>
+                          <a:latin typeface="Arial"/>
                         </a:rPr>
                         <a:t>16.6</a:t>
                       </a:r>
@@ -19532,7 +20600,7 @@
                         <a:solidFill>
                           <a:srgbClr val="16181D"/>
                         </a:solidFill>
-                        <a:latin typeface="Inter"/>
+                        <a:latin typeface="Arial"/>
                       </a:endParaRPr>
                     </a:p>
                   </a:txBody>
@@ -19600,7 +20668,7 @@
                 <a:solidFill>
                   <a:srgbClr val="16181D"/>
                 </a:solidFill>
-                <a:latin typeface="Inter"/>
+                <a:latin typeface="Arial"/>
               </a:rPr>
               <a:t>GAAP to non-GAAP operating income</a:t>
             </a:r>
@@ -19646,7 +20714,7 @@
                 <a:solidFill>
                   <a:srgbClr val="596070"/>
                 </a:solidFill>
-                <a:latin typeface="Inter"/>
+                <a:latin typeface="Arial"/>
               </a:rPr>
               <a:t>$M, last five quarters</a:t>
             </a:r>
@@ -19670,12 +20738,12 @@
             <a:tbl>
               <a:tblPr firstRow="0" bandRow="0" lastRow="0" firstCol="0" lastCol="0" bandCol="0"/>
               <a:tblGrid>
-                <a:gridCol w="2464280"/>
-                <a:gridCol w="512121"/>
-                <a:gridCol w="516393"/>
-                <a:gridCol w="483774"/>
-                <a:gridCol w="511375"/>
-                <a:gridCol w="513548"/>
+                <a:gridCol w="2485213"/>
+                <a:gridCol w="503255"/>
+                <a:gridCol w="503255"/>
+                <a:gridCol w="503255"/>
+                <a:gridCol w="503255"/>
+                <a:gridCol w="503258"/>
               </a:tblGrid>
               <a:tr h="192278">
                 <a:tc>
@@ -19689,7 +20757,7 @@
                           <a:solidFill>
                             <a:srgbClr val="16181D"/>
                           </a:solidFill>
-                          <a:latin typeface="Inter"/>
+                          <a:latin typeface="Arial"/>
                         </a:rPr>
                         <a:t>$M</a:t>
                       </a:r>
@@ -19697,7 +20765,7 @@
                         <a:solidFill>
                           <a:srgbClr val="16181D"/>
                         </a:solidFill>
-                        <a:latin typeface="Inter"/>
+                        <a:latin typeface="Arial"/>
                       </a:endParaRPr>
                     </a:p>
                   </a:txBody>
@@ -19730,7 +20798,7 @@
                           <a:solidFill>
                             <a:srgbClr val="16181D"/>
                           </a:solidFill>
-                          <a:latin typeface="Inter"/>
+                          <a:latin typeface="Arial"/>
                         </a:rPr>
                         <a:t>Q3'25</a:t>
                       </a:r>
@@ -19738,7 +20806,7 @@
                         <a:solidFill>
                           <a:srgbClr val="16181D"/>
                         </a:solidFill>
-                        <a:latin typeface="Inter"/>
+                        <a:latin typeface="Arial"/>
                       </a:endParaRPr>
                     </a:p>
                   </a:txBody>
@@ -19771,7 +20839,7 @@
                           <a:solidFill>
                             <a:srgbClr val="16181D"/>
                           </a:solidFill>
-                          <a:latin typeface="Inter"/>
+                          <a:latin typeface="Arial"/>
                         </a:rPr>
                         <a:t>Q4'25</a:t>
                       </a:r>
@@ -19779,7 +20847,7 @@
                         <a:solidFill>
                           <a:srgbClr val="16181D"/>
                         </a:solidFill>
-                        <a:latin typeface="Inter"/>
+                        <a:latin typeface="Arial"/>
                       </a:endParaRPr>
                     </a:p>
                   </a:txBody>
@@ -19812,7 +20880,7 @@
                           <a:solidFill>
                             <a:srgbClr val="16181D"/>
                           </a:solidFill>
-                          <a:latin typeface="Inter"/>
+                          <a:latin typeface="Arial"/>
                         </a:rPr>
                         <a:t>Q1'26</a:t>
                       </a:r>
@@ -19820,7 +20888,7 @@
                         <a:solidFill>
                           <a:srgbClr val="16181D"/>
                         </a:solidFill>
-                        <a:latin typeface="Inter"/>
+                        <a:latin typeface="Arial"/>
                       </a:endParaRPr>
                     </a:p>
                   </a:txBody>
@@ -19853,7 +20921,7 @@
                           <a:solidFill>
                             <a:srgbClr val="16181D"/>
                           </a:solidFill>
-                          <a:latin typeface="Inter"/>
+                          <a:latin typeface="Arial"/>
                         </a:rPr>
                         <a:t>Q2'26</a:t>
                       </a:r>
@@ -19861,7 +20929,7 @@
                         <a:solidFill>
                           <a:srgbClr val="16181D"/>
                         </a:solidFill>
-                        <a:latin typeface="Inter"/>
+                        <a:latin typeface="Arial"/>
                       </a:endParaRPr>
                     </a:p>
                   </a:txBody>
@@ -19894,7 +20962,7 @@
                           <a:solidFill>
                             <a:srgbClr val="16181D"/>
                           </a:solidFill>
-                          <a:latin typeface="Inter"/>
+                          <a:latin typeface="Arial"/>
                         </a:rPr>
                         <a:t>Q3'26</a:t>
                       </a:r>
@@ -19902,7 +20970,7 @@
                         <a:solidFill>
                           <a:srgbClr val="16181D"/>
                         </a:solidFill>
-                        <a:latin typeface="Inter"/>
+                        <a:latin typeface="Arial"/>
                       </a:endParaRPr>
                     </a:p>
                   </a:txBody>
@@ -19937,7 +21005,7 @@
                           <a:solidFill>
                             <a:srgbClr val="16181D"/>
                           </a:solidFill>
-                          <a:latin typeface="Inter"/>
+                          <a:latin typeface="Arial"/>
                         </a:rPr>
                         <a:t>GAAP operating income (loss)</a:t>
                       </a:r>
@@ -19945,7 +21013,7 @@
                         <a:solidFill>
                           <a:srgbClr val="16181D"/>
                         </a:solidFill>
-                        <a:latin typeface="Inter"/>
+                        <a:latin typeface="Arial"/>
                       </a:endParaRPr>
                     </a:p>
                   </a:txBody>
@@ -19980,7 +21048,7 @@
                           <a:solidFill>
                             <a:srgbClr val="16181D"/>
                           </a:solidFill>
-                          <a:latin typeface="Inter"/>
+                          <a:latin typeface="Arial"/>
                         </a:rPr>
                         <a:t>(26.3)</a:t>
                       </a:r>
@@ -19988,7 +21056,7 @@
                         <a:solidFill>
                           <a:srgbClr val="16181D"/>
                         </a:solidFill>
-                        <a:latin typeface="Inter"/>
+                        <a:latin typeface="Arial"/>
                       </a:endParaRPr>
                     </a:p>
                   </a:txBody>
@@ -20023,7 +21091,7 @@
                           <a:solidFill>
                             <a:srgbClr val="16181D"/>
                           </a:solidFill>
-                          <a:latin typeface="Inter"/>
+                          <a:latin typeface="Arial"/>
                         </a:rPr>
                         <a:t>(17.3)</a:t>
                       </a:r>
@@ -20031,7 +21099,7 @@
                         <a:solidFill>
                           <a:srgbClr val="16181D"/>
                         </a:solidFill>
-                        <a:latin typeface="Inter"/>
+                        <a:latin typeface="Arial"/>
                       </a:endParaRPr>
                     </a:p>
                   </a:txBody>
@@ -20066,7 +21134,7 @@
                           <a:solidFill>
                             <a:srgbClr val="16181D"/>
                           </a:solidFill>
-                          <a:latin typeface="Inter"/>
+                          <a:latin typeface="Arial"/>
                         </a:rPr>
                         <a:t>(12.5)</a:t>
                       </a:r>
@@ -20074,7 +21142,7 @@
                         <a:solidFill>
                           <a:srgbClr val="16181D"/>
                         </a:solidFill>
-                        <a:latin typeface="Inter"/>
+                        <a:latin typeface="Arial"/>
                       </a:endParaRPr>
                     </a:p>
                   </a:txBody>
@@ -20109,7 +21177,7 @@
                           <a:solidFill>
                             <a:srgbClr val="16181D"/>
                           </a:solidFill>
-                          <a:latin typeface="Inter"/>
+                          <a:latin typeface="Arial"/>
                         </a:rPr>
                         <a:t>(7.0)</a:t>
                       </a:r>
@@ -20117,7 +21185,7 @@
                         <a:solidFill>
                           <a:srgbClr val="16181D"/>
                         </a:solidFill>
-                        <a:latin typeface="Inter"/>
+                        <a:latin typeface="Arial"/>
                       </a:endParaRPr>
                     </a:p>
                   </a:txBody>
@@ -20152,7 +21220,7 @@
                           <a:solidFill>
                             <a:srgbClr val="2E3A9E"/>
                           </a:solidFill>
-                          <a:latin typeface="Inter"/>
+                          <a:latin typeface="Arial"/>
                         </a:rPr>
                         <a:t>(1.3)</a:t>
                       </a:r>
@@ -20160,7 +21228,7 @@
                         <a:solidFill>
                           <a:srgbClr val="2E3A9E"/>
                         </a:solidFill>
-                        <a:latin typeface="Inter"/>
+                        <a:latin typeface="Arial"/>
                       </a:endParaRPr>
                     </a:p>
                   </a:txBody>
@@ -20197,7 +21265,7 @@
                           <a:solidFill>
                             <a:srgbClr val="16181D"/>
                           </a:solidFill>
-                          <a:latin typeface="Inter"/>
+                          <a:latin typeface="Arial"/>
                         </a:rPr>
                         <a:t>Stock-based compensation</a:t>
                       </a:r>
@@ -20205,7 +21273,7 @@
                         <a:solidFill>
                           <a:srgbClr val="16181D"/>
                         </a:solidFill>
-                        <a:latin typeface="Inter"/>
+                        <a:latin typeface="Arial"/>
                       </a:endParaRPr>
                     </a:p>
                   </a:txBody>
@@ -20240,7 +21308,7 @@
                           <a:solidFill>
                             <a:srgbClr val="16181D"/>
                           </a:solidFill>
-                          <a:latin typeface="Inter"/>
+                          <a:latin typeface="Arial"/>
                         </a:rPr>
                         <a:t>47.9</a:t>
                       </a:r>
@@ -20248,7 +21316,7 @@
                         <a:solidFill>
                           <a:srgbClr val="16181D"/>
                         </a:solidFill>
-                        <a:latin typeface="Inter"/>
+                        <a:latin typeface="Arial"/>
                       </a:endParaRPr>
                     </a:p>
                   </a:txBody>
@@ -20283,7 +21351,7 @@
                           <a:solidFill>
                             <a:srgbClr val="16181D"/>
                           </a:solidFill>
-                          <a:latin typeface="Inter"/>
+                          <a:latin typeface="Arial"/>
                         </a:rPr>
                         <a:t>49.6</a:t>
                       </a:r>
@@ -20291,7 +21359,7 @@
                         <a:solidFill>
                           <a:srgbClr val="16181D"/>
                         </a:solidFill>
-                        <a:latin typeface="Inter"/>
+                        <a:latin typeface="Arial"/>
                       </a:endParaRPr>
                     </a:p>
                   </a:txBody>
@@ -20326,7 +21394,7 @@
                           <a:solidFill>
                             <a:srgbClr val="16181D"/>
                           </a:solidFill>
-                          <a:latin typeface="Inter"/>
+                          <a:latin typeface="Arial"/>
                         </a:rPr>
                         <a:t>50.2</a:t>
                       </a:r>
@@ -20334,7 +21402,7 @@
                         <a:solidFill>
                           <a:srgbClr val="16181D"/>
                         </a:solidFill>
-                        <a:latin typeface="Inter"/>
+                        <a:latin typeface="Arial"/>
                       </a:endParaRPr>
                     </a:p>
                   </a:txBody>
@@ -20369,7 +21437,7 @@
                           <a:solidFill>
                             <a:srgbClr val="16181D"/>
                           </a:solidFill>
-                          <a:latin typeface="Inter"/>
+                          <a:latin typeface="Arial"/>
                         </a:rPr>
                         <a:t>51.4</a:t>
                       </a:r>
@@ -20377,7 +21445,7 @@
                         <a:solidFill>
                           <a:srgbClr val="16181D"/>
                         </a:solidFill>
-                        <a:latin typeface="Inter"/>
+                        <a:latin typeface="Arial"/>
                       </a:endParaRPr>
                     </a:p>
                   </a:txBody>
@@ -20412,7 +21480,7 @@
                           <a:solidFill>
                             <a:srgbClr val="2E3A9E"/>
                           </a:solidFill>
-                          <a:latin typeface="Inter"/>
+                          <a:latin typeface="Arial"/>
                         </a:rPr>
                         <a:t>52.3</a:t>
                       </a:r>
@@ -20420,7 +21488,7 @@
                         <a:solidFill>
                           <a:srgbClr val="2E3A9E"/>
                         </a:solidFill>
-                        <a:latin typeface="Inter"/>
+                        <a:latin typeface="Arial"/>
                       </a:endParaRPr>
                     </a:p>
                   </a:txBody>
@@ -20457,7 +21525,7 @@
                           <a:solidFill>
                             <a:srgbClr val="16181D"/>
                           </a:solidFill>
-                          <a:latin typeface="Inter"/>
+                          <a:latin typeface="Arial"/>
                         </a:rPr>
                         <a:t>Amortization of acquired intangibles</a:t>
                       </a:r>
@@ -20465,7 +21533,7 @@
                         <a:solidFill>
                           <a:srgbClr val="16181D"/>
                         </a:solidFill>
-                        <a:latin typeface="Inter"/>
+                        <a:latin typeface="Arial"/>
                       </a:endParaRPr>
                     </a:p>
                   </a:txBody>
@@ -20500,7 +21568,7 @@
                           <a:solidFill>
                             <a:srgbClr val="16181D"/>
                           </a:solidFill>
-                          <a:latin typeface="Inter"/>
+                          <a:latin typeface="Arial"/>
                         </a:rPr>
                         <a:t>6.4</a:t>
                       </a:r>
@@ -20508,7 +21576,7 @@
                         <a:solidFill>
                           <a:srgbClr val="16181D"/>
                         </a:solidFill>
-                        <a:latin typeface="Inter"/>
+                        <a:latin typeface="Arial"/>
                       </a:endParaRPr>
                     </a:p>
                   </a:txBody>
@@ -20543,7 +21611,7 @@
                           <a:solidFill>
                             <a:srgbClr val="16181D"/>
                           </a:solidFill>
-                          <a:latin typeface="Inter"/>
+                          <a:latin typeface="Arial"/>
                         </a:rPr>
                         <a:t>6.4</a:t>
                       </a:r>
@@ -20551,7 +21619,7 @@
                         <a:solidFill>
                           <a:srgbClr val="16181D"/>
                         </a:solidFill>
-                        <a:latin typeface="Inter"/>
+                        <a:latin typeface="Arial"/>
                       </a:endParaRPr>
                     </a:p>
                   </a:txBody>
@@ -20586,7 +21654,7 @@
                           <a:solidFill>
                             <a:srgbClr val="16181D"/>
                           </a:solidFill>
-                          <a:latin typeface="Inter"/>
+                          <a:latin typeface="Arial"/>
                         </a:rPr>
                         <a:t>6.2</a:t>
                       </a:r>
@@ -20594,7 +21662,7 @@
                         <a:solidFill>
                           <a:srgbClr val="16181D"/>
                         </a:solidFill>
-                        <a:latin typeface="Inter"/>
+                        <a:latin typeface="Arial"/>
                       </a:endParaRPr>
                     </a:p>
                   </a:txBody>
@@ -20629,7 +21697,7 @@
                           <a:solidFill>
                             <a:srgbClr val="16181D"/>
                           </a:solidFill>
-                          <a:latin typeface="Inter"/>
+                          <a:latin typeface="Arial"/>
                         </a:rPr>
                         <a:t>6.1</a:t>
                       </a:r>
@@ -20637,7 +21705,7 @@
                         <a:solidFill>
                           <a:srgbClr val="16181D"/>
                         </a:solidFill>
-                        <a:latin typeface="Inter"/>
+                        <a:latin typeface="Arial"/>
                       </a:endParaRPr>
                     </a:p>
                   </a:txBody>
@@ -20672,7 +21740,7 @@
                           <a:solidFill>
                             <a:srgbClr val="2E3A9E"/>
                           </a:solidFill>
-                          <a:latin typeface="Inter"/>
+                          <a:latin typeface="Arial"/>
                         </a:rPr>
                         <a:t>6.1</a:t>
                       </a:r>
@@ -20680,7 +21748,7 @@
                         <a:solidFill>
                           <a:srgbClr val="2E3A9E"/>
                         </a:solidFill>
-                        <a:latin typeface="Inter"/>
+                        <a:latin typeface="Arial"/>
                       </a:endParaRPr>
                     </a:p>
                   </a:txBody>
@@ -20717,7 +21785,7 @@
                           <a:solidFill>
                             <a:srgbClr val="16181D"/>
                           </a:solidFill>
-                          <a:latin typeface="Inter"/>
+                          <a:latin typeface="Arial"/>
                         </a:rPr>
                         <a:t>Employer payroll tax on equity</a:t>
                       </a:r>
@@ -20725,7 +21793,7 @@
                         <a:solidFill>
                           <a:srgbClr val="16181D"/>
                         </a:solidFill>
-                        <a:latin typeface="Inter"/>
+                        <a:latin typeface="Arial"/>
                       </a:endParaRPr>
                     </a:p>
                   </a:txBody>
@@ -20760,7 +21828,7 @@
                           <a:solidFill>
                             <a:srgbClr val="16181D"/>
                           </a:solidFill>
-                          <a:latin typeface="Inter"/>
+                          <a:latin typeface="Arial"/>
                         </a:rPr>
                         <a:t>1.9</a:t>
                       </a:r>
@@ -20768,7 +21836,7 @@
                         <a:solidFill>
                           <a:srgbClr val="16181D"/>
                         </a:solidFill>
-                        <a:latin typeface="Inter"/>
+                        <a:latin typeface="Arial"/>
                       </a:endParaRPr>
                     </a:p>
                   </a:txBody>
@@ -20803,7 +21871,7 @@
                           <a:solidFill>
                             <a:srgbClr val="16181D"/>
                           </a:solidFill>
-                          <a:latin typeface="Inter"/>
+                          <a:latin typeface="Arial"/>
                         </a:rPr>
                         <a:t>1.2</a:t>
                       </a:r>
@@ -20811,7 +21879,7 @@
                         <a:solidFill>
                           <a:srgbClr val="16181D"/>
                         </a:solidFill>
-                        <a:latin typeface="Inter"/>
+                        <a:latin typeface="Arial"/>
                       </a:endParaRPr>
                     </a:p>
                   </a:txBody>
@@ -20846,7 +21914,7 @@
                           <a:solidFill>
                             <a:srgbClr val="16181D"/>
                           </a:solidFill>
-                          <a:latin typeface="Inter"/>
+                          <a:latin typeface="Arial"/>
                         </a:rPr>
                         <a:t>3.1</a:t>
                       </a:r>
@@ -20854,7 +21922,7 @@
                         <a:solidFill>
                           <a:srgbClr val="16181D"/>
                         </a:solidFill>
-                        <a:latin typeface="Inter"/>
+                        <a:latin typeface="Arial"/>
                       </a:endParaRPr>
                     </a:p>
                   </a:txBody>
@@ -20889,7 +21957,7 @@
                           <a:solidFill>
                             <a:srgbClr val="16181D"/>
                           </a:solidFill>
-                          <a:latin typeface="Inter"/>
+                          <a:latin typeface="Arial"/>
                         </a:rPr>
                         <a:t>2.2</a:t>
                       </a:r>
@@ -20897,7 +21965,7 @@
                         <a:solidFill>
                           <a:srgbClr val="16181D"/>
                         </a:solidFill>
-                        <a:latin typeface="Inter"/>
+                        <a:latin typeface="Arial"/>
                       </a:endParaRPr>
                     </a:p>
                   </a:txBody>
@@ -20932,7 +22000,7 @@
                           <a:solidFill>
                             <a:srgbClr val="2E3A9E"/>
                           </a:solidFill>
-                          <a:latin typeface="Inter"/>
+                          <a:latin typeface="Arial"/>
                         </a:rPr>
                         <a:t>2.4</a:t>
                       </a:r>
@@ -20940,7 +22008,7 @@
                         <a:solidFill>
                           <a:srgbClr val="2E3A9E"/>
                         </a:solidFill>
-                        <a:latin typeface="Inter"/>
+                        <a:latin typeface="Arial"/>
                       </a:endParaRPr>
                     </a:p>
                   </a:txBody>
@@ -20977,7 +22045,7 @@
                           <a:solidFill>
                             <a:srgbClr val="16181D"/>
                           </a:solidFill>
-                          <a:latin typeface="Inter"/>
+                          <a:latin typeface="Arial"/>
                         </a:rPr>
                         <a:t>Restructuring</a:t>
                       </a:r>
@@ -20985,7 +22053,7 @@
                         <a:solidFill>
                           <a:srgbClr val="16181D"/>
                         </a:solidFill>
-                        <a:latin typeface="Inter"/>
+                        <a:latin typeface="Arial"/>
                       </a:endParaRPr>
                     </a:p>
                   </a:txBody>
@@ -21020,7 +22088,7 @@
                           <a:solidFill>
                             <a:srgbClr val="16181D"/>
                           </a:solidFill>
-                          <a:latin typeface="Inter"/>
+                          <a:latin typeface="Arial"/>
                         </a:rPr>
                         <a:t>3.2</a:t>
                       </a:r>
@@ -21028,7 +22096,7 @@
                         <a:solidFill>
                           <a:srgbClr val="16181D"/>
                         </a:solidFill>
-                        <a:latin typeface="Inter"/>
+                        <a:latin typeface="Arial"/>
                       </a:endParaRPr>
                     </a:p>
                   </a:txBody>
@@ -21063,7 +22131,7 @@
                           <a:solidFill>
                             <a:srgbClr val="16181D"/>
                           </a:solidFill>
-                          <a:latin typeface="Inter"/>
+                          <a:latin typeface="Arial"/>
                         </a:rPr>
                         <a:t>0.0</a:t>
                       </a:r>
@@ -21071,7 +22139,7 @@
                         <a:solidFill>
                           <a:srgbClr val="16181D"/>
                         </a:solidFill>
-                        <a:latin typeface="Inter"/>
+                        <a:latin typeface="Arial"/>
                       </a:endParaRPr>
                     </a:p>
                   </a:txBody>
@@ -21106,7 +22174,7 @@
                           <a:solidFill>
                             <a:srgbClr val="16181D"/>
                           </a:solidFill>
-                          <a:latin typeface="Inter"/>
+                          <a:latin typeface="Arial"/>
                         </a:rPr>
                         <a:t>0.0</a:t>
                       </a:r>
@@ -21114,7 +22182,7 @@
                         <a:solidFill>
                           <a:srgbClr val="16181D"/>
                         </a:solidFill>
-                        <a:latin typeface="Inter"/>
+                        <a:latin typeface="Arial"/>
                       </a:endParaRPr>
                     </a:p>
                   </a:txBody>
@@ -21149,7 +22217,7 @@
                           <a:solidFill>
                             <a:srgbClr val="16181D"/>
                           </a:solidFill>
-                          <a:latin typeface="Inter"/>
+                          <a:latin typeface="Arial"/>
                         </a:rPr>
                         <a:t>1.1</a:t>
                       </a:r>
@@ -21157,7 +22225,7 @@
                         <a:solidFill>
                           <a:srgbClr val="16181D"/>
                         </a:solidFill>
-                        <a:latin typeface="Inter"/>
+                        <a:latin typeface="Arial"/>
                       </a:endParaRPr>
                     </a:p>
                   </a:txBody>
@@ -21192,7 +22260,7 @@
                           <a:solidFill>
                             <a:srgbClr val="2E3A9E"/>
                           </a:solidFill>
-                          <a:latin typeface="Inter"/>
+                          <a:latin typeface="Arial"/>
                         </a:rPr>
                         <a:t>0.0</a:t>
                       </a:r>
@@ -21200,7 +22268,7 @@
                         <a:solidFill>
                           <a:srgbClr val="2E3A9E"/>
                         </a:solidFill>
-                        <a:latin typeface="Inter"/>
+                        <a:latin typeface="Arial"/>
                       </a:endParaRPr>
                     </a:p>
                   </a:txBody>
@@ -21237,7 +22305,7 @@
                           <a:solidFill>
                             <a:srgbClr val="16181D"/>
                           </a:solidFill>
-                          <a:latin typeface="Inter"/>
+                          <a:latin typeface="Arial"/>
                         </a:rPr>
                         <a:t>Non-GAAP operating income</a:t>
                       </a:r>
@@ -21245,7 +22313,7 @@
                         <a:solidFill>
                           <a:srgbClr val="16181D"/>
                         </a:solidFill>
-                        <a:latin typeface="Inter"/>
+                        <a:latin typeface="Arial"/>
                       </a:endParaRPr>
                     </a:p>
                   </a:txBody>
@@ -21280,7 +22348,7 @@
                           <a:solidFill>
                             <a:srgbClr val="16181D"/>
                           </a:solidFill>
-                          <a:latin typeface="Inter"/>
+                          <a:latin typeface="Arial"/>
                         </a:rPr>
                         <a:t>33.1</a:t>
                       </a:r>
@@ -21288,7 +22356,7 @@
                         <a:solidFill>
                           <a:srgbClr val="16181D"/>
                         </a:solidFill>
-                        <a:latin typeface="Inter"/>
+                        <a:latin typeface="Arial"/>
                       </a:endParaRPr>
                     </a:p>
                   </a:txBody>
@@ -21323,7 +22391,7 @@
                           <a:solidFill>
                             <a:srgbClr val="16181D"/>
                           </a:solidFill>
-                          <a:latin typeface="Inter"/>
+                          <a:latin typeface="Arial"/>
                         </a:rPr>
                         <a:t>39.9</a:t>
                       </a:r>
@@ -21331,7 +22399,7 @@
                         <a:solidFill>
                           <a:srgbClr val="16181D"/>
                         </a:solidFill>
-                        <a:latin typeface="Inter"/>
+                        <a:latin typeface="Arial"/>
                       </a:endParaRPr>
                     </a:p>
                   </a:txBody>
@@ -21366,7 +22434,7 @@
                           <a:solidFill>
                             <a:srgbClr val="16181D"/>
                           </a:solidFill>
-                          <a:latin typeface="Inter"/>
+                          <a:latin typeface="Arial"/>
                         </a:rPr>
                         <a:t>47.0</a:t>
                       </a:r>
@@ -21374,7 +22442,7 @@
                         <a:solidFill>
                           <a:srgbClr val="16181D"/>
                         </a:solidFill>
-                        <a:latin typeface="Inter"/>
+                        <a:latin typeface="Arial"/>
                       </a:endParaRPr>
                     </a:p>
                   </a:txBody>
@@ -21409,7 +22477,7 @@
                           <a:solidFill>
                             <a:srgbClr val="16181D"/>
                           </a:solidFill>
-                          <a:latin typeface="Inter"/>
+                          <a:latin typeface="Arial"/>
                         </a:rPr>
                         <a:t>53.8</a:t>
                       </a:r>
@@ -21417,7 +22485,7 @@
                         <a:solidFill>
                           <a:srgbClr val="16181D"/>
                         </a:solidFill>
-                        <a:latin typeface="Inter"/>
+                        <a:latin typeface="Arial"/>
                       </a:endParaRPr>
                     </a:p>
                   </a:txBody>
@@ -21452,7 +22520,7 @@
                           <a:solidFill>
                             <a:srgbClr val="2E3A9E"/>
                           </a:solidFill>
-                          <a:latin typeface="Inter"/>
+                          <a:latin typeface="Arial"/>
                         </a:rPr>
                         <a:t>59.5</a:t>
                       </a:r>
@@ -21460,7 +22528,7 @@
                         <a:solidFill>
                           <a:srgbClr val="2E3A9E"/>
                         </a:solidFill>
-                        <a:latin typeface="Inter"/>
+                        <a:latin typeface="Arial"/>
                       </a:endParaRPr>
                     </a:p>
                   </a:txBody>
@@ -21528,7 +22596,7 @@
                 <a:solidFill>
                   <a:srgbClr val="16181D"/>
                 </a:solidFill>
-                <a:latin typeface="Inter"/>
+                <a:latin typeface="Arial"/>
               </a:rPr>
               <a:t>Free cash flow</a:t>
             </a:r>
@@ -21574,7 +22642,7 @@
                 <a:solidFill>
                   <a:srgbClr val="596070"/>
                 </a:solidFill>
-                <a:latin typeface="Inter"/>
+                <a:latin typeface="Arial"/>
               </a:rPr>
               <a:t>$M; margin 18.3% in Q3 FY25 and 21.4% in Q3 FY26</a:t>
             </a:r>
@@ -21598,12 +22666,12 @@
             <a:tbl>
               <a:tblPr firstRow="0" bandRow="0" lastRow="0" firstCol="0" lastCol="0" bandCol="0"/>
               <a:tblGrid>
-                <a:gridCol w="1788046"/>
-                <a:gridCol w="648615"/>
-                <a:gridCol w="654026"/>
-                <a:gridCol w="612712"/>
-                <a:gridCol w="647670"/>
-                <a:gridCol w="650422"/>
+                <a:gridCol w="1812514"/>
+                <a:gridCol w="637795"/>
+                <a:gridCol w="637795"/>
+                <a:gridCol w="637795"/>
+                <a:gridCol w="637795"/>
+                <a:gridCol w="637797"/>
               </a:tblGrid>
               <a:tr h="192278">
                 <a:tc>
@@ -21617,7 +22685,7 @@
                           <a:solidFill>
                             <a:srgbClr val="16181D"/>
                           </a:solidFill>
-                          <a:latin typeface="Inter"/>
+                          <a:latin typeface="Arial"/>
                         </a:rPr>
                         <a:t>$M</a:t>
                       </a:r>
@@ -21625,7 +22693,7 @@
                         <a:solidFill>
                           <a:srgbClr val="16181D"/>
                         </a:solidFill>
-                        <a:latin typeface="Inter"/>
+                        <a:latin typeface="Arial"/>
                       </a:endParaRPr>
                     </a:p>
                   </a:txBody>
@@ -21658,7 +22726,7 @@
                           <a:solidFill>
                             <a:srgbClr val="16181D"/>
                           </a:solidFill>
-                          <a:latin typeface="Inter"/>
+                          <a:latin typeface="Arial"/>
                         </a:rPr>
                         <a:t>Q3'25</a:t>
                       </a:r>
@@ -21666,7 +22734,7 @@
                         <a:solidFill>
                           <a:srgbClr val="16181D"/>
                         </a:solidFill>
-                        <a:latin typeface="Inter"/>
+                        <a:latin typeface="Arial"/>
                       </a:endParaRPr>
                     </a:p>
                   </a:txBody>
@@ -21699,7 +22767,7 @@
                           <a:solidFill>
                             <a:srgbClr val="16181D"/>
                           </a:solidFill>
-                          <a:latin typeface="Inter"/>
+                          <a:latin typeface="Arial"/>
                         </a:rPr>
                         <a:t>Q4'25</a:t>
                       </a:r>
@@ -21707,7 +22775,7 @@
                         <a:solidFill>
                           <a:srgbClr val="16181D"/>
                         </a:solidFill>
-                        <a:latin typeface="Inter"/>
+                        <a:latin typeface="Arial"/>
                       </a:endParaRPr>
                     </a:p>
                   </a:txBody>
@@ -21740,7 +22808,7 @@
                           <a:solidFill>
                             <a:srgbClr val="16181D"/>
                           </a:solidFill>
-                          <a:latin typeface="Inter"/>
+                          <a:latin typeface="Arial"/>
                         </a:rPr>
                         <a:t>Q1'26</a:t>
                       </a:r>
@@ -21748,7 +22816,7 @@
                         <a:solidFill>
                           <a:srgbClr val="16181D"/>
                         </a:solidFill>
-                        <a:latin typeface="Inter"/>
+                        <a:latin typeface="Arial"/>
                       </a:endParaRPr>
                     </a:p>
                   </a:txBody>
@@ -21781,7 +22849,7 @@
                           <a:solidFill>
                             <a:srgbClr val="16181D"/>
                           </a:solidFill>
-                          <a:latin typeface="Inter"/>
+                          <a:latin typeface="Arial"/>
                         </a:rPr>
                         <a:t>Q2'26</a:t>
                       </a:r>
@@ -21789,7 +22857,7 @@
                         <a:solidFill>
                           <a:srgbClr val="16181D"/>
                         </a:solidFill>
-                        <a:latin typeface="Inter"/>
+                        <a:latin typeface="Arial"/>
                       </a:endParaRPr>
                     </a:p>
                   </a:txBody>
@@ -21822,7 +22890,7 @@
                           <a:solidFill>
                             <a:srgbClr val="16181D"/>
                           </a:solidFill>
-                          <a:latin typeface="Inter"/>
+                          <a:latin typeface="Arial"/>
                         </a:rPr>
                         <a:t>Q3'26</a:t>
                       </a:r>
@@ -21830,7 +22898,7 @@
                         <a:solidFill>
                           <a:srgbClr val="16181D"/>
                         </a:solidFill>
-                        <a:latin typeface="Inter"/>
+                        <a:latin typeface="Arial"/>
                       </a:endParaRPr>
                     </a:p>
                   </a:txBody>
@@ -21865,7 +22933,7 @@
                           <a:solidFill>
                             <a:srgbClr val="16181D"/>
                           </a:solidFill>
-                          <a:latin typeface="Inter"/>
+                          <a:latin typeface="Arial"/>
                         </a:rPr>
                         <a:t>Operating cash flow</a:t>
                       </a:r>
@@ -21873,7 +22941,7 @@
                         <a:solidFill>
                           <a:srgbClr val="16181D"/>
                         </a:solidFill>
-                        <a:latin typeface="Inter"/>
+                        <a:latin typeface="Arial"/>
                       </a:endParaRPr>
                     </a:p>
                   </a:txBody>
@@ -21908,7 +22976,7 @@
                           <a:solidFill>
                             <a:srgbClr val="16181D"/>
                           </a:solidFill>
-                          <a:latin typeface="Inter"/>
+                          <a:latin typeface="Arial"/>
                         </a:rPr>
                         <a:t>61.2</a:t>
                       </a:r>
@@ -21916,7 +22984,7 @@
                         <a:solidFill>
                           <a:srgbClr val="16181D"/>
                         </a:solidFill>
-                        <a:latin typeface="Inter"/>
+                        <a:latin typeface="Arial"/>
                       </a:endParaRPr>
                     </a:p>
                   </a:txBody>
@@ -21951,7 +23019,7 @@
                           <a:solidFill>
                             <a:srgbClr val="16181D"/>
                           </a:solidFill>
-                          <a:latin typeface="Inter"/>
+                          <a:latin typeface="Arial"/>
                         </a:rPr>
                         <a:t>74.8</a:t>
                       </a:r>
@@ -21959,7 +23027,7 @@
                         <a:solidFill>
                           <a:srgbClr val="16181D"/>
                         </a:solidFill>
-                        <a:latin typeface="Inter"/>
+                        <a:latin typeface="Arial"/>
                       </a:endParaRPr>
                     </a:p>
                   </a:txBody>
@@ -21994,7 +23062,7 @@
                           <a:solidFill>
                             <a:srgbClr val="16181D"/>
                           </a:solidFill>
-                          <a:latin typeface="Inter"/>
+                          <a:latin typeface="Arial"/>
                         </a:rPr>
                         <a:t>70.3</a:t>
                       </a:r>
@@ -22002,7 +23070,7 @@
                         <a:solidFill>
                           <a:srgbClr val="16181D"/>
                         </a:solidFill>
-                        <a:latin typeface="Inter"/>
+                        <a:latin typeface="Arial"/>
                       </a:endParaRPr>
                     </a:p>
                   </a:txBody>
@@ -22037,7 +23105,7 @@
                           <a:solidFill>
                             <a:srgbClr val="16181D"/>
                           </a:solidFill>
-                          <a:latin typeface="Inter"/>
+                          <a:latin typeface="Arial"/>
                         </a:rPr>
                         <a:t>73.9</a:t>
                       </a:r>
@@ -22045,7 +23113,7 @@
                         <a:solidFill>
                           <a:srgbClr val="16181D"/>
                         </a:solidFill>
-                        <a:latin typeface="Inter"/>
+                        <a:latin typeface="Arial"/>
                       </a:endParaRPr>
                     </a:p>
                   </a:txBody>
@@ -22080,7 +23148,7 @@
                           <a:solidFill>
                             <a:srgbClr val="2E3A9E"/>
                           </a:solidFill>
-                          <a:latin typeface="Inter"/>
+                          <a:latin typeface="Arial"/>
                         </a:rPr>
                         <a:t>86.5</a:t>
                       </a:r>
@@ -22088,7 +23156,7 @@
                         <a:solidFill>
                           <a:srgbClr val="2E3A9E"/>
                         </a:solidFill>
-                        <a:latin typeface="Inter"/>
+                        <a:latin typeface="Arial"/>
                       </a:endParaRPr>
                     </a:p>
                   </a:txBody>
@@ -22125,7 +23193,7 @@
                           <a:solidFill>
                             <a:srgbClr val="16181D"/>
                           </a:solidFill>
-                          <a:latin typeface="Inter"/>
+                          <a:latin typeface="Arial"/>
                         </a:rPr>
                         <a:t>Capital expenditure</a:t>
                       </a:r>
@@ -22133,7 +23201,7 @@
                         <a:solidFill>
                           <a:srgbClr val="16181D"/>
                         </a:solidFill>
-                        <a:latin typeface="Inter"/>
+                        <a:latin typeface="Arial"/>
                       </a:endParaRPr>
                     </a:p>
                   </a:txBody>
@@ -22168,7 +23236,7 @@
                           <a:solidFill>
                             <a:srgbClr val="16181D"/>
                           </a:solidFill>
-                          <a:latin typeface="Inter"/>
+                          <a:latin typeface="Arial"/>
                         </a:rPr>
                         <a:t>(7.1)</a:t>
                       </a:r>
@@ -22176,7 +23244,7 @@
                         <a:solidFill>
                           <a:srgbClr val="16181D"/>
                         </a:solidFill>
-                        <a:latin typeface="Inter"/>
+                        <a:latin typeface="Arial"/>
                       </a:endParaRPr>
                     </a:p>
                   </a:txBody>
@@ -22211,7 +23279,7 @@
                           <a:solidFill>
                             <a:srgbClr val="16181D"/>
                           </a:solidFill>
-                          <a:latin typeface="Inter"/>
+                          <a:latin typeface="Arial"/>
                         </a:rPr>
                         <a:t>(8.0)</a:t>
                       </a:r>
@@ -22219,7 +23287,7 @@
                         <a:solidFill>
                           <a:srgbClr val="16181D"/>
                         </a:solidFill>
-                        <a:latin typeface="Inter"/>
+                        <a:latin typeface="Arial"/>
                       </a:endParaRPr>
                     </a:p>
                   </a:txBody>
@@ -22254,7 +23322,7 @@
                           <a:solidFill>
                             <a:srgbClr val="16181D"/>
                           </a:solidFill>
-                          <a:latin typeface="Inter"/>
+                          <a:latin typeface="Arial"/>
                         </a:rPr>
                         <a:t>(7.4)</a:t>
                       </a:r>
@@ -22262,7 +23330,7 @@
                         <a:solidFill>
                           <a:srgbClr val="16181D"/>
                         </a:solidFill>
-                        <a:latin typeface="Inter"/>
+                        <a:latin typeface="Arial"/>
                       </a:endParaRPr>
                     </a:p>
                   </a:txBody>
@@ -22297,7 +23365,7 @@
                           <a:solidFill>
                             <a:srgbClr val="16181D"/>
                           </a:solidFill>
-                          <a:latin typeface="Inter"/>
+                          <a:latin typeface="Arial"/>
                         </a:rPr>
                         <a:t>(8.3)</a:t>
                       </a:r>
@@ -22305,7 +23373,7 @@
                         <a:solidFill>
                           <a:srgbClr val="16181D"/>
                         </a:solidFill>
-                        <a:latin typeface="Inter"/>
+                        <a:latin typeface="Arial"/>
                       </a:endParaRPr>
                     </a:p>
                   </a:txBody>
@@ -22340,7 +23408,7 @@
                           <a:solidFill>
                             <a:srgbClr val="2E3A9E"/>
                           </a:solidFill>
-                          <a:latin typeface="Inter"/>
+                          <a:latin typeface="Arial"/>
                         </a:rPr>
                         <a:t>(9.8)</a:t>
                       </a:r>
@@ -22348,7 +23416,7 @@
                         <a:solidFill>
                           <a:srgbClr val="2E3A9E"/>
                         </a:solidFill>
-                        <a:latin typeface="Inter"/>
+                        <a:latin typeface="Arial"/>
                       </a:endParaRPr>
                     </a:p>
                   </a:txBody>
@@ -22385,7 +23453,7 @@
                           <a:solidFill>
                             <a:srgbClr val="16181D"/>
                           </a:solidFill>
-                          <a:latin typeface="Inter"/>
+                          <a:latin typeface="Arial"/>
                         </a:rPr>
                         <a:t>Free cash flow</a:t>
                       </a:r>
@@ -22393,7 +23461,7 @@
                         <a:solidFill>
                           <a:srgbClr val="16181D"/>
                         </a:solidFill>
-                        <a:latin typeface="Inter"/>
+                        <a:latin typeface="Arial"/>
                       </a:endParaRPr>
                     </a:p>
                   </a:txBody>
@@ -22428,7 +23496,7 @@
                           <a:solidFill>
                             <a:srgbClr val="16181D"/>
                           </a:solidFill>
-                          <a:latin typeface="Inter"/>
+                          <a:latin typeface="Arial"/>
                         </a:rPr>
                         <a:t>54.1</a:t>
                       </a:r>
@@ -22436,7 +23504,7 @@
                         <a:solidFill>
                           <a:srgbClr val="16181D"/>
                         </a:solidFill>
-                        <a:latin typeface="Inter"/>
+                        <a:latin typeface="Arial"/>
                       </a:endParaRPr>
                     </a:p>
                   </a:txBody>
@@ -22471,7 +23539,7 @@
                           <a:solidFill>
                             <a:srgbClr val="16181D"/>
                           </a:solidFill>
-                          <a:latin typeface="Inter"/>
+                          <a:latin typeface="Arial"/>
                         </a:rPr>
                         <a:t>66.8</a:t>
                       </a:r>
@@ -22479,7 +23547,7 @@
                         <a:solidFill>
                           <a:srgbClr val="16181D"/>
                         </a:solidFill>
-                        <a:latin typeface="Inter"/>
+                        <a:latin typeface="Arial"/>
                       </a:endParaRPr>
                     </a:p>
                   </a:txBody>
@@ -22514,7 +23582,7 @@
                           <a:solidFill>
                             <a:srgbClr val="16181D"/>
                           </a:solidFill>
-                          <a:latin typeface="Inter"/>
+                          <a:latin typeface="Arial"/>
                         </a:rPr>
                         <a:t>62.9</a:t>
                       </a:r>
@@ -22522,7 +23590,7 @@
                         <a:solidFill>
                           <a:srgbClr val="16181D"/>
                         </a:solidFill>
-                        <a:latin typeface="Inter"/>
+                        <a:latin typeface="Arial"/>
                       </a:endParaRPr>
                     </a:p>
                   </a:txBody>
@@ -22557,7 +23625,7 @@
                           <a:solidFill>
                             <a:srgbClr val="16181D"/>
                           </a:solidFill>
-                          <a:latin typeface="Inter"/>
+                          <a:latin typeface="Arial"/>
                         </a:rPr>
                         <a:t>65.6</a:t>
                       </a:r>
@@ -22565,7 +23633,7 @@
                         <a:solidFill>
                           <a:srgbClr val="16181D"/>
                         </a:solidFill>
-                        <a:latin typeface="Inter"/>
+                        <a:latin typeface="Arial"/>
                       </a:endParaRPr>
                     </a:p>
                   </a:txBody>
@@ -22600,7 +23668,7 @@
                           <a:solidFill>
                             <a:srgbClr val="2E3A9E"/>
                           </a:solidFill>
-                          <a:latin typeface="Inter"/>
+                          <a:latin typeface="Arial"/>
                         </a:rPr>
                         <a:t>76.7</a:t>
                       </a:r>
@@ -22608,7 +23676,7 @@
                         <a:solidFill>
                           <a:srgbClr val="2E3A9E"/>
                         </a:solidFill>
-                        <a:latin typeface="Inter"/>
+                        <a:latin typeface="Arial"/>
                       </a:endParaRPr>
                     </a:p>
                   </a:txBody>
@@ -22676,7 +23744,7 @@
                 <a:solidFill>
                   <a:srgbClr val="596070"/>
                 </a:solidFill>
-                <a:latin typeface="Inter"/>
+                <a:latin typeface="Arial"/>
               </a:rPr>
               <a:t>GAAP operating margin rose from (8.9)% to (0.4)% of revenue. Negatives in parentheses.</a:t>
             </a:r>
@@ -22722,7 +23790,7 @@
                 <a:solidFill>
                   <a:srgbClr val="596070"/>
                 </a:solidFill>
-                <a:latin typeface="Inter"/>
+                <a:latin typeface="Arial"/>
               </a:rPr>
               <a:t>Source: Corvane Software management accounts (fictional; illustrative figures). Non-GAAP except the GAAP line of the reconciliation; fiscal year ends December.</a:t>
             </a:r>
@@ -22777,7 +23845,7 @@
                 <a:solidFill>
                   <a:srgbClr val="596070"/>
                 </a:solidFill>
-                <a:latin typeface="Inter"/>
+                <a:latin typeface="Arial"/>
               </a:rPr>
               <a:t>Corvane Software (fictional company)  |  Q3 FY2026 earnings  |  Illustrative figures, non-GAAP unless stated</a:t>
             </a:r>
@@ -22812,7 +23880,7 @@
                 <a:solidFill>
                   <a:srgbClr val="596070"/>
                 </a:solidFill>
-                <a:latin typeface="Inter"/>
+                <a:latin typeface="Arial"/>
               </a:rPr>
               <a:t>1</a:t>
             </a:fld>
@@ -22858,7 +23926,7 @@
                 <a:solidFill>
                   <a:srgbClr val="2E3A9E"/>
                 </a:solidFill>
-                <a:latin typeface="Inter"/>
+                <a:latin typeface="Arial"/>
               </a:rPr>
               <a:t>Q3 FY2026 RESULTS  |  OUTLOOK</a:t>
             </a:r>
@@ -22904,7 +23972,7 @@
                 <a:solidFill>
                   <a:srgbClr val="16181D"/>
                 </a:solidFill>
-                <a:latin typeface="Inter"/>
+                <a:latin typeface="Arial"/>
               </a:rPr>
               <a:t>FY2026 revenue guidance raised a third time, to $1,394.4-1,398.4M, 20.9-21.3% growth</a:t>
             </a:r>
@@ -22950,7 +24018,7 @@
                 <a:solidFill>
                   <a:srgbClr val="16181D"/>
                 </a:solidFill>
-                <a:latin typeface="Inter"/>
+                <a:latin typeface="Arial"/>
               </a:rPr>
               <a:t>Guidance</a:t>
             </a:r>
@@ -22996,7 +24064,7 @@
                 <a:solidFill>
                   <a:srgbClr val="596070"/>
                 </a:solidFill>
-                <a:latin typeface="Inter"/>
+                <a:latin typeface="Arial"/>
               </a:rPr>
               <a:t>issued 26 October 2026; non-GAAP; new guidance in amber, August's in grey</a:t>
             </a:r>
@@ -23020,10 +24088,10 @@
             <a:tbl>
               <a:tblPr firstRow="0" bandRow="0" lastRow="0" firstCol="0" lastCol="0" bandCol="0"/>
               <a:tblGrid>
-                <a:gridCol w="2311846"/>
-                <a:gridCol w="1276297"/>
-                <a:gridCol w="1602014"/>
-                <a:gridCol w="1787533"/>
+                <a:gridCol w="2355183"/>
+                <a:gridCol w="1222477"/>
+                <a:gridCol w="1562608"/>
+                <a:gridCol w="1837422"/>
               </a:tblGrid>
               <a:tr h="192278">
                 <a:tc>
@@ -23037,7 +24105,7 @@
                           <a:solidFill>
                             <a:srgbClr val="16181D"/>
                           </a:solidFill>
-                          <a:latin typeface="Inter"/>
+                          <a:latin typeface="Arial"/>
                         </a:rPr>
                         <a:t>Metric</a:t>
                       </a:r>
@@ -23045,7 +24113,7 @@
                         <a:solidFill>
                           <a:srgbClr val="16181D"/>
                         </a:solidFill>
-                        <a:latin typeface="Inter"/>
+                        <a:latin typeface="Arial"/>
                       </a:endParaRPr>
                     </a:p>
                   </a:txBody>
@@ -23078,7 +24146,7 @@
                           <a:solidFill>
                             <a:srgbClr val="16181D"/>
                           </a:solidFill>
-                          <a:latin typeface="Inter"/>
+                          <a:latin typeface="Arial"/>
                         </a:rPr>
                         <a:t>Q4 FY26</a:t>
                       </a:r>
@@ -23086,7 +24154,7 @@
                         <a:solidFill>
                           <a:srgbClr val="16181D"/>
                         </a:solidFill>
-                        <a:latin typeface="Inter"/>
+                        <a:latin typeface="Arial"/>
                       </a:endParaRPr>
                     </a:p>
                   </a:txBody>
@@ -23119,7 +24187,7 @@
                           <a:solidFill>
                             <a:srgbClr val="16181D"/>
                           </a:solidFill>
-                          <a:latin typeface="Inter"/>
+                          <a:latin typeface="Arial"/>
                         </a:rPr>
                         <a:t>FY2026 now</a:t>
                       </a:r>
@@ -23127,7 +24195,7 @@
                         <a:solidFill>
                           <a:srgbClr val="16181D"/>
                         </a:solidFill>
-                        <a:latin typeface="Inter"/>
+                        <a:latin typeface="Arial"/>
                       </a:endParaRPr>
                     </a:p>
                   </a:txBody>
@@ -23160,7 +24228,7 @@
                           <a:solidFill>
                             <a:srgbClr val="16181D"/>
                           </a:solidFill>
-                          <a:latin typeface="Inter"/>
+                          <a:latin typeface="Arial"/>
                         </a:rPr>
                         <a:t>FY2026 in August</a:t>
                       </a:r>
@@ -23168,7 +24236,7 @@
                         <a:solidFill>
                           <a:srgbClr val="16181D"/>
                         </a:solidFill>
-                        <a:latin typeface="Inter"/>
+                        <a:latin typeface="Arial"/>
                       </a:endParaRPr>
                     </a:p>
                   </a:txBody>
@@ -23203,7 +24271,7 @@
                           <a:solidFill>
                             <a:srgbClr val="16181D"/>
                           </a:solidFill>
-                          <a:latin typeface="Inter"/>
+                          <a:latin typeface="Arial"/>
                         </a:rPr>
                         <a:t>Revenue ($M)</a:t>
                       </a:r>
@@ -23211,7 +24279,7 @@
                         <a:solidFill>
                           <a:srgbClr val="16181D"/>
                         </a:solidFill>
-                        <a:latin typeface="Inter"/>
+                        <a:latin typeface="Arial"/>
                       </a:endParaRPr>
                     </a:p>
                   </a:txBody>
@@ -23246,7 +24314,7 @@
                           <a:solidFill>
                             <a:srgbClr val="A9650A"/>
                           </a:solidFill>
-                          <a:latin typeface="Inter"/>
+                          <a:latin typeface="Arial"/>
                         </a:rPr>
                         <a:t>372.0-376.0</a:t>
                       </a:r>
@@ -23254,7 +24322,7 @@
                         <a:solidFill>
                           <a:srgbClr val="A9650A"/>
                         </a:solidFill>
-                        <a:latin typeface="Inter"/>
+                        <a:latin typeface="Arial"/>
                       </a:endParaRPr>
                     </a:p>
                   </a:txBody>
@@ -23289,7 +24357,7 @@
                           <a:solidFill>
                             <a:srgbClr val="A9650A"/>
                           </a:solidFill>
-                          <a:latin typeface="Inter"/>
+                          <a:latin typeface="Arial"/>
                         </a:rPr>
                         <a:t>1,394.4-1,398.4</a:t>
                       </a:r>
@@ -23297,7 +24365,7 @@
                         <a:solidFill>
                           <a:srgbClr val="A9650A"/>
                         </a:solidFill>
-                        <a:latin typeface="Inter"/>
+                        <a:latin typeface="Arial"/>
                       </a:endParaRPr>
                     </a:p>
                   </a:txBody>
@@ -23332,7 +24400,7 @@
                           <a:solidFill>
                             <a:srgbClr val="596070"/>
                           </a:solidFill>
-                          <a:latin typeface="Inter"/>
+                          <a:latin typeface="Arial"/>
                         </a:rPr>
                         <a:t>1,379.0-1,389.0</a:t>
                       </a:r>
@@ -23340,7 +24408,7 @@
                         <a:solidFill>
                           <a:srgbClr val="596070"/>
                         </a:solidFill>
-                        <a:latin typeface="Inter"/>
+                        <a:latin typeface="Arial"/>
                       </a:endParaRPr>
                     </a:p>
                   </a:txBody>
@@ -23377,7 +24445,7 @@
                           <a:solidFill>
                             <a:srgbClr val="16181D"/>
                           </a:solidFill>
-                          <a:latin typeface="Inter"/>
+                          <a:latin typeface="Arial"/>
                         </a:rPr>
                         <a:t>Growth year on year (%)</a:t>
                       </a:r>
@@ -23385,7 +24453,7 @@
                         <a:solidFill>
                           <a:srgbClr val="16181D"/>
                         </a:solidFill>
-                        <a:latin typeface="Inter"/>
+                        <a:latin typeface="Arial"/>
                       </a:endParaRPr>
                     </a:p>
                   </a:txBody>
@@ -23420,7 +24488,7 @@
                           <a:solidFill>
                             <a:srgbClr val="A9650A"/>
                           </a:solidFill>
-                          <a:latin typeface="Inter"/>
+                          <a:latin typeface="Arial"/>
                         </a:rPr>
                         <a:t>19.5-20.7</a:t>
                       </a:r>
@@ -23428,7 +24496,7 @@
                         <a:solidFill>
                           <a:srgbClr val="A9650A"/>
                         </a:solidFill>
-                        <a:latin typeface="Inter"/>
+                        <a:latin typeface="Arial"/>
                       </a:endParaRPr>
                     </a:p>
                   </a:txBody>
@@ -23463,7 +24531,7 @@
                           <a:solidFill>
                             <a:srgbClr val="A9650A"/>
                           </a:solidFill>
-                          <a:latin typeface="Inter"/>
+                          <a:latin typeface="Arial"/>
                         </a:rPr>
                         <a:t>20.9-21.3</a:t>
                       </a:r>
@@ -23471,7 +24539,7 @@
                         <a:solidFill>
                           <a:srgbClr val="A9650A"/>
                         </a:solidFill>
-                        <a:latin typeface="Inter"/>
+                        <a:latin typeface="Arial"/>
                       </a:endParaRPr>
                     </a:p>
                   </a:txBody>
@@ -23506,7 +24574,7 @@
                           <a:solidFill>
                             <a:srgbClr val="596070"/>
                           </a:solidFill>
-                          <a:latin typeface="Inter"/>
+                          <a:latin typeface="Arial"/>
                         </a:rPr>
                         <a:t>19.6-20.4</a:t>
                       </a:r>
@@ -23514,7 +24582,7 @@
                         <a:solidFill>
                           <a:srgbClr val="596070"/>
                         </a:solidFill>
-                        <a:latin typeface="Inter"/>
+                        <a:latin typeface="Arial"/>
                       </a:endParaRPr>
                     </a:p>
                   </a:txBody>
@@ -23551,7 +24619,7 @@
                           <a:solidFill>
                             <a:srgbClr val="16181D"/>
                           </a:solidFill>
-                          <a:latin typeface="Inter"/>
+                          <a:latin typeface="Arial"/>
                         </a:rPr>
                         <a:t>Operating income ($M)</a:t>
                       </a:r>
@@ -23559,7 +24627,7 @@
                         <a:solidFill>
                           <a:srgbClr val="16181D"/>
                         </a:solidFill>
-                        <a:latin typeface="Inter"/>
+                        <a:latin typeface="Arial"/>
                       </a:endParaRPr>
                     </a:p>
                   </a:txBody>
@@ -23594,7 +24662,7 @@
                           <a:solidFill>
                             <a:srgbClr val="A9650A"/>
                           </a:solidFill>
-                          <a:latin typeface="Inter"/>
+                          <a:latin typeface="Arial"/>
                         </a:rPr>
                         <a:t>61.0-63.0</a:t>
                       </a:r>
@@ -23602,7 +24670,7 @@
                         <a:solidFill>
                           <a:srgbClr val="A9650A"/>
                         </a:solidFill>
-                        <a:latin typeface="Inter"/>
+                        <a:latin typeface="Arial"/>
                       </a:endParaRPr>
                     </a:p>
                   </a:txBody>
@@ -23637,7 +24705,7 @@
                           <a:solidFill>
                             <a:srgbClr val="A9650A"/>
                           </a:solidFill>
-                          <a:latin typeface="Inter"/>
+                          <a:latin typeface="Arial"/>
                         </a:rPr>
                         <a:t>221.3-223.3</a:t>
                       </a:r>
@@ -23645,7 +24713,7 @@
                         <a:solidFill>
                           <a:srgbClr val="A9650A"/>
                         </a:solidFill>
-                        <a:latin typeface="Inter"/>
+                        <a:latin typeface="Arial"/>
                       </a:endParaRPr>
                     </a:p>
                   </a:txBody>
@@ -23680,7 +24748,7 @@
                           <a:solidFill>
                             <a:srgbClr val="596070"/>
                           </a:solidFill>
-                          <a:latin typeface="Inter"/>
+                          <a:latin typeface="Arial"/>
                         </a:rPr>
                         <a:t>214.0-218.0</a:t>
                       </a:r>
@@ -23688,7 +24756,7 @@
                         <a:solidFill>
                           <a:srgbClr val="596070"/>
                         </a:solidFill>
-                        <a:latin typeface="Inter"/>
+                        <a:latin typeface="Arial"/>
                       </a:endParaRPr>
                     </a:p>
                   </a:txBody>
@@ -23725,7 +24793,7 @@
                           <a:solidFill>
                             <a:srgbClr val="16181D"/>
                           </a:solidFill>
-                          <a:latin typeface="Inter"/>
+                          <a:latin typeface="Arial"/>
                         </a:rPr>
                         <a:t>Operating margin (%)</a:t>
                       </a:r>
@@ -23733,7 +24801,7 @@
                         <a:solidFill>
                           <a:srgbClr val="16181D"/>
                         </a:solidFill>
-                        <a:latin typeface="Inter"/>
+                        <a:latin typeface="Arial"/>
                       </a:endParaRPr>
                     </a:p>
                   </a:txBody>
@@ -23768,7 +24836,7 @@
                           <a:solidFill>
                             <a:srgbClr val="A9650A"/>
                           </a:solidFill>
-                          <a:latin typeface="Inter"/>
+                          <a:latin typeface="Arial"/>
                         </a:rPr>
                         <a:t>16.4-16.8</a:t>
                       </a:r>
@@ -23776,7 +24844,7 @@
                         <a:solidFill>
                           <a:srgbClr val="A9650A"/>
                         </a:solidFill>
-                        <a:latin typeface="Inter"/>
+                        <a:latin typeface="Arial"/>
                       </a:endParaRPr>
                     </a:p>
                   </a:txBody>
@@ -23811,7 +24879,7 @@
                           <a:solidFill>
                             <a:srgbClr val="A9650A"/>
                           </a:solidFill>
-                          <a:latin typeface="Inter"/>
+                          <a:latin typeface="Arial"/>
                         </a:rPr>
                         <a:t>15.9-16.0</a:t>
                       </a:r>
@@ -23819,7 +24887,7 @@
                         <a:solidFill>
                           <a:srgbClr val="A9650A"/>
                         </a:solidFill>
-                        <a:latin typeface="Inter"/>
+                        <a:latin typeface="Arial"/>
                       </a:endParaRPr>
                     </a:p>
                   </a:txBody>
@@ -23854,7 +24922,7 @@
                           <a:solidFill>
                             <a:srgbClr val="596070"/>
                           </a:solidFill>
-                          <a:latin typeface="Inter"/>
+                          <a:latin typeface="Arial"/>
                         </a:rPr>
                         <a:t>15.5-15.7</a:t>
                       </a:r>
@@ -23862,7 +24930,7 @@
                         <a:solidFill>
                           <a:srgbClr val="596070"/>
                         </a:solidFill>
-                        <a:latin typeface="Inter"/>
+                        <a:latin typeface="Arial"/>
                       </a:endParaRPr>
                     </a:p>
                   </a:txBody>
@@ -23930,7 +24998,7 @@
                 <a:solidFill>
                   <a:srgbClr val="16181D"/>
                 </a:solidFill>
-                <a:latin typeface="Inter"/>
+                <a:latin typeface="Arial"/>
               </a:rPr>
               <a:t>FY2026 revenue guidance at each update</a:t>
             </a:r>
@@ -23976,7 +25044,7 @@
                 <a:solidFill>
                   <a:srgbClr val="596070"/>
                 </a:solidFill>
-                <a:latin typeface="Inter"/>
+                <a:latin typeface="Arial"/>
               </a:rPr>
               <a:t>$M, low to high; the current range in amber, superseded ranges in slate</a:t>
             </a:r>
@@ -24040,7 +25108,7 @@
                 <a:solidFill>
                   <a:srgbClr val="16181D"/>
                 </a:solidFill>
-                <a:latin typeface="Inter"/>
+                <a:latin typeface="Arial"/>
               </a:rPr>
               <a:t>What the guidance assumes</a:t>
             </a:r>
@@ -24079,7 +25147,7 @@
               <a:spcAft>
                 <a:spcPts val="300"/>
               </a:spcAft>
-              <a:buFont typeface="Inter"/>
+              <a:buFont typeface="Arial"/>
               <a:buChar char="•"/>
             </a:pPr>
             <a:r>
@@ -24087,9 +25155,9 @@
                 <a:solidFill>
                   <a:srgbClr val="16181D"/>
                 </a:solidFill>
-                <a:latin typeface="Inter"/>
+                <a:latin typeface="Arial"/>
               </a:rPr>
-              <a:t>The full-year midpoint of $1,396.4M is $12.4M above August's</a:t>
+              <a:t>The full-year midpoint of $1,396.4M is $12.4M above August's and</a:t>
             </a:r>
             <a:br/>
             <a:r>
@@ -24097,9 +25165,9 @@
                 <a:solidFill>
                   <a:srgbClr val="16181D"/>
                 </a:solidFill>
-                <a:latin typeface="Inter"/>
+                <a:latin typeface="Arial"/>
               </a:rPr>
-              <a:t>and $36.4M (2.7%) above the initial $1,360.0M.</a:t>
+              <a:t>$36.4M (2.7%) above the initial $1,360.0M.</a:t>
             </a:r>
           </a:p>
         </p:txBody>
@@ -24136,7 +25204,7 @@
               <a:spcAft>
                 <a:spcPts val="300"/>
               </a:spcAft>
-              <a:buFont typeface="Inter"/>
+              <a:buFont typeface="Arial"/>
               <a:buChar char="•"/>
             </a:pPr>
             <a:r>
@@ -24144,9 +25212,9 @@
                 <a:solidFill>
                   <a:srgbClr val="16181D"/>
                 </a:solidFill>
-                <a:latin typeface="Inter"/>
+                <a:latin typeface="Arial"/>
               </a:rPr>
-              <a:t>Q4 growth of 19.5-20.7% assumes net new ARR returns to its</a:t>
+              <a:t>Q4 growth of 19.5-20.7% assumes net new ARR returns to its usual</a:t>
             </a:r>
             <a:br/>
             <a:r>
@@ -24154,9 +25222,9 @@
                 <a:solidFill>
                   <a:srgbClr val="16181D"/>
                 </a:solidFill>
-                <a:latin typeface="Inter"/>
+                <a:latin typeface="Arial"/>
               </a:rPr>
-              <a:t>usual range after Q3's record.</a:t>
+              <a:t>range after Q3's record.</a:t>
             </a:r>
           </a:p>
         </p:txBody>
@@ -24193,7 +25261,7 @@
               <a:spcAft>
                 <a:spcPts val="300"/>
               </a:spcAft>
-              <a:buFont typeface="Inter"/>
+              <a:buFont typeface="Arial"/>
               <a:buChar char="•"/>
             </a:pPr>
             <a:r>
@@ -24201,7 +25269,7 @@
                 <a:solidFill>
                   <a:srgbClr val="16181D"/>
                 </a:solidFill>
-                <a:latin typeface="Inter"/>
+                <a:latin typeface="Arial"/>
               </a:rPr>
               <a:t>Full-year operating margin of 15.9-16.0%, up from 15.5-15.7%</a:t>
             </a:r>
@@ -24211,7 +25279,7 @@
                 <a:solidFill>
                   <a:srgbClr val="16181D"/>
                 </a:solidFill>
-                <a:latin typeface="Inter"/>
+                <a:latin typeface="Arial"/>
               </a:rPr>
               <a:t>guided in August.</a:t>
             </a:r>
@@ -24250,7 +25318,7 @@
               <a:spcAft>
                 <a:spcPts val="300"/>
               </a:spcAft>
-              <a:buFont typeface="Inter"/>
+              <a:buFont typeface="Arial"/>
               <a:buChar char="•"/>
             </a:pPr>
             <a:r>
@@ -24258,7 +25326,7 @@
                 <a:solidFill>
                   <a:srgbClr val="16181D"/>
                 </a:solidFill>
-                <a:latin typeface="Inter"/>
+                <a:latin typeface="Arial"/>
               </a:rPr>
               <a:t>Exchange rates as of October 2026; no acquisitions.</a:t>
             </a:r>
@@ -24304,7 +25372,7 @@
                 <a:solidFill>
                   <a:srgbClr val="16181D"/>
                 </a:solidFill>
-                <a:latin typeface="Inter"/>
+                <a:latin typeface="Arial"/>
               </a:rPr>
               <a:t>Long-term target model</a:t>
             </a:r>
@@ -24350,7 +25418,7 @@
                 <a:solidFill>
                   <a:srgbClr val="596070"/>
                 </a:solidFill>
-                <a:latin typeface="Inter"/>
+                <a:latin typeface="Arial"/>
               </a:rPr>
               <a:t>% of revenue, non-GAAP; targets (amber) are forward-looking</a:t>
             </a:r>
@@ -24374,9 +25442,9 @@
             <a:tbl>
               <a:tblPr firstRow="0" bandRow="0" lastRow="0" firstCol="0" lastCol="0" bandCol="0"/>
               <a:tblGrid>
-                <a:gridCol w="2447938"/>
-                <a:gridCol w="888763"/>
-                <a:gridCol w="688889"/>
+                <a:gridCol w="2448803"/>
+                <a:gridCol w="885305"/>
+                <a:gridCol w="691482"/>
               </a:tblGrid>
               <a:tr h="192278">
                 <a:tc>
@@ -24390,7 +25458,7 @@
                           <a:solidFill>
                             <a:srgbClr val="16181D"/>
                           </a:solidFill>
-                          <a:latin typeface="Inter"/>
+                          <a:latin typeface="Arial"/>
                         </a:rPr>
                         <a:t>% of revenue</a:t>
                       </a:r>
@@ -24398,7 +25466,7 @@
                         <a:solidFill>
                           <a:srgbClr val="16181D"/>
                         </a:solidFill>
-                        <a:latin typeface="Inter"/>
+                        <a:latin typeface="Arial"/>
                       </a:endParaRPr>
                     </a:p>
                   </a:txBody>
@@ -24431,7 +25499,7 @@
                           <a:solidFill>
                             <a:srgbClr val="16181D"/>
                           </a:solidFill>
-                          <a:latin typeface="Inter"/>
+                          <a:latin typeface="Arial"/>
                         </a:rPr>
                         <a:t>Q3 FY26</a:t>
                       </a:r>
@@ -24439,7 +25507,7 @@
                         <a:solidFill>
                           <a:srgbClr val="16181D"/>
                         </a:solidFill>
-                        <a:latin typeface="Inter"/>
+                        <a:latin typeface="Arial"/>
                       </a:endParaRPr>
                     </a:p>
                   </a:txBody>
@@ -24472,7 +25540,7 @@
                           <a:solidFill>
                             <a:srgbClr val="16181D"/>
                           </a:solidFill>
-                          <a:latin typeface="Inter"/>
+                          <a:latin typeface="Arial"/>
                         </a:rPr>
                         <a:t>Target</a:t>
                       </a:r>
@@ -24480,7 +25548,7 @@
                         <a:solidFill>
                           <a:srgbClr val="16181D"/>
                         </a:solidFill>
-                        <a:latin typeface="Inter"/>
+                        <a:latin typeface="Arial"/>
                       </a:endParaRPr>
                     </a:p>
                   </a:txBody>
@@ -24515,7 +25583,7 @@
                           <a:solidFill>
                             <a:srgbClr val="16181D"/>
                           </a:solidFill>
-                          <a:latin typeface="Inter"/>
+                          <a:latin typeface="Arial"/>
                         </a:rPr>
                         <a:t>Gross margin</a:t>
                       </a:r>
@@ -24523,7 +25591,7 @@
                         <a:solidFill>
                           <a:srgbClr val="16181D"/>
                         </a:solidFill>
-                        <a:latin typeface="Inter"/>
+                        <a:latin typeface="Arial"/>
                       </a:endParaRPr>
                     </a:p>
                   </a:txBody>
@@ -24558,7 +25626,7 @@
                           <a:solidFill>
                             <a:srgbClr val="2E3A9E"/>
                           </a:solidFill>
-                          <a:latin typeface="Inter"/>
+                          <a:latin typeface="Arial"/>
                         </a:rPr>
                         <a:t>80.4</a:t>
                       </a:r>
@@ -24566,7 +25634,7 @@
                         <a:solidFill>
                           <a:srgbClr val="2E3A9E"/>
                         </a:solidFill>
-                        <a:latin typeface="Inter"/>
+                        <a:latin typeface="Arial"/>
                       </a:endParaRPr>
                     </a:p>
                   </a:txBody>
@@ -24601,7 +25669,7 @@
                           <a:solidFill>
                             <a:srgbClr val="A9650A"/>
                           </a:solidFill>
-                          <a:latin typeface="Inter"/>
+                          <a:latin typeface="Arial"/>
                         </a:rPr>
                         <a:t>80-82</a:t>
                       </a:r>
@@ -24609,7 +25677,7 @@
                         <a:solidFill>
                           <a:srgbClr val="A9650A"/>
                         </a:solidFill>
-                        <a:latin typeface="Inter"/>
+                        <a:latin typeface="Arial"/>
                       </a:endParaRPr>
                     </a:p>
                   </a:txBody>
@@ -24646,7 +25714,7 @@
                           <a:solidFill>
                             <a:srgbClr val="16181D"/>
                           </a:solidFill>
-                          <a:latin typeface="Inter"/>
+                          <a:latin typeface="Arial"/>
                         </a:rPr>
                         <a:t>Sales and marketing</a:t>
                       </a:r>
@@ -24654,7 +25722,7 @@
                         <a:solidFill>
                           <a:srgbClr val="16181D"/>
                         </a:solidFill>
-                        <a:latin typeface="Inter"/>
+                        <a:latin typeface="Arial"/>
                       </a:endParaRPr>
                     </a:p>
                   </a:txBody>
@@ -24689,7 +25757,7 @@
                           <a:solidFill>
                             <a:srgbClr val="2E3A9E"/>
                           </a:solidFill>
-                          <a:latin typeface="Inter"/>
+                          <a:latin typeface="Arial"/>
                         </a:rPr>
                         <a:t>35.8</a:t>
                       </a:r>
@@ -24697,7 +25765,7 @@
                         <a:solidFill>
                           <a:srgbClr val="2E3A9E"/>
                         </a:solidFill>
-                        <a:latin typeface="Inter"/>
+                        <a:latin typeface="Arial"/>
                       </a:endParaRPr>
                     </a:p>
                   </a:txBody>
@@ -24732,7 +25800,7 @@
                           <a:solidFill>
                             <a:srgbClr val="A9650A"/>
                           </a:solidFill>
-                          <a:latin typeface="Inter"/>
+                          <a:latin typeface="Arial"/>
                         </a:rPr>
                         <a:t>28-30</a:t>
                       </a:r>
@@ -24740,7 +25808,7 @@
                         <a:solidFill>
                           <a:srgbClr val="A9650A"/>
                         </a:solidFill>
-                        <a:latin typeface="Inter"/>
+                        <a:latin typeface="Arial"/>
                       </a:endParaRPr>
                     </a:p>
                   </a:txBody>
@@ -24777,7 +25845,7 @@
                           <a:solidFill>
                             <a:srgbClr val="16181D"/>
                           </a:solidFill>
-                          <a:latin typeface="Inter"/>
+                          <a:latin typeface="Arial"/>
                         </a:rPr>
                         <a:t>Research and development</a:t>
                       </a:r>
@@ -24785,7 +25853,7 @@
                         <a:solidFill>
                           <a:srgbClr val="16181D"/>
                         </a:solidFill>
-                        <a:latin typeface="Inter"/>
+                        <a:latin typeface="Arial"/>
                       </a:endParaRPr>
                     </a:p>
                   </a:txBody>
@@ -24820,7 +25888,7 @@
                           <a:solidFill>
                             <a:srgbClr val="2E3A9E"/>
                           </a:solidFill>
-                          <a:latin typeface="Inter"/>
+                          <a:latin typeface="Arial"/>
                         </a:rPr>
                         <a:t>19.5</a:t>
                       </a:r>
@@ -24828,7 +25896,7 @@
                         <a:solidFill>
                           <a:srgbClr val="2E3A9E"/>
                         </a:solidFill>
-                        <a:latin typeface="Inter"/>
+                        <a:latin typeface="Arial"/>
                       </a:endParaRPr>
                     </a:p>
                   </a:txBody>
@@ -24863,7 +25931,7 @@
                           <a:solidFill>
                             <a:srgbClr val="A9650A"/>
                           </a:solidFill>
-                          <a:latin typeface="Inter"/>
+                          <a:latin typeface="Arial"/>
                         </a:rPr>
                         <a:t>15-17</a:t>
                       </a:r>
@@ -24871,7 +25939,7 @@
                         <a:solidFill>
                           <a:srgbClr val="A9650A"/>
                         </a:solidFill>
-                        <a:latin typeface="Inter"/>
+                        <a:latin typeface="Arial"/>
                       </a:endParaRPr>
                     </a:p>
                   </a:txBody>
@@ -24908,7 +25976,7 @@
                           <a:solidFill>
                             <a:srgbClr val="16181D"/>
                           </a:solidFill>
-                          <a:latin typeface="Inter"/>
+                          <a:latin typeface="Arial"/>
                         </a:rPr>
                         <a:t>General and administrative</a:t>
                       </a:r>
@@ -24916,7 +25984,7 @@
                         <a:solidFill>
                           <a:srgbClr val="16181D"/>
                         </a:solidFill>
-                        <a:latin typeface="Inter"/>
+                        <a:latin typeface="Arial"/>
                       </a:endParaRPr>
                     </a:p>
                   </a:txBody>
@@ -24951,7 +26019,7 @@
                           <a:solidFill>
                             <a:srgbClr val="2E3A9E"/>
                           </a:solidFill>
-                          <a:latin typeface="Inter"/>
+                          <a:latin typeface="Arial"/>
                         </a:rPr>
                         <a:t>8.5</a:t>
                       </a:r>
@@ -24959,7 +26027,7 @@
                         <a:solidFill>
                           <a:srgbClr val="2E3A9E"/>
                         </a:solidFill>
-                        <a:latin typeface="Inter"/>
+                        <a:latin typeface="Arial"/>
                       </a:endParaRPr>
                     </a:p>
                   </a:txBody>
@@ -24994,7 +26062,7 @@
                           <a:solidFill>
                             <a:srgbClr val="A9650A"/>
                           </a:solidFill>
-                          <a:latin typeface="Inter"/>
+                          <a:latin typeface="Arial"/>
                         </a:rPr>
                         <a:t>6-7</a:t>
                       </a:r>
@@ -25002,7 +26070,7 @@
                         <a:solidFill>
                           <a:srgbClr val="A9650A"/>
                         </a:solidFill>
-                        <a:latin typeface="Inter"/>
+                        <a:latin typeface="Arial"/>
                       </a:endParaRPr>
                     </a:p>
                   </a:txBody>
@@ -25039,7 +26107,7 @@
                           <a:solidFill>
                             <a:srgbClr val="16181D"/>
                           </a:solidFill>
-                          <a:latin typeface="Inter"/>
+                          <a:latin typeface="Arial"/>
                         </a:rPr>
                         <a:t>Operating margin</a:t>
                       </a:r>
@@ -25047,7 +26115,7 @@
                         <a:solidFill>
                           <a:srgbClr val="16181D"/>
                         </a:solidFill>
-                        <a:latin typeface="Inter"/>
+                        <a:latin typeface="Arial"/>
                       </a:endParaRPr>
                     </a:p>
                   </a:txBody>
@@ -25082,7 +26150,7 @@
                           <a:solidFill>
                             <a:srgbClr val="2E3A9E"/>
                           </a:solidFill>
-                          <a:latin typeface="Inter"/>
+                          <a:latin typeface="Arial"/>
                         </a:rPr>
                         <a:t>16.6</a:t>
                       </a:r>
@@ -25090,7 +26158,7 @@
                         <a:solidFill>
                           <a:srgbClr val="2E3A9E"/>
                         </a:solidFill>
-                        <a:latin typeface="Inter"/>
+                        <a:latin typeface="Arial"/>
                       </a:endParaRPr>
                     </a:p>
                   </a:txBody>
@@ -25125,7 +26193,7 @@
                           <a:solidFill>
                             <a:srgbClr val="A9650A"/>
                           </a:solidFill>
-                          <a:latin typeface="Inter"/>
+                          <a:latin typeface="Arial"/>
                         </a:rPr>
                         <a:t>25-28</a:t>
                       </a:r>
@@ -25133,7 +26201,7 @@
                         <a:solidFill>
                           <a:srgbClr val="A9650A"/>
                         </a:solidFill>
-                        <a:latin typeface="Inter"/>
+                        <a:latin typeface="Arial"/>
                       </a:endParaRPr>
                     </a:p>
                   </a:txBody>
@@ -25170,7 +26238,7 @@
                           <a:solidFill>
                             <a:srgbClr val="16181D"/>
                           </a:solidFill>
-                          <a:latin typeface="Inter"/>
+                          <a:latin typeface="Arial"/>
                         </a:rPr>
                         <a:t>Free cash flow margin</a:t>
                       </a:r>
@@ -25178,7 +26246,7 @@
                         <a:solidFill>
                           <a:srgbClr val="16181D"/>
                         </a:solidFill>
-                        <a:latin typeface="Inter"/>
+                        <a:latin typeface="Arial"/>
                       </a:endParaRPr>
                     </a:p>
                   </a:txBody>
@@ -25213,7 +26281,7 @@
                           <a:solidFill>
                             <a:srgbClr val="2E3A9E"/>
                           </a:solidFill>
-                          <a:latin typeface="Inter"/>
+                          <a:latin typeface="Arial"/>
                         </a:rPr>
                         <a:t>21.4</a:t>
                       </a:r>
@@ -25221,7 +26289,7 @@
                         <a:solidFill>
                           <a:srgbClr val="2E3A9E"/>
                         </a:solidFill>
-                        <a:latin typeface="Inter"/>
+                        <a:latin typeface="Arial"/>
                       </a:endParaRPr>
                     </a:p>
                   </a:txBody>
@@ -25256,7 +26324,7 @@
                           <a:solidFill>
                             <a:srgbClr val="A9650A"/>
                           </a:solidFill>
-                          <a:latin typeface="Inter"/>
+                          <a:latin typeface="Arial"/>
                         </a:rPr>
                         <a:t>28-30</a:t>
                       </a:r>
@@ -25264,7 +26332,7 @@
                         <a:solidFill>
                           <a:srgbClr val="A9650A"/>
                         </a:solidFill>
-                        <a:latin typeface="Inter"/>
+                        <a:latin typeface="Arial"/>
                       </a:endParaRPr>
                     </a:p>
                   </a:txBody>
@@ -25332,7 +26400,7 @@
                 <a:solidFill>
                   <a:srgbClr val="596070"/>
                 </a:solidFill>
-                <a:latin typeface="Inter"/>
+                <a:latin typeface="Arial"/>
               </a:rPr>
               <a:t>Operating margin is 8.4 points below the low end of its target.</a:t>
             </a:r>
@@ -25378,9 +26446,9 @@
                 <a:solidFill>
                   <a:srgbClr val="596070"/>
                 </a:solidFill>
-                <a:latin typeface="Inter"/>
+                <a:latin typeface="Arial"/>
               </a:rPr>
-              <a:t>Forward-looking statements: guidance reflects expectations at the date issued and is</a:t>
+              <a:t>Forward-looking statements: guidance reflects expectations when issued and carries risk.</a:t>
             </a:r>
             <a:br/>
             <a:r>
@@ -25388,9 +26456,9 @@
                 <a:solidFill>
                   <a:srgbClr val="596070"/>
                 </a:solidFill>
-                <a:latin typeface="Inter"/>
+                <a:latin typeface="Arial"/>
               </a:rPr>
-              <a:t>subject to risk. Corvane Software is fictional; every figure is illustrative.</a:t>
+              <a:t>Corvane Software is fictional; every figure is illustrative.</a:t>
             </a:r>
           </a:p>
         </p:txBody>
@@ -25434,7 +26502,7 @@
                 <a:solidFill>
                   <a:srgbClr val="596070"/>
                 </a:solidFill>
-                <a:latin typeface="Inter"/>
+                <a:latin typeface="Arial"/>
               </a:rPr>
               <a:t>Source: Corvane Software management accounts (fictional; illustrative figures). Non-GAAP unless stated; fiscal year ends December.</a:t>
             </a:r>
@@ -25449,8 +26517,8 @@
         </p:nvSpPr>
         <p:spPr>
           <a:xfrm>
-            <a:off x="6568336" y="3261293"/>
-            <a:ext cx="412439" cy="121920"/>
+            <a:off x="6567741" y="3261293"/>
+            <a:ext cx="379449" cy="121920"/>
           </a:xfrm>
           <a:prstGeom prst="rect">
             <a:avLst/>
@@ -25480,7 +26548,7 @@
                 <a:solidFill>
                   <a:srgbClr val="16181D"/>
                 </a:solidFill>
-                <a:latin typeface="Inter"/>
+                <a:latin typeface="Arial"/>
               </a:rPr>
               <a:t>1,360.0</a:t>
             </a:r>
@@ -25495,8 +26563,8 @@
         </p:nvSpPr>
         <p:spPr>
           <a:xfrm>
-            <a:off x="6576769" y="3979196"/>
-            <a:ext cx="404006" cy="121920"/>
+            <a:off x="6567741" y="3979196"/>
+            <a:ext cx="379449" cy="121920"/>
           </a:xfrm>
           <a:prstGeom prst="rect">
             <a:avLst/>
@@ -25526,7 +26594,7 @@
                 <a:solidFill>
                   <a:srgbClr val="16181D"/>
                 </a:solidFill>
-                <a:latin typeface="Inter"/>
+                <a:latin typeface="Arial"/>
               </a:rPr>
               <a:t>1,372.0</a:t>
             </a:r>
@@ -25541,8 +26609,8 @@
         </p:nvSpPr>
         <p:spPr>
           <a:xfrm>
-            <a:off x="6568435" y="4697099"/>
-            <a:ext cx="412340" cy="121920"/>
+            <a:off x="6567741" y="4697099"/>
+            <a:ext cx="379449" cy="121920"/>
           </a:xfrm>
           <a:prstGeom prst="rect">
             <a:avLst/>
@@ -25572,7 +26640,7 @@
                 <a:solidFill>
                   <a:srgbClr val="16181D"/>
                 </a:solidFill>
-                <a:latin typeface="Inter"/>
+                <a:latin typeface="Arial"/>
               </a:rPr>
               <a:t>1,384.0</a:t>
             </a:r>
@@ -25588,7 +26656,7 @@
         <p:spPr>
           <a:xfrm>
             <a:off x="6567741" y="5415002"/>
-            <a:ext cx="413034" cy="121920"/>
+            <a:ext cx="379449" cy="121920"/>
           </a:xfrm>
           <a:prstGeom prst="rect">
             <a:avLst/>
@@ -25618,7 +26686,7 @@
                 <a:solidFill>
                   <a:srgbClr val="A9650A"/>
                 </a:solidFill>
-                <a:latin typeface="Inter"/>
+                <a:latin typeface="Arial"/>
               </a:rPr>
               <a:t>1,396.4</a:t>
             </a:r>
@@ -25633,8 +26701,8 @@
         </p:nvSpPr>
         <p:spPr>
           <a:xfrm>
-            <a:off x="6544226" y="2841381"/>
-            <a:ext cx="460064" cy="121920"/>
+            <a:off x="6545219" y="2841381"/>
+            <a:ext cx="424494" cy="121920"/>
           </a:xfrm>
           <a:prstGeom prst="rect">
             <a:avLst/>
@@ -25664,7 +26732,7 @@
                 <a:solidFill>
                   <a:srgbClr val="596070"/>
                 </a:solidFill>
-                <a:latin typeface="Inter"/>
+                <a:latin typeface="Arial"/>
               </a:rPr>
               <a:t>Midpoint</a:t>
             </a:r>

--- a/docs/showcase/software-earnings.pptx
+++ b/docs/showcase/software-earnings.pptx
@@ -392,6 +392,280 @@
           <c:layoutTarget val="inner"/>
           <c:xMode val="edge"/>
           <c:yMode val="edge"/>
+          <c:x val="0.1"/>
+          <c:y val="0.1"/>
+          <c:w val="0.89"/>
+          <c:h val="0.6"/>
+        </c:manualLayout>
+      </c:layout>
+      <c:lineChart>
+        <c:grouping val="standard"/>
+        <c:varyColors val="0"/>
+        <c:ser>
+          <c:idx val="0"/>
+          <c:order val="0"/>
+          <c:tx>
+            <c:strRef>
+              <c:f>Sheet1!$B$1</c:f>
+              <c:strCache>
+                <c:ptCount val="1"/>
+                <c:pt idx="0">
+                  <c:v>Net revenue retention</c:v>
+                </c:pt>
+              </c:strCache>
+            </c:strRef>
+          </c:tx>
+          <c:spPr>
+            <a:ln w="25400">
+              <a:solidFill>
+                <a:srgbClr val="2E3A9E"/>
+              </a:solidFill>
+            </a:ln>
+          </c:spPr>
+          <c:marker>
+            <c:symbol val="circle"/>
+            <c:size val="5"/>
+            <c:spPr>
+              <a:solidFill>
+                <a:srgbClr val="2E3A9E"/>
+              </a:solidFill>
+            </c:spPr>
+          </c:marker>
+          <c:dLbls>
+            <c:dLbl>
+              <c:idx val="5"/>
+              <c:tx>
+                <c:rich>
+                  <a:bodyPr/>
+                  <a:lstStyle/>
+                  <a:p>
+                    <a:r>
+                      <a:rPr sz="800" b="1" i="0">
+                        <a:solidFill>
+                          <a:srgbClr val="2E3A9E"/>
+                        </a:solidFill>
+                        <a:latin typeface="Arial"/>
+                      </a:rPr>
+                      <a:t>116 low</a:t>
+                    </a:r>
+                  </a:p>
+                </c:rich>
+              </c:tx>
+              <c:txPr>
+                <a:bodyPr/>
+                <a:lstStyle/>
+                <a:p>
+                  <a:pPr>
+                    <a:defRPr sz="800" b="1" i="0">
+                      <a:solidFill>
+                        <a:srgbClr val="2E3A9E"/>
+                      </a:solidFill>
+                      <a:latin typeface="Arial"/>
+                    </a:defRPr>
+                  </a:pPr>
+                </a:p>
+              </c:txPr>
+              <c:dLblPos val="b"/>
+              <c:showLegendKey val="0"/>
+              <c:showVal val="1"/>
+              <c:showCatName val="0"/>
+              <c:showSerName val="0"/>
+              <c:showPercent val="0"/>
+              <c:showBubbleSize val="0"/>
+            </c:dLbl>
+            <c:numFmt formatCode="0" sourceLinked="0"/>
+            <c:txPr>
+              <a:bodyPr/>
+              <a:lstStyle/>
+              <a:p>
+                <a:pPr>
+                  <a:defRPr sz="800" b="1" i="0">
+                    <a:solidFill>
+                      <a:srgbClr val="2E3A9E"/>
+                    </a:solidFill>
+                    <a:latin typeface="Arial"/>
+                  </a:defRPr>
+                </a:pPr>
+              </a:p>
+            </c:txPr>
+            <c:dLblPos val="t"/>
+            <c:showLegendKey val="0"/>
+            <c:showVal val="1"/>
+            <c:showCatName val="0"/>
+            <c:showSerName val="0"/>
+            <c:showPercent val="0"/>
+            <c:showBubbleSize val="0"/>
+            <c:showLeaderLines val="1"/>
+          </c:dLbls>
+          <c:cat>
+            <c:strRef>
+              <c:f>Sheet1!$A$2:$A$10</c:f>
+              <c:strCache>
+                <c:ptCount val="9"/>
+                <c:pt idx="0">
+                  <c:v>Q3'24</c:v>
+                </c:pt>
+                <c:pt idx="1">
+                  <c:v>Q4'24</c:v>
+                </c:pt>
+                <c:pt idx="2">
+                  <c:v>Q1'25</c:v>
+                </c:pt>
+                <c:pt idx="3">
+                  <c:v>Q2'25</c:v>
+                </c:pt>
+                <c:pt idx="4">
+                  <c:v>Q3'25</c:v>
+                </c:pt>
+                <c:pt idx="5">
+                  <c:v>Q4'25</c:v>
+                </c:pt>
+                <c:pt idx="6">
+                  <c:v>Q1'26</c:v>
+                </c:pt>
+                <c:pt idx="7">
+                  <c:v>Q2'26</c:v>
+                </c:pt>
+                <c:pt idx="8">
+                  <c:v>Q3'26</c:v>
+                </c:pt>
+              </c:strCache>
+            </c:strRef>
+          </c:cat>
+          <c:val>
+            <c:numRef>
+              <c:f>Sheet1!$B$2:$B$10</c:f>
+              <c:numCache>
+                <c:formatCode>0</c:formatCode>
+                <c:ptCount val="9"/>
+                <c:pt idx="0">
+                  <c:v>121</c:v>
+                </c:pt>
+                <c:pt idx="1">
+                  <c:v>119</c:v>
+                </c:pt>
+                <c:pt idx="2">
+                  <c:v>118</c:v>
+                </c:pt>
+                <c:pt idx="3">
+                  <c:v>117</c:v>
+                </c:pt>
+                <c:pt idx="4">
+                  <c:v>116</c:v>
+                </c:pt>
+                <c:pt idx="5">
+                  <c:v>116</c:v>
+                </c:pt>
+                <c:pt idx="6">
+                  <c:v>117</c:v>
+                </c:pt>
+                <c:pt idx="7">
+                  <c:v>118</c:v>
+                </c:pt>
+                <c:pt idx="8">
+                  <c:v>119</c:v>
+                </c:pt>
+              </c:numCache>
+            </c:numRef>
+          </c:val>
+          <c:smooth val="0"/>
+        </c:ser>
+        <c:marker val="1"/>
+        <c:smooth val="0"/>
+        <c:axId val="2118791784"/>
+        <c:axId val="2140495176"/>
+      </c:lineChart>
+      <c:catAx>
+        <c:axId val="2118791784"/>
+        <c:scaling/>
+        <c:delete val="0"/>
+        <c:axPos val="b"/>
+        <c:majorTickMark val="none"/>
+        <c:minorTickMark val="none"/>
+        <c:tickLblPos val="nextTo"/>
+        <c:spPr>
+          <a:ln w="9525">
+            <a:solidFill>
+              <a:srgbClr val="D3D7DF"/>
+            </a:solidFill>
+          </a:ln>
+        </c:spPr>
+        <c:txPr>
+          <a:bodyPr rot="0" vert="horz"/>
+          <a:lstStyle/>
+          <a:p>
+            <a:pPr>
+              <a:defRPr sz="800" b="0" i="0">
+                <a:solidFill>
+                  <a:srgbClr val="596070"/>
+                </a:solidFill>
+                <a:latin typeface="Arial"/>
+              </a:defRPr>
+            </a:pPr>
+          </a:p>
+        </c:txPr>
+        <c:crossAx val="2140495176"/>
+        <c:crosses val="autoZero"/>
+        <c:auto val="1"/>
+        <c:lblAlgn val="ctr"/>
+        <c:lblOffset val="100"/>
+        <c:noMultiLvlLbl val="0"/>
+      </c:catAx>
+      <c:valAx>
+        <c:axId val="2140495176"/>
+        <c:scaling>
+          <c:max val="123.0"/>
+          <c:min val="113.0"/>
+        </c:scaling>
+        <c:delete/>
+        <c:axPos val="l"/>
+        <c:majorTickMark val="out"/>
+        <c:minorTickMark val="none"/>
+        <c:tickLblPos val="nextTo"/>
+        <c:crossAx val="2118791784"/>
+        <c:crosses val="autoZero"/>
+        <c:crossBetween val="between"/>
+      </c:valAx>
+      <c:spPr>
+        <a:noFill/>
+      </c:spPr>
+    </c:plotArea>
+    <c:plotVisOnly val="1"/>
+    <c:dispBlanksAs val="gap"/>
+    <c:showDLblsOverMax val="0"/>
+  </c:chart>
+  <c:txPr>
+    <a:bodyPr/>
+    <a:lstStyle/>
+    <a:p>
+      <a:pPr>
+        <a:defRPr sz="800" b="0" i="0">
+          <a:solidFill>
+            <a:srgbClr val="596070"/>
+          </a:solidFill>
+          <a:latin typeface="Arial"/>
+        </a:defRPr>
+      </a:pPr>
+      <a:endParaRPr lang="en-US"/>
+    </a:p>
+  </c:txPr>
+  <c:externalData r:id="rId1">
+    <c:autoUpdate val="0"/>
+  </c:externalData>
+</c:chartSpace>
+</file>
+
+<file path=ppt/charts/chart11.xml><?xml version="1.0" encoding="utf-8"?>
+<c:chartSpace xmlns:c="http://schemas.openxmlformats.org/drawingml/2006/chart" xmlns:a="http://schemas.openxmlformats.org/drawingml/2006/main" xmlns:r="http://schemas.openxmlformats.org/officeDocument/2006/relationships">
+  <c:date1904 val="0"/>
+  <c:chart>
+    <c:autoTitleDeleted val="1"/>
+    <c:plotArea>
+      <c:layout>
+        <c:manualLayout>
+          <c:layoutTarget val="inner"/>
+          <c:xMode val="edge"/>
+          <c:yMode val="edge"/>
           <c:x val="0.07"/>
           <c:y val="0.04"/>
           <c:w val="0.86"/>
@@ -1014,7 +1288,7 @@
 </c:chartSpace>
 </file>
 
-<file path=ppt/charts/chart11.xml><?xml version="1.0" encoding="utf-8"?>
+<file path=ppt/charts/chart12.xml><?xml version="1.0" encoding="utf-8"?>
 <c:chartSpace xmlns:c="http://schemas.openxmlformats.org/drawingml/2006/chart" xmlns:a="http://schemas.openxmlformats.org/drawingml/2006/main" xmlns:r="http://schemas.openxmlformats.org/officeDocument/2006/relationships">
   <c:date1904 val="0"/>
   <c:chart>
@@ -1600,8 +1874,8 @@
       <c:valAx>
         <c:axId val="-2113994440"/>
         <c:scaling>
-          <c:max val="18.5"/>
-          <c:min val="0.0"/>
+          <c:max val="17.6"/>
+          <c:min val="8.0"/>
         </c:scaling>
         <c:delete/>
         <c:axPos val="l"/>
@@ -1639,7 +1913,7 @@
 </c:chartSpace>
 </file>
 
-<file path=ppt/charts/chart12.xml><?xml version="1.0" encoding="utf-8"?>
+<file path=ppt/charts/chart13.xml><?xml version="1.0" encoding="utf-8"?>
 <c:chartSpace xmlns:c="http://schemas.openxmlformats.org/drawingml/2006/chart" xmlns:a="http://schemas.openxmlformats.org/drawingml/2006/main" xmlns:r="http://schemas.openxmlformats.org/officeDocument/2006/relationships">
   <c:date1904 val="0"/>
   <c:chart>
@@ -4017,10 +4291,10 @@
           <c:layoutTarget val="inner"/>
           <c:xMode val="edge"/>
           <c:yMode val="edge"/>
-          <c:x val="0.1"/>
-          <c:y val="0.1"/>
-          <c:w val="0.89"/>
-          <c:h val="0.6"/>
+          <c:x val="0.06"/>
+          <c:y val="0.06"/>
+          <c:w val="0.7"/>
+          <c:h val="0.78"/>
         </c:manualLayout>
       </c:layout>
       <c:lineChart>
@@ -4035,7 +4309,7 @@
               <c:strCache>
                 <c:ptCount val="1"/>
                 <c:pt idx="0">
-                  <c:v>Net revenue retention</c:v>
+                  <c:v>ARR</c:v>
                 </c:pt>
               </c:strCache>
             </c:strRef>
@@ -4048,17 +4322,11 @@
             </a:ln>
           </c:spPr>
           <c:marker>
-            <c:symbol val="circle"/>
-            <c:size val="5"/>
-            <c:spPr>
-              <a:solidFill>
-                <a:srgbClr val="2E3A9E"/>
-              </a:solidFill>
-            </c:spPr>
+            <c:symbol val="none"/>
           </c:marker>
           <c:dLbls>
             <c:dLbl>
-              <c:idx val="5"/>
+              <c:idx val="0"/>
               <c:tx>
                 <c:rich>
                   <a:bodyPr/>
@@ -4071,7 +4339,7 @@
                         </a:solidFill>
                         <a:latin typeface="Arial"/>
                       </a:rPr>
-                      <a:t>116 low</a:t>
+                      <a:t>26.5</a:t>
                     </a:r>
                   </a:p>
                 </c:rich>
@@ -4098,24 +4366,49 @@
               <c:showPercent val="0"/>
               <c:showBubbleSize val="0"/>
             </c:dLbl>
-            <c:numFmt formatCode="0" sourceLinked="0"/>
-            <c:txPr>
-              <a:bodyPr/>
-              <a:lstStyle/>
-              <a:p>
-                <a:pPr>
-                  <a:defRPr sz="800" b="1" i="0">
-                    <a:solidFill>
-                      <a:srgbClr val="2E3A9E"/>
-                    </a:solidFill>
-                    <a:latin typeface="Arial"/>
-                  </a:defRPr>
-                </a:pPr>
-              </a:p>
-            </c:txPr>
-            <c:dLblPos val="t"/>
+            <c:dLbl>
+              <c:idx val="8"/>
+              <c:tx>
+                <c:rich>
+                  <a:bodyPr/>
+                  <a:lstStyle/>
+                  <a:p>
+                    <a:r>
+                      <a:rPr sz="800" b="1" i="0">
+                        <a:solidFill>
+                          <a:srgbClr val="2E3A9E"/>
+                        </a:solidFill>
+                        <a:latin typeface="Arial"/>
+                      </a:rPr>
+                      <a:t>ARR 22.2</a:t>
+                    </a:r>
+                  </a:p>
+                </c:rich>
+              </c:tx>
+              <c:txPr>
+                <a:bodyPr/>
+                <a:lstStyle/>
+                <a:p>
+                  <a:pPr>
+                    <a:defRPr sz="800" b="1" i="0">
+                      <a:solidFill>
+                        <a:srgbClr val="2E3A9E"/>
+                      </a:solidFill>
+                      <a:latin typeface="Arial"/>
+                    </a:defRPr>
+                  </a:pPr>
+                </a:p>
+              </c:txPr>
+              <c:dLblPos val="t"/>
+              <c:showLegendKey val="0"/>
+              <c:showVal val="1"/>
+              <c:showCatName val="0"/>
+              <c:showSerName val="0"/>
+              <c:showPercent val="0"/>
+              <c:showBubbleSize val="0"/>
+            </c:dLbl>
             <c:showLegendKey val="0"/>
-            <c:showVal val="1"/>
+            <c:showVal val="0"/>
             <c:showCatName val="0"/>
             <c:showSerName val="0"/>
             <c:showPercent val="0"/>
@@ -4161,34 +4454,222 @@
             <c:numRef>
               <c:f>Sheet1!$B$2:$B$10</c:f>
               <c:numCache>
-                <c:formatCode>0</c:formatCode>
+                <c:formatCode>0.0</c:formatCode>
                 <c:ptCount val="9"/>
                 <c:pt idx="0">
-                  <c:v>121</c:v>
+                  <c:v>26.5</c:v>
                 </c:pt>
                 <c:pt idx="1">
-                  <c:v>119</c:v>
+                  <c:v>26.2</c:v>
                 </c:pt>
                 <c:pt idx="2">
-                  <c:v>118</c:v>
+                  <c:v>24.3</c:v>
                 </c:pt>
                 <c:pt idx="3">
-                  <c:v>117</c:v>
+                  <c:v>21.4</c:v>
                 </c:pt>
                 <c:pt idx="4">
-                  <c:v>116</c:v>
+                  <c:v>21.1</c:v>
                 </c:pt>
                 <c:pt idx="5">
-                  <c:v>116</c:v>
+                  <c:v>21.0</c:v>
                 </c:pt>
                 <c:pt idx="6">
-                  <c:v>117</c:v>
+                  <c:v>21.0</c:v>
                 </c:pt>
                 <c:pt idx="7">
-                  <c:v>118</c:v>
+                  <c:v>21.1</c:v>
                 </c:pt>
                 <c:pt idx="8">
-                  <c:v>119</c:v>
+                  <c:v>22.2</c:v>
+                </c:pt>
+              </c:numCache>
+            </c:numRef>
+          </c:val>
+          <c:smooth val="0"/>
+        </c:ser>
+        <c:ser>
+          <c:idx val="1"/>
+          <c:order val="1"/>
+          <c:tx>
+            <c:strRef>
+              <c:f>Sheet1!$C$1</c:f>
+              <c:strCache>
+                <c:ptCount val="1"/>
+                <c:pt idx="0">
+                  <c:v>Revenue</c:v>
+                </c:pt>
+              </c:strCache>
+            </c:strRef>
+          </c:tx>
+          <c:spPr>
+            <a:ln w="19050">
+              <a:solidFill>
+                <a:srgbClr val="BCC2CF"/>
+              </a:solidFill>
+            </a:ln>
+          </c:spPr>
+          <c:marker>
+            <c:symbol val="none"/>
+          </c:marker>
+          <c:dLbls>
+            <c:dLbl>
+              <c:idx val="0"/>
+              <c:tx>
+                <c:rich>
+                  <a:bodyPr/>
+                  <a:lstStyle/>
+                  <a:p>
+                    <a:r>
+                      <a:rPr sz="800" b="1" i="0">
+                        <a:solidFill>
+                          <a:srgbClr val="596070"/>
+                        </a:solidFill>
+                        <a:latin typeface="Arial"/>
+                      </a:rPr>
+                      <a:t>27.0</a:t>
+                    </a:r>
+                  </a:p>
+                </c:rich>
+              </c:tx>
+              <c:txPr>
+                <a:bodyPr/>
+                <a:lstStyle/>
+                <a:p>
+                  <a:pPr>
+                    <a:defRPr sz="800" b="1" i="0">
+                      <a:solidFill>
+                        <a:srgbClr val="596070"/>
+                      </a:solidFill>
+                      <a:latin typeface="Arial"/>
+                    </a:defRPr>
+                  </a:pPr>
+                </a:p>
+              </c:txPr>
+              <c:dLblPos val="t"/>
+              <c:showLegendKey val="0"/>
+              <c:showVal val="1"/>
+              <c:showCatName val="0"/>
+              <c:showSerName val="0"/>
+              <c:showPercent val="0"/>
+              <c:showBubbleSize val="0"/>
+            </c:dLbl>
+            <c:dLbl>
+              <c:idx val="8"/>
+              <c:tx>
+                <c:rich>
+                  <a:bodyPr/>
+                  <a:lstStyle/>
+                  <a:p>
+                    <a:r>
+                      <a:rPr sz="800" b="1" i="0">
+                        <a:solidFill>
+                          <a:srgbClr val="596070"/>
+                        </a:solidFill>
+                        <a:latin typeface="Arial"/>
+                      </a:rPr>
+                      <a:t>Revenue 21.3</a:t>
+                    </a:r>
+                  </a:p>
+                </c:rich>
+              </c:tx>
+              <c:txPr>
+                <a:bodyPr/>
+                <a:lstStyle/>
+                <a:p>
+                  <a:pPr>
+                    <a:defRPr sz="800" b="1" i="0">
+                      <a:solidFill>
+                        <a:srgbClr val="596070"/>
+                      </a:solidFill>
+                      <a:latin typeface="Arial"/>
+                    </a:defRPr>
+                  </a:pPr>
+                </a:p>
+              </c:txPr>
+              <c:dLblPos val="b"/>
+              <c:showLegendKey val="0"/>
+              <c:showVal val="1"/>
+              <c:showCatName val="0"/>
+              <c:showSerName val="0"/>
+              <c:showPercent val="0"/>
+              <c:showBubbleSize val="0"/>
+            </c:dLbl>
+            <c:showLegendKey val="0"/>
+            <c:showVal val="0"/>
+            <c:showCatName val="0"/>
+            <c:showSerName val="0"/>
+            <c:showPercent val="0"/>
+            <c:showBubbleSize val="0"/>
+            <c:showLeaderLines val="1"/>
+          </c:dLbls>
+          <c:cat>
+            <c:strRef>
+              <c:f>Sheet1!$A$2:$A$10</c:f>
+              <c:strCache>
+                <c:ptCount val="9"/>
+                <c:pt idx="0">
+                  <c:v>Q3'24</c:v>
+                </c:pt>
+                <c:pt idx="1">
+                  <c:v>Q4'24</c:v>
+                </c:pt>
+                <c:pt idx="2">
+                  <c:v>Q1'25</c:v>
+                </c:pt>
+                <c:pt idx="3">
+                  <c:v>Q2'25</c:v>
+                </c:pt>
+                <c:pt idx="4">
+                  <c:v>Q3'25</c:v>
+                </c:pt>
+                <c:pt idx="5">
+                  <c:v>Q4'25</c:v>
+                </c:pt>
+                <c:pt idx="6">
+                  <c:v>Q1'26</c:v>
+                </c:pt>
+                <c:pt idx="7">
+                  <c:v>Q2'26</c:v>
+                </c:pt>
+                <c:pt idx="8">
+                  <c:v>Q3'26</c:v>
+                </c:pt>
+              </c:strCache>
+            </c:strRef>
+          </c:cat>
+          <c:val>
+            <c:numRef>
+              <c:f>Sheet1!$C$2:$C$10</c:f>
+              <c:numCache>
+                <c:formatCode>0.0</c:formatCode>
+                <c:ptCount val="9"/>
+                <c:pt idx="0">
+                  <c:v>27.0</c:v>
+                </c:pt>
+                <c:pt idx="1">
+                  <c:v>25.0</c:v>
+                </c:pt>
+                <c:pt idx="2">
+                  <c:v>24.0</c:v>
+                </c:pt>
+                <c:pt idx="3">
+                  <c:v>23.0</c:v>
+                </c:pt>
+                <c:pt idx="4">
+                  <c:v>21.7</c:v>
+                </c:pt>
+                <c:pt idx="5">
+                  <c:v>21.4</c:v>
+                </c:pt>
+                <c:pt idx="6">
+                  <c:v>21.6</c:v>
+                </c:pt>
+                <c:pt idx="7">
+                  <c:v>21.4</c:v>
+                </c:pt>
+                <c:pt idx="8">
+                  <c:v>21.3</c:v>
                 </c:pt>
               </c:numCache>
             </c:numRef>
@@ -4207,7 +4688,7 @@
         <c:axPos val="b"/>
         <c:majorTickMark val="none"/>
         <c:minorTickMark val="none"/>
-        <c:tickLblPos val="nextTo"/>
+        <c:tickLblPos val="none"/>
         <c:spPr>
           <a:ln w="9525">
             <a:solidFill>
@@ -4220,12 +4701,7 @@
           <a:lstStyle/>
           <a:p>
             <a:pPr>
-              <a:defRPr sz="800" b="0" i="0">
-                <a:solidFill>
-                  <a:srgbClr val="596070"/>
-                </a:solidFill>
-                <a:latin typeface="Arial"/>
-              </a:defRPr>
+              <a:defRPr/>
             </a:pPr>
           </a:p>
         </c:txPr>
@@ -4239,8 +4715,8 @@
       <c:valAx>
         <c:axId val="2140495176"/>
         <c:scaling>
-          <c:max val="123.0"/>
-          <c:min val="113.0"/>
+          <c:max val="28.5"/>
+          <c:min val="19.0"/>
         </c:scaling>
         <c:delete/>
         <c:axPos val="l"/>
@@ -4249,7 +4725,7 @@
         <c:tickLblPos val="nextTo"/>
         <c:crossAx val="2118791784"/>
         <c:crosses val="autoZero"/>
-        <c:crossBetween val="between"/>
+        <c:crossBetween val="midCat"/>
       </c:valAx>
       <c:spPr>
         <a:noFill/>
@@ -7736,7 +8212,7 @@
           <a:spcPct val="20000"/>
         </a:spcBef>
         <a:buFont typeface="Arial"/>
-        <a:buChar char="–"/>
+        <a:buChar char="•"/>
         <a:defRPr sz="2800" kern="1200">
           <a:solidFill>
             <a:schemeClr val="tx1"/>
@@ -7766,7 +8242,7 @@
           <a:spcPct val="20000"/>
         </a:spcBef>
         <a:buFont typeface="Arial"/>
-        <a:buChar char="–"/>
+        <a:buChar char="•"/>
         <a:defRPr sz="2000" kern="1200">
           <a:solidFill>
             <a:schemeClr val="tx1"/>
@@ -12583,7 +13059,7 @@
       <p:grpSpPr/>
       <p:sp>
         <p:nvSpPr>
-          <p:cNvPr id="49" name="chrome-1"/>
+          <p:cNvPr id="52" name="chrome-1"/>
           <p:cNvSpPr txBox="1"/>
           <p:nvPr/>
         </p:nvSpPr>
@@ -12617,7 +13093,7 @@
       </p:sp>
       <p:sp>
         <p:nvSpPr>
-          <p:cNvPr id="50" name="chrome-2"/>
+          <p:cNvPr id="53" name="chrome-2"/>
           <p:cNvSpPr txBox="1"/>
           <p:nvPr/>
         </p:nvSpPr>
@@ -14073,7 +14549,127 @@
       </p:sp>
       <p:sp>
         <p:nvSpPr>
-          <p:cNvPr id="18" name="source"/>
+          <p:cNvPr id="18" name="y_h"/>
+          <p:cNvSpPr/>
+          <p:nvPr/>
+        </p:nvSpPr>
+        <p:spPr>
+          <a:xfrm>
+            <a:off x="8953218" y="4305554"/>
+            <a:ext cx="2781582" cy="167640"/>
+          </a:xfrm>
+          <a:prstGeom prst="rect">
+            <a:avLst/>
+          </a:prstGeom>
+          <a:noFill/>
+        </p:spPr>
+        <p:txBody>
+          <a:bodyPr wrap="square" lIns="0" tIns="0" rIns="0" bIns="0" anchor="t">
+            <a:noAutofit/>
+          </a:bodyPr>
+          <a:lstStyle/>
+          <a:p>
+            <a:pPr algn="l" marL="0" indent="0">
+              <a:lnSpc>
+                <a:spcPts val="1320"/>
+              </a:lnSpc>
+              <a:spcBef>
+                <a:spcPts val="0"/>
+              </a:spcBef>
+              <a:spcAft>
+                <a:spcPts val="0"/>
+              </a:spcAft>
+              <a:buNone/>
+            </a:pPr>
+            <a:r>
+              <a:rPr sz="1100" b="1" i="0">
+                <a:solidFill>
+                  <a:srgbClr val="16181D"/>
+                </a:solidFill>
+                <a:latin typeface="Arial"/>
+              </a:rPr>
+              <a:t>ARR growth against revenue growth</a:t>
+            </a:r>
+          </a:p>
+        </p:txBody>
+      </p:sp>
+      <p:sp>
+        <p:nvSpPr>
+          <p:cNvPr id="19" name="y_u"/>
+          <p:cNvSpPr/>
+          <p:nvPr/>
+        </p:nvSpPr>
+        <p:spPr>
+          <a:xfrm>
+            <a:off x="8953218" y="4528058"/>
+            <a:ext cx="2781582" cy="243840"/>
+          </a:xfrm>
+          <a:prstGeom prst="rect">
+            <a:avLst/>
+          </a:prstGeom>
+          <a:noFill/>
+        </p:spPr>
+        <p:txBody>
+          <a:bodyPr wrap="square" lIns="0" tIns="0" rIns="0" bIns="0" anchor="t">
+            <a:noAutofit/>
+          </a:bodyPr>
+          <a:lstStyle/>
+          <a:p>
+            <a:pPr algn="l" marL="0" indent="0">
+              <a:lnSpc>
+                <a:spcPts val="960"/>
+              </a:lnSpc>
+              <a:spcBef>
+                <a:spcPts val="0"/>
+              </a:spcBef>
+              <a:spcAft>
+                <a:spcPts val="0"/>
+              </a:spcAft>
+              <a:buNone/>
+            </a:pPr>
+            <a:r>
+              <a:rPr sz="800" b="0" i="0">
+                <a:solidFill>
+                  <a:srgbClr val="596070"/>
+                </a:solidFill>
+                <a:latin typeface="Arial"/>
+              </a:rPr>
+              <a:t>Y/Y (%), Q3'24 to Q3'26; ARR ahead after five quarters</a:t>
+            </a:r>
+            <a:br/>
+            <a:r>
+              <a:rPr sz="800" b="0" i="0">
+                <a:solidFill>
+                  <a:srgbClr val="596070"/>
+                </a:solidFill>
+                <a:latin typeface="Arial"/>
+              </a:rPr>
+              <a:t>behind</a:t>
+            </a:r>
+          </a:p>
+        </p:txBody>
+      </p:sp>
+      <p:graphicFrame>
+        <p:nvGraphicFramePr>
+          <p:cNvPr id="20" name="gx"/>
+          <p:cNvGraphicFramePr>
+            <a:graphicFrameLocks noGrp="1"/>
+          </p:cNvGraphicFramePr>
+          <p:nvPr/>
+        </p:nvGraphicFramePr>
+        <p:xfrm>
+          <a:off x="8953218" y="4826762"/>
+          <a:ext cx="2781582" cy="1350010"/>
+        </p:xfrm>
+        <a:graphic>
+          <a:graphicData uri="http://schemas.openxmlformats.org/drawingml/2006/chart">
+            <c:chart xmlns:c="http://schemas.openxmlformats.org/drawingml/2006/chart" r:id="rId4"/>
+          </a:graphicData>
+        </a:graphic>
+      </p:graphicFrame>
+      <p:sp>
+        <p:nvSpPr>
+          <p:cNvPr id="21" name="source"/>
           <p:cNvSpPr/>
           <p:nvPr/>
         </p:nvSpPr>
@@ -14119,7 +14715,7 @@
       </p:sp>
       <p:sp>
         <p:nvSpPr>
-          <p:cNvPr id="19" name="rev_g-0-text"/>
+          <p:cNvPr id="22" name="rev_g-0-text"/>
           <p:cNvSpPr/>
           <p:nvPr/>
         </p:nvSpPr>
@@ -14165,7 +14761,7 @@
       </p:sp>
       <p:sp>
         <p:nvSpPr>
-          <p:cNvPr id="20" name="rev_g-1-text"/>
+          <p:cNvPr id="23" name="rev_g-1-text"/>
           <p:cNvSpPr/>
           <p:nvPr/>
         </p:nvSpPr>
@@ -14211,7 +14807,7 @@
       </p:sp>
       <p:sp>
         <p:nvSpPr>
-          <p:cNvPr id="21" name="rev_g-2-text"/>
+          <p:cNvPr id="24" name="rev_g-2-text"/>
           <p:cNvSpPr/>
           <p:nvPr/>
         </p:nvSpPr>
@@ -14257,7 +14853,7 @@
       </p:sp>
       <p:sp>
         <p:nvSpPr>
-          <p:cNvPr id="22" name="rev_g-3-text"/>
+          <p:cNvPr id="25" name="rev_g-3-text"/>
           <p:cNvSpPr/>
           <p:nvPr/>
         </p:nvSpPr>
@@ -14303,7 +14899,7 @@
       </p:sp>
       <p:sp>
         <p:nvSpPr>
-          <p:cNvPr id="23" name="rev_g-4-text"/>
+          <p:cNvPr id="26" name="rev_g-4-text"/>
           <p:cNvSpPr/>
           <p:nvPr/>
         </p:nvSpPr>
@@ -14349,7 +14945,7 @@
       </p:sp>
       <p:sp>
         <p:nvSpPr>
-          <p:cNvPr id="24" name="rev_g-5-text"/>
+          <p:cNvPr id="27" name="rev_g-5-text"/>
           <p:cNvSpPr/>
           <p:nvPr/>
         </p:nvSpPr>
@@ -14395,7 +14991,7 @@
       </p:sp>
       <p:sp>
         <p:nvSpPr>
-          <p:cNvPr id="25" name="rev_g-6-text"/>
+          <p:cNvPr id="28" name="rev_g-6-text"/>
           <p:cNvSpPr/>
           <p:nvPr/>
         </p:nvSpPr>
@@ -14441,7 +15037,7 @@
       </p:sp>
       <p:sp>
         <p:nvSpPr>
-          <p:cNvPr id="26" name="rev_g-7-text"/>
+          <p:cNvPr id="29" name="rev_g-7-text"/>
           <p:cNvSpPr/>
           <p:nvPr/>
         </p:nvSpPr>
@@ -14487,7 +15083,7 @@
       </p:sp>
       <p:sp>
         <p:nvSpPr>
-          <p:cNvPr id="27" name="rev_g-8-text"/>
+          <p:cNvPr id="30" name="rev_g-8-text"/>
           <p:cNvSpPr/>
           <p:nvPr/>
         </p:nvSpPr>
@@ -14533,7 +15129,7 @@
       </p:sp>
       <p:sp>
         <p:nvSpPr>
-          <p:cNvPr id="28" name="rev_g-label"/>
+          <p:cNvPr id="31" name="rev_g-label"/>
           <p:cNvSpPr/>
           <p:nvPr/>
         </p:nvSpPr>
@@ -14579,7 +15175,7 @@
       </p:sp>
       <p:sp>
         <p:nvSpPr>
-          <p:cNvPr id="29" name="arr_r-0-text"/>
+          <p:cNvPr id="32" name="arr_r-0-text"/>
           <p:cNvSpPr/>
           <p:nvPr/>
         </p:nvSpPr>
@@ -14625,7 +15221,7 @@
       </p:sp>
       <p:sp>
         <p:nvSpPr>
-          <p:cNvPr id="30" name="arr_r-1-text"/>
+          <p:cNvPr id="33" name="arr_r-1-text"/>
           <p:cNvSpPr/>
           <p:nvPr/>
         </p:nvSpPr>
@@ -14671,7 +15267,7 @@
       </p:sp>
       <p:sp>
         <p:nvSpPr>
-          <p:cNvPr id="31" name="arr_r-2-text"/>
+          <p:cNvPr id="34" name="arr_r-2-text"/>
           <p:cNvSpPr/>
           <p:nvPr/>
         </p:nvSpPr>
@@ -14717,7 +15313,7 @@
       </p:sp>
       <p:sp>
         <p:nvSpPr>
-          <p:cNvPr id="32" name="arr_r-3-text"/>
+          <p:cNvPr id="35" name="arr_r-3-text"/>
           <p:cNvSpPr/>
           <p:nvPr/>
         </p:nvSpPr>
@@ -14763,7 +15359,7 @@
       </p:sp>
       <p:sp>
         <p:nvSpPr>
-          <p:cNvPr id="33" name="arr_r-4-text"/>
+          <p:cNvPr id="36" name="arr_r-4-text"/>
           <p:cNvSpPr/>
           <p:nvPr/>
         </p:nvSpPr>
@@ -14809,7 +15405,7 @@
       </p:sp>
       <p:sp>
         <p:nvSpPr>
-          <p:cNvPr id="34" name="arr_r-5-text"/>
+          <p:cNvPr id="37" name="arr_r-5-text"/>
           <p:cNvSpPr/>
           <p:nvPr/>
         </p:nvSpPr>
@@ -14855,7 +15451,7 @@
       </p:sp>
       <p:sp>
         <p:nvSpPr>
-          <p:cNvPr id="35" name="arr_r-6-text"/>
+          <p:cNvPr id="38" name="arr_r-6-text"/>
           <p:cNvSpPr/>
           <p:nvPr/>
         </p:nvSpPr>
@@ -14901,7 +15497,7 @@
       </p:sp>
       <p:sp>
         <p:nvSpPr>
-          <p:cNvPr id="36" name="arr_r-7-text"/>
+          <p:cNvPr id="39" name="arr_r-7-text"/>
           <p:cNvSpPr/>
           <p:nvPr/>
         </p:nvSpPr>
@@ -14947,7 +15543,7 @@
       </p:sp>
       <p:sp>
         <p:nvSpPr>
-          <p:cNvPr id="37" name="arr_r-8-text"/>
+          <p:cNvPr id="40" name="arr_r-8-text"/>
           <p:cNvSpPr/>
           <p:nvPr/>
         </p:nvSpPr>
@@ -14993,7 +15589,7 @@
       </p:sp>
       <p:sp>
         <p:nvSpPr>
-          <p:cNvPr id="38" name="arr_r-label"/>
+          <p:cNvPr id="41" name="arr_r-label"/>
           <p:cNvSpPr/>
           <p:nvPr/>
         </p:nvSpPr>
@@ -15039,7 +15635,7 @@
       </p:sp>
       <p:sp>
         <p:nvSpPr>
-          <p:cNvPr id="39" name="arr_g-0-text"/>
+          <p:cNvPr id="42" name="arr_g-0-text"/>
           <p:cNvSpPr/>
           <p:nvPr/>
         </p:nvSpPr>
@@ -15085,7 +15681,7 @@
       </p:sp>
       <p:sp>
         <p:nvSpPr>
-          <p:cNvPr id="40" name="arr_g-1-text"/>
+          <p:cNvPr id="43" name="arr_g-1-text"/>
           <p:cNvSpPr/>
           <p:nvPr/>
         </p:nvSpPr>
@@ -15131,7 +15727,7 @@
       </p:sp>
       <p:sp>
         <p:nvSpPr>
-          <p:cNvPr id="41" name="arr_g-2-text"/>
+          <p:cNvPr id="44" name="arr_g-2-text"/>
           <p:cNvSpPr/>
           <p:nvPr/>
         </p:nvSpPr>
@@ -15177,7 +15773,7 @@
       </p:sp>
       <p:sp>
         <p:nvSpPr>
-          <p:cNvPr id="42" name="arr_g-3-text"/>
+          <p:cNvPr id="45" name="arr_g-3-text"/>
           <p:cNvSpPr/>
           <p:nvPr/>
         </p:nvSpPr>
@@ -15223,7 +15819,7 @@
       </p:sp>
       <p:sp>
         <p:nvSpPr>
-          <p:cNvPr id="43" name="arr_g-4-text"/>
+          <p:cNvPr id="46" name="arr_g-4-text"/>
           <p:cNvSpPr/>
           <p:nvPr/>
         </p:nvSpPr>
@@ -15269,7 +15865,7 @@
       </p:sp>
       <p:sp>
         <p:nvSpPr>
-          <p:cNvPr id="44" name="arr_g-5-text"/>
+          <p:cNvPr id="47" name="arr_g-5-text"/>
           <p:cNvSpPr/>
           <p:nvPr/>
         </p:nvSpPr>
@@ -15315,7 +15911,7 @@
       </p:sp>
       <p:sp>
         <p:nvSpPr>
-          <p:cNvPr id="45" name="arr_g-6-text"/>
+          <p:cNvPr id="48" name="arr_g-6-text"/>
           <p:cNvSpPr/>
           <p:nvPr/>
         </p:nvSpPr>
@@ -15361,7 +15957,7 @@
       </p:sp>
       <p:sp>
         <p:nvSpPr>
-          <p:cNvPr id="46" name="arr_g-7-text"/>
+          <p:cNvPr id="49" name="arr_g-7-text"/>
           <p:cNvSpPr/>
           <p:nvPr/>
         </p:nvSpPr>
@@ -15407,7 +16003,7 @@
       </p:sp>
       <p:sp>
         <p:nvSpPr>
-          <p:cNvPr id="47" name="arr_g-8-text"/>
+          <p:cNvPr id="50" name="arr_g-8-text"/>
           <p:cNvSpPr/>
           <p:nvPr/>
         </p:nvSpPr>
@@ -15453,7 +16049,7 @@
       </p:sp>
       <p:sp>
         <p:nvSpPr>
-          <p:cNvPr id="48" name="arr_g-label"/>
+          <p:cNvPr id="51" name="arr_g-label"/>
           <p:cNvSpPr/>
           <p:nvPr/>
         </p:nvSpPr>
@@ -15499,7 +16095,7 @@
       </p:sp>
     </p:spTree>
     <p:custDataLst>
-      <p:tags r:id="rId4"/>
+      <p:tags r:id="rId5"/>
     </p:custDataLst>
   </p:cSld>
   <p:clrMapOvr>
@@ -18938,7 +19534,7 @@
                 </a:solidFill>
                 <a:latin typeface="Arial"/>
               </a:rPr>
-              <a:t>% of revenue; each step is the fall in that cost line's share of revenue (gross margin: its rise)</a:t>
+              <a:t>% of revenue; each step is the fall in that cost line's share of revenue (gross margin: its rise); axis from 8%</a:t>
             </a:r>
           </a:p>
         </p:txBody>

--- a/docs/showcase/software-earnings.pptx
+++ b/docs/showcase/software-earnings.pptx
@@ -1875,7 +1875,7 @@
         <c:axId val="-2113994440"/>
         <c:scaling>
           <c:max val="17.6"/>
-          <c:min val="8.0"/>
+          <c:min val="0.0"/>
         </c:scaling>
         <c:delete/>
         <c:axPos val="l"/>
@@ -4291,10 +4291,10 @@
           <c:layoutTarget val="inner"/>
           <c:xMode val="edge"/>
           <c:yMode val="edge"/>
-          <c:x val="0.06"/>
-          <c:y val="0.06"/>
-          <c:w val="0.7"/>
-          <c:h val="0.78"/>
+          <c:x val="0.17"/>
+          <c:y val="0.1"/>
+          <c:w val="0.76"/>
+          <c:h val="0.66"/>
         </c:manualLayout>
       </c:layout>
       <c:lineChart>
@@ -4339,7 +4339,7 @@
                         </a:solidFill>
                         <a:latin typeface="Arial"/>
                       </a:rPr>
-                      <a:t>26.5</a:t>
+                      <a:t>ARR 21.4</a:t>
                     </a:r>
                   </a:p>
                 </c:rich>
@@ -4367,7 +4367,7 @@
               <c:showBubbleSize val="0"/>
             </c:dLbl>
             <c:dLbl>
-              <c:idx val="8"/>
+              <c:idx val="5"/>
               <c:tx>
                 <c:rich>
                   <a:bodyPr/>
@@ -4380,7 +4380,7 @@
                         </a:solidFill>
                         <a:latin typeface="Arial"/>
                       </a:rPr>
-                      <a:t>ARR 22.2</a:t>
+                      <a:t>22.2</a:t>
                     </a:r>
                   </a:p>
                 </c:rich>
@@ -4417,34 +4417,25 @@
           </c:dLbls>
           <c:cat>
             <c:strRef>
-              <c:f>Sheet1!$A$2:$A$10</c:f>
+              <c:f>Sheet1!$A$2:$A$7</c:f>
               <c:strCache>
-                <c:ptCount val="9"/>
+                <c:ptCount val="6"/>
                 <c:pt idx="0">
-                  <c:v>Q3'24</c:v>
+                  <c:v>Q2'25</c:v>
                 </c:pt>
                 <c:pt idx="1">
-                  <c:v>Q4'24</c:v>
+                  <c:v>Q3'25</c:v>
                 </c:pt>
                 <c:pt idx="2">
-                  <c:v>Q1'25</c:v>
+                  <c:v>Q4'25</c:v>
                 </c:pt>
                 <c:pt idx="3">
-                  <c:v>Q2'25</c:v>
+                  <c:v>Q1'26</c:v>
                 </c:pt>
                 <c:pt idx="4">
-                  <c:v>Q3'25</c:v>
+                  <c:v>Q2'26</c:v>
                 </c:pt>
                 <c:pt idx="5">
-                  <c:v>Q4'25</c:v>
-                </c:pt>
-                <c:pt idx="6">
-                  <c:v>Q1'26</c:v>
-                </c:pt>
-                <c:pt idx="7">
-                  <c:v>Q2'26</c:v>
-                </c:pt>
-                <c:pt idx="8">
                   <c:v>Q3'26</c:v>
                 </c:pt>
               </c:strCache>
@@ -4452,35 +4443,26 @@
           </c:cat>
           <c:val>
             <c:numRef>
-              <c:f>Sheet1!$B$2:$B$10</c:f>
+              <c:f>Sheet1!$B$2:$B$7</c:f>
               <c:numCache>
                 <c:formatCode>0.0</c:formatCode>
-                <c:ptCount val="9"/>
+                <c:ptCount val="6"/>
                 <c:pt idx="0">
-                  <c:v>26.5</c:v>
+                  <c:v>21.4</c:v>
                 </c:pt>
                 <c:pt idx="1">
-                  <c:v>26.2</c:v>
+                  <c:v>21.1</c:v>
                 </c:pt>
                 <c:pt idx="2">
-                  <c:v>24.3</c:v>
+                  <c:v>21.0</c:v>
                 </c:pt>
                 <c:pt idx="3">
-                  <c:v>21.4</c:v>
+                  <c:v>21.0</c:v>
                 </c:pt>
                 <c:pt idx="4">
                   <c:v>21.1</c:v>
                 </c:pt>
                 <c:pt idx="5">
-                  <c:v>21.0</c:v>
-                </c:pt>
-                <c:pt idx="6">
-                  <c:v>21.0</c:v>
-                </c:pt>
-                <c:pt idx="7">
-                  <c:v>21.1</c:v>
-                </c:pt>
-                <c:pt idx="8">
                   <c:v>22.2</c:v>
                 </c:pt>
               </c:numCache>
@@ -4527,7 +4509,7 @@
                         </a:solidFill>
                         <a:latin typeface="Arial"/>
                       </a:rPr>
-                      <a:t>27.0</a:t>
+                      <a:t>Revenue 23.0</a:t>
                     </a:r>
                   </a:p>
                 </c:rich>
@@ -4555,7 +4537,7 @@
               <c:showBubbleSize val="0"/>
             </c:dLbl>
             <c:dLbl>
-              <c:idx val="8"/>
+              <c:idx val="5"/>
               <c:tx>
                 <c:rich>
                   <a:bodyPr/>
@@ -4568,7 +4550,7 @@
                         </a:solidFill>
                         <a:latin typeface="Arial"/>
                       </a:rPr>
-                      <a:t>Revenue 21.3</a:t>
+                      <a:t>21.3</a:t>
                     </a:r>
                   </a:p>
                 </c:rich>
@@ -4605,34 +4587,25 @@
           </c:dLbls>
           <c:cat>
             <c:strRef>
-              <c:f>Sheet1!$A$2:$A$10</c:f>
+              <c:f>Sheet1!$A$2:$A$7</c:f>
               <c:strCache>
-                <c:ptCount val="9"/>
+                <c:ptCount val="6"/>
                 <c:pt idx="0">
-                  <c:v>Q3'24</c:v>
+                  <c:v>Q2'25</c:v>
                 </c:pt>
                 <c:pt idx="1">
-                  <c:v>Q4'24</c:v>
+                  <c:v>Q3'25</c:v>
                 </c:pt>
                 <c:pt idx="2">
-                  <c:v>Q1'25</c:v>
+                  <c:v>Q4'25</c:v>
                 </c:pt>
                 <c:pt idx="3">
-                  <c:v>Q2'25</c:v>
+                  <c:v>Q1'26</c:v>
                 </c:pt>
                 <c:pt idx="4">
-                  <c:v>Q3'25</c:v>
+                  <c:v>Q2'26</c:v>
                 </c:pt>
                 <c:pt idx="5">
-                  <c:v>Q4'25</c:v>
-                </c:pt>
-                <c:pt idx="6">
-                  <c:v>Q1'26</c:v>
-                </c:pt>
-                <c:pt idx="7">
-                  <c:v>Q2'26</c:v>
-                </c:pt>
-                <c:pt idx="8">
                   <c:v>Q3'26</c:v>
                 </c:pt>
               </c:strCache>
@@ -4640,35 +4613,26 @@
           </c:cat>
           <c:val>
             <c:numRef>
-              <c:f>Sheet1!$C$2:$C$10</c:f>
+              <c:f>Sheet1!$C$2:$C$7</c:f>
               <c:numCache>
                 <c:formatCode>0.0</c:formatCode>
-                <c:ptCount val="9"/>
+                <c:ptCount val="6"/>
                 <c:pt idx="0">
-                  <c:v>27.0</c:v>
+                  <c:v>23.0</c:v>
                 </c:pt>
                 <c:pt idx="1">
-                  <c:v>25.0</c:v>
+                  <c:v>21.7</c:v>
                 </c:pt>
                 <c:pt idx="2">
-                  <c:v>24.0</c:v>
+                  <c:v>21.4</c:v>
                 </c:pt>
                 <c:pt idx="3">
-                  <c:v>23.0</c:v>
+                  <c:v>21.6</c:v>
                 </c:pt>
                 <c:pt idx="4">
-                  <c:v>21.7</c:v>
+                  <c:v>21.4</c:v>
                 </c:pt>
                 <c:pt idx="5">
-                  <c:v>21.4</c:v>
-                </c:pt>
-                <c:pt idx="6">
-                  <c:v>21.6</c:v>
-                </c:pt>
-                <c:pt idx="7">
-                  <c:v>21.4</c:v>
-                </c:pt>
-                <c:pt idx="8">
                   <c:v>21.3</c:v>
                 </c:pt>
               </c:numCache>
@@ -4688,7 +4652,7 @@
         <c:axPos val="b"/>
         <c:majorTickMark val="none"/>
         <c:minorTickMark val="none"/>
-        <c:tickLblPos val="none"/>
+        <c:tickLblPos val="nextTo"/>
         <c:spPr>
           <a:ln w="9525">
             <a:solidFill>
@@ -4701,7 +4665,12 @@
           <a:lstStyle/>
           <a:p>
             <a:pPr>
-              <a:defRPr/>
+              <a:defRPr sz="800" b="0" i="0">
+                <a:solidFill>
+                  <a:srgbClr val="596070"/>
+                </a:solidFill>
+                <a:latin typeface="Arial"/>
+              </a:defRPr>
             </a:pPr>
           </a:p>
         </c:txPr>
@@ -4715,8 +4684,8 @@
       <c:valAx>
         <c:axId val="2140495176"/>
         <c:scaling>
-          <c:max val="28.5"/>
-          <c:min val="19.0"/>
+          <c:max val="23.8"/>
+          <c:min val="20.4"/>
         </c:scaling>
         <c:delete/>
         <c:axPos val="l"/>
@@ -14634,7 +14603,7 @@
                 </a:solidFill>
                 <a:latin typeface="Arial"/>
               </a:rPr>
-              <a:t>Y/Y (%), Q3'24 to Q3'26; ARR ahead after five quarters</a:t>
+              <a:t>Y/Y (%), Q2'25 to Q3'26; ARR ahead after five quarters</a:t>
             </a:r>
             <a:br/>
             <a:r>
@@ -19534,7 +19503,7 @@
                 </a:solidFill>
                 <a:latin typeface="Arial"/>
               </a:rPr>
-              <a:t>% of revenue; each step is the fall in that cost line's share of revenue (gross margin: its rise); axis from 8%</a:t>
+              <a:t>% of revenue; each step is the fall in that cost line's share of revenue (gross margin: its rise)</a:t>
             </a:r>
           </a:p>
         </p:txBody>
@@ -24416,7 +24385,7 @@
       <p:grpSpPr/>
       <p:sp>
         <p:nvSpPr>
-          <p:cNvPr id="26" name="chrome-1"/>
+          <p:cNvPr id="29" name="chrome-1"/>
           <p:cNvSpPr txBox="1"/>
           <p:nvPr/>
         </p:nvSpPr>
@@ -24450,7 +24419,7 @@
       </p:sp>
       <p:sp>
         <p:nvSpPr>
-          <p:cNvPr id="27" name="chrome-2"/>
+          <p:cNvPr id="30" name="chrome-2"/>
           <p:cNvSpPr txBox="1"/>
           <p:nvPr/>
         </p:nvSpPr>
@@ -27005,13 +26974,819 @@
       </p:sp>
       <p:sp>
         <p:nvSpPr>
-          <p:cNvPr id="19" name="n_fn"/>
+          <p:cNvPr id="19" name="q_h"/>
           <p:cNvSpPr/>
           <p:nvPr/>
         </p:nvSpPr>
         <p:spPr>
           <a:xfrm>
             <a:off x="7709210" y="4568952"/>
+            <a:ext cx="4025590" cy="167640"/>
+          </a:xfrm>
+          <a:prstGeom prst="rect">
+            <a:avLst/>
+          </a:prstGeom>
+          <a:noFill/>
+        </p:spPr>
+        <p:txBody>
+          <a:bodyPr wrap="square" lIns="0" tIns="0" rIns="0" bIns="0" anchor="t">
+            <a:noAutofit/>
+          </a:bodyPr>
+          <a:lstStyle/>
+          <a:p>
+            <a:pPr algn="l" marL="0" indent="0">
+              <a:lnSpc>
+                <a:spcPts val="1320"/>
+              </a:lnSpc>
+              <a:spcBef>
+                <a:spcPts val="0"/>
+              </a:spcBef>
+              <a:spcAft>
+                <a:spcPts val="0"/>
+              </a:spcAft>
+              <a:buNone/>
+            </a:pPr>
+            <a:r>
+              <a:rPr sz="1100" b="1" i="0">
+                <a:solidFill>
+                  <a:srgbClr val="16181D"/>
+                </a:solidFill>
+                <a:latin typeface="Arial"/>
+              </a:rPr>
+              <a:t>Q4 FY26 guidance against Q4 FY25</a:t>
+            </a:r>
+          </a:p>
+        </p:txBody>
+      </p:sp>
+      <p:sp>
+        <p:nvSpPr>
+          <p:cNvPr id="20" name="q_u"/>
+          <p:cNvSpPr/>
+          <p:nvPr/>
+        </p:nvSpPr>
+        <p:spPr>
+          <a:xfrm>
+            <a:off x="7709210" y="4791456"/>
+            <a:ext cx="4025590" cy="121920"/>
+          </a:xfrm>
+          <a:prstGeom prst="rect">
+            <a:avLst/>
+          </a:prstGeom>
+          <a:noFill/>
+        </p:spPr>
+        <p:txBody>
+          <a:bodyPr wrap="square" lIns="0" tIns="0" rIns="0" bIns="0" anchor="t">
+            <a:noAutofit/>
+          </a:bodyPr>
+          <a:lstStyle/>
+          <a:p>
+            <a:pPr algn="l" marL="0" indent="0">
+              <a:lnSpc>
+                <a:spcPts val="960"/>
+              </a:lnSpc>
+              <a:spcBef>
+                <a:spcPts val="0"/>
+              </a:spcBef>
+              <a:spcAft>
+                <a:spcPts val="0"/>
+              </a:spcAft>
+              <a:buNone/>
+            </a:pPr>
+            <a:r>
+              <a:rPr sz="800" b="0" i="0">
+                <a:solidFill>
+                  <a:srgbClr val="596070"/>
+                </a:solidFill>
+                <a:latin typeface="Arial"/>
+              </a:rPr>
+              <a:t>non-GAAP; guidance in amber</a:t>
+            </a:r>
+          </a:p>
+        </p:txBody>
+      </p:sp>
+      <p:graphicFrame>
+        <p:nvGraphicFramePr>
+          <p:cNvPr id="21" name="q4"/>
+          <p:cNvGraphicFramePr>
+            <a:graphicFrameLocks noGrp="1"/>
+          </p:cNvGraphicFramePr>
+          <p:nvPr/>
+        </p:nvGraphicFramePr>
+        <p:xfrm>
+          <a:off x="7709210" y="4968240"/>
+          <a:ext cx="4025590" cy="769112"/>
+        </p:xfrm>
+        <a:graphic>
+          <a:graphicData uri="http://schemas.openxmlformats.org/drawingml/2006/table">
+            <a:tbl>
+              <a:tblPr firstRow="0" bandRow="0" lastRow="0" firstCol="0" lastCol="0" bandCol="0"/>
+              <a:tblGrid>
+                <a:gridCol w="1485057"/>
+                <a:gridCol w="635743"/>
+                <a:gridCol w="1037512"/>
+                <a:gridCol w="867278"/>
+              </a:tblGrid>
+              <a:tr h="192278">
+                <a:tc>
+                  <a:txBody>
+                    <a:bodyPr wrap="square"/>
+                    <a:lstStyle/>
+                    <a:p>
+                      <a:pPr algn="l"/>
+                      <a:r>
+                        <a:rPr sz="900" b="1" i="0">
+                          <a:solidFill>
+                            <a:srgbClr val="16181D"/>
+                          </a:solidFill>
+                          <a:latin typeface="Arial"/>
+                        </a:rPr>
+                        <a:t>Metric</a:t>
+                      </a:r>
+                      <a:endParaRPr sz="900" b="1" i="0">
+                        <a:solidFill>
+                          <a:srgbClr val="16181D"/>
+                        </a:solidFill>
+                        <a:latin typeface="Arial"/>
+                      </a:endParaRPr>
+                    </a:p>
+                  </a:txBody>
+                  <a:tcPr marL="27432" marR="27432" marT="27432" marB="27432" anchor="ctr">
+                    <a:lnL w="0">
+                      <a:noFill/>
+                    </a:lnL>
+                    <a:lnR w="0">
+                      <a:noFill/>
+                    </a:lnR>
+                    <a:lnT w="0">
+                      <a:noFill/>
+                    </a:lnT>
+                    <a:lnB w="9525">
+                      <a:solidFill>
+                        <a:srgbClr val="16181D"/>
+                      </a:solidFill>
+                    </a:lnB>
+                    <a:noFill/>
+                  </a:tcPr>
+                </a:tc>
+                <a:tc>
+                  <a:txBody>
+                    <a:bodyPr wrap="square"/>
+                    <a:lstStyle/>
+                    <a:p>
+                      <a:pPr algn="r"/>
+                      <a:r>
+                        <a:rPr sz="900" b="1" i="0">
+                          <a:solidFill>
+                            <a:srgbClr val="16181D"/>
+                          </a:solidFill>
+                          <a:latin typeface="Arial"/>
+                        </a:rPr>
+                        <a:t>Q4 FY25</a:t>
+                      </a:r>
+                      <a:endParaRPr sz="900" b="1" i="0">
+                        <a:solidFill>
+                          <a:srgbClr val="16181D"/>
+                        </a:solidFill>
+                        <a:latin typeface="Arial"/>
+                      </a:endParaRPr>
+                    </a:p>
+                  </a:txBody>
+                  <a:tcPr marL="27432" marR="27432" marT="27432" marB="27432" anchor="ctr">
+                    <a:lnL w="0">
+                      <a:noFill/>
+                    </a:lnL>
+                    <a:lnR w="0">
+                      <a:noFill/>
+                    </a:lnR>
+                    <a:lnT w="0">
+                      <a:noFill/>
+                    </a:lnT>
+                    <a:lnB w="9525">
+                      <a:solidFill>
+                        <a:srgbClr val="16181D"/>
+                      </a:solidFill>
+                    </a:lnB>
+                    <a:noFill/>
+                  </a:tcPr>
+                </a:tc>
+                <a:tc>
+                  <a:txBody>
+                    <a:bodyPr wrap="square"/>
+                    <a:lstStyle/>
+                    <a:p>
+                      <a:pPr algn="r"/>
+                      <a:r>
+                        <a:rPr sz="900" b="1" i="0">
+                          <a:solidFill>
+                            <a:srgbClr val="16181D"/>
+                          </a:solidFill>
+                          <a:latin typeface="Arial"/>
+                        </a:rPr>
+                        <a:t>Q4 FY26 guide</a:t>
+                      </a:r>
+                      <a:endParaRPr sz="900" b="1" i="0">
+                        <a:solidFill>
+                          <a:srgbClr val="16181D"/>
+                        </a:solidFill>
+                        <a:latin typeface="Arial"/>
+                      </a:endParaRPr>
+                    </a:p>
+                  </a:txBody>
+                  <a:tcPr marL="27432" marR="27432" marT="27432" marB="27432" anchor="ctr">
+                    <a:lnL w="0">
+                      <a:noFill/>
+                    </a:lnL>
+                    <a:lnR w="0">
+                      <a:noFill/>
+                    </a:lnR>
+                    <a:lnT w="0">
+                      <a:noFill/>
+                    </a:lnT>
+                    <a:lnB w="9525">
+                      <a:solidFill>
+                        <a:srgbClr val="16181D"/>
+                      </a:solidFill>
+                    </a:lnB>
+                    <a:noFill/>
+                  </a:tcPr>
+                </a:tc>
+                <a:tc>
+                  <a:txBody>
+                    <a:bodyPr wrap="square"/>
+                    <a:lstStyle/>
+                    <a:p>
+                      <a:pPr algn="r"/>
+                      <a:r>
+                        <a:rPr sz="900" b="1" i="0">
+                          <a:solidFill>
+                            <a:srgbClr val="16181D"/>
+                          </a:solidFill>
+                          <a:latin typeface="Arial"/>
+                        </a:rPr>
+                        <a:t>Change</a:t>
+                      </a:r>
+                      <a:endParaRPr sz="900" b="1" i="0">
+                        <a:solidFill>
+                          <a:srgbClr val="16181D"/>
+                        </a:solidFill>
+                        <a:latin typeface="Arial"/>
+                      </a:endParaRPr>
+                    </a:p>
+                  </a:txBody>
+                  <a:tcPr marL="27432" marR="27432" marT="27432" marB="27432" anchor="ctr">
+                    <a:lnL w="0">
+                      <a:noFill/>
+                    </a:lnL>
+                    <a:lnR w="0">
+                      <a:noFill/>
+                    </a:lnR>
+                    <a:lnT w="0">
+                      <a:noFill/>
+                    </a:lnT>
+                    <a:lnB w="9525">
+                      <a:solidFill>
+                        <a:srgbClr val="16181D"/>
+                      </a:solidFill>
+                    </a:lnB>
+                    <a:noFill/>
+                  </a:tcPr>
+                </a:tc>
+              </a:tr>
+              <a:tr h="192278">
+                <a:tc>
+                  <a:txBody>
+                    <a:bodyPr wrap="square"/>
+                    <a:lstStyle/>
+                    <a:p>
+                      <a:pPr algn="l"/>
+                      <a:r>
+                        <a:rPr sz="900" b="0" i="0">
+                          <a:solidFill>
+                            <a:srgbClr val="16181D"/>
+                          </a:solidFill>
+                          <a:latin typeface="Arial"/>
+                        </a:rPr>
+                        <a:t>Revenue ($M)</a:t>
+                      </a:r>
+                      <a:endParaRPr sz="900" b="0" i="0">
+                        <a:solidFill>
+                          <a:srgbClr val="16181D"/>
+                        </a:solidFill>
+                        <a:latin typeface="Arial"/>
+                      </a:endParaRPr>
+                    </a:p>
+                  </a:txBody>
+                  <a:tcPr marL="27432" marR="27432" marT="27432" marB="27432" anchor="ctr">
+                    <a:lnL w="0">
+                      <a:noFill/>
+                    </a:lnL>
+                    <a:lnR w="0">
+                      <a:noFill/>
+                    </a:lnR>
+                    <a:lnT w="9525">
+                      <a:solidFill>
+                        <a:srgbClr val="16181D"/>
+                      </a:solidFill>
+                    </a:lnT>
+                    <a:lnB w="6350">
+                      <a:solidFill>
+                        <a:srgbClr val="D3D7DF"/>
+                      </a:solidFill>
+                    </a:lnB>
+                    <a:noFill/>
+                  </a:tcPr>
+                </a:tc>
+                <a:tc>
+                  <a:txBody>
+                    <a:bodyPr wrap="square"/>
+                    <a:lstStyle/>
+                    <a:p>
+                      <a:pPr algn="r"/>
+                      <a:r>
+                        <a:rPr sz="900" b="0" i="0">
+                          <a:solidFill>
+                            <a:srgbClr val="16181D"/>
+                          </a:solidFill>
+                          <a:latin typeface="Arial"/>
+                        </a:rPr>
+                        <a:t>311.4</a:t>
+                      </a:r>
+                      <a:endParaRPr sz="900" b="0" i="0">
+                        <a:solidFill>
+                          <a:srgbClr val="16181D"/>
+                        </a:solidFill>
+                        <a:latin typeface="Arial"/>
+                      </a:endParaRPr>
+                    </a:p>
+                  </a:txBody>
+                  <a:tcPr marL="27432" marR="27432" marT="27432" marB="27432" anchor="ctr">
+                    <a:lnL w="0">
+                      <a:noFill/>
+                    </a:lnL>
+                    <a:lnR w="0">
+                      <a:noFill/>
+                    </a:lnR>
+                    <a:lnT w="9525">
+                      <a:solidFill>
+                        <a:srgbClr val="16181D"/>
+                      </a:solidFill>
+                    </a:lnT>
+                    <a:lnB w="6350">
+                      <a:solidFill>
+                        <a:srgbClr val="D3D7DF"/>
+                      </a:solidFill>
+                    </a:lnB>
+                    <a:noFill/>
+                  </a:tcPr>
+                </a:tc>
+                <a:tc>
+                  <a:txBody>
+                    <a:bodyPr wrap="square"/>
+                    <a:lstStyle/>
+                    <a:p>
+                      <a:pPr algn="r"/>
+                      <a:r>
+                        <a:rPr sz="900" b="1" i="0">
+                          <a:solidFill>
+                            <a:srgbClr val="A9650A"/>
+                          </a:solidFill>
+                          <a:latin typeface="Arial"/>
+                        </a:rPr>
+                        <a:t>372.0-376.0</a:t>
+                      </a:r>
+                      <a:endParaRPr sz="900" b="1" i="0">
+                        <a:solidFill>
+                          <a:srgbClr val="A9650A"/>
+                        </a:solidFill>
+                        <a:latin typeface="Arial"/>
+                      </a:endParaRPr>
+                    </a:p>
+                  </a:txBody>
+                  <a:tcPr marL="27432" marR="27432" marT="27432" marB="27432" anchor="ctr">
+                    <a:lnL w="0">
+                      <a:noFill/>
+                    </a:lnL>
+                    <a:lnR w="0">
+                      <a:noFill/>
+                    </a:lnR>
+                    <a:lnT w="9525">
+                      <a:solidFill>
+                        <a:srgbClr val="16181D"/>
+                      </a:solidFill>
+                    </a:lnT>
+                    <a:lnB w="6350">
+                      <a:solidFill>
+                        <a:srgbClr val="D3D7DF"/>
+                      </a:solidFill>
+                    </a:lnB>
+                    <a:noFill/>
+                  </a:tcPr>
+                </a:tc>
+                <a:tc>
+                  <a:txBody>
+                    <a:bodyPr wrap="square"/>
+                    <a:lstStyle/>
+                    <a:p>
+                      <a:pPr algn="r"/>
+                      <a:r>
+                        <a:rPr sz="900" b="0" i="0">
+                          <a:solidFill>
+                            <a:srgbClr val="16181D"/>
+                          </a:solidFill>
+                          <a:latin typeface="Arial"/>
+                        </a:rPr>
+                        <a:t>+19.5-20.7%</a:t>
+                      </a:r>
+                      <a:endParaRPr sz="900" b="0" i="0">
+                        <a:solidFill>
+                          <a:srgbClr val="16181D"/>
+                        </a:solidFill>
+                        <a:latin typeface="Arial"/>
+                      </a:endParaRPr>
+                    </a:p>
+                  </a:txBody>
+                  <a:tcPr marL="27432" marR="27432" marT="27432" marB="27432" anchor="ctr">
+                    <a:lnL w="0">
+                      <a:noFill/>
+                    </a:lnL>
+                    <a:lnR w="0">
+                      <a:noFill/>
+                    </a:lnR>
+                    <a:lnT w="9525">
+                      <a:solidFill>
+                        <a:srgbClr val="16181D"/>
+                      </a:solidFill>
+                    </a:lnT>
+                    <a:lnB w="6350">
+                      <a:solidFill>
+                        <a:srgbClr val="D3D7DF"/>
+                      </a:solidFill>
+                    </a:lnB>
+                    <a:noFill/>
+                  </a:tcPr>
+                </a:tc>
+              </a:tr>
+              <a:tr h="192278">
+                <a:tc>
+                  <a:txBody>
+                    <a:bodyPr wrap="square"/>
+                    <a:lstStyle/>
+                    <a:p>
+                      <a:pPr algn="l"/>
+                      <a:r>
+                        <a:rPr sz="900" b="0" i="0">
+                          <a:solidFill>
+                            <a:srgbClr val="16181D"/>
+                          </a:solidFill>
+                          <a:latin typeface="Arial"/>
+                        </a:rPr>
+                        <a:t>Operating income ($M)</a:t>
+                      </a:r>
+                      <a:endParaRPr sz="900" b="0" i="0">
+                        <a:solidFill>
+                          <a:srgbClr val="16181D"/>
+                        </a:solidFill>
+                        <a:latin typeface="Arial"/>
+                      </a:endParaRPr>
+                    </a:p>
+                  </a:txBody>
+                  <a:tcPr marL="27432" marR="27432" marT="27432" marB="27432" anchor="ctr">
+                    <a:lnL w="0">
+                      <a:noFill/>
+                    </a:lnL>
+                    <a:lnR w="0">
+                      <a:noFill/>
+                    </a:lnR>
+                    <a:lnT w="6350">
+                      <a:solidFill>
+                        <a:srgbClr val="D3D7DF"/>
+                      </a:solidFill>
+                    </a:lnT>
+                    <a:lnB w="6350">
+                      <a:solidFill>
+                        <a:srgbClr val="D3D7DF"/>
+                      </a:solidFill>
+                    </a:lnB>
+                    <a:noFill/>
+                  </a:tcPr>
+                </a:tc>
+                <a:tc>
+                  <a:txBody>
+                    <a:bodyPr wrap="square"/>
+                    <a:lstStyle/>
+                    <a:p>
+                      <a:pPr algn="r"/>
+                      <a:r>
+                        <a:rPr sz="900" b="0" i="0">
+                          <a:solidFill>
+                            <a:srgbClr val="16181D"/>
+                          </a:solidFill>
+                          <a:latin typeface="Arial"/>
+                        </a:rPr>
+                        <a:t>39.9</a:t>
+                      </a:r>
+                      <a:endParaRPr sz="900" b="0" i="0">
+                        <a:solidFill>
+                          <a:srgbClr val="16181D"/>
+                        </a:solidFill>
+                        <a:latin typeface="Arial"/>
+                      </a:endParaRPr>
+                    </a:p>
+                  </a:txBody>
+                  <a:tcPr marL="27432" marR="27432" marT="27432" marB="27432" anchor="ctr">
+                    <a:lnL w="0">
+                      <a:noFill/>
+                    </a:lnL>
+                    <a:lnR w="0">
+                      <a:noFill/>
+                    </a:lnR>
+                    <a:lnT w="6350">
+                      <a:solidFill>
+                        <a:srgbClr val="D3D7DF"/>
+                      </a:solidFill>
+                    </a:lnT>
+                    <a:lnB w="6350">
+                      <a:solidFill>
+                        <a:srgbClr val="D3D7DF"/>
+                      </a:solidFill>
+                    </a:lnB>
+                    <a:noFill/>
+                  </a:tcPr>
+                </a:tc>
+                <a:tc>
+                  <a:txBody>
+                    <a:bodyPr wrap="square"/>
+                    <a:lstStyle/>
+                    <a:p>
+                      <a:pPr algn="r"/>
+                      <a:r>
+                        <a:rPr sz="900" b="1" i="0">
+                          <a:solidFill>
+                            <a:srgbClr val="A9650A"/>
+                          </a:solidFill>
+                          <a:latin typeface="Arial"/>
+                        </a:rPr>
+                        <a:t>61.0-63.0</a:t>
+                      </a:r>
+                      <a:endParaRPr sz="900" b="1" i="0">
+                        <a:solidFill>
+                          <a:srgbClr val="A9650A"/>
+                        </a:solidFill>
+                        <a:latin typeface="Arial"/>
+                      </a:endParaRPr>
+                    </a:p>
+                  </a:txBody>
+                  <a:tcPr marL="27432" marR="27432" marT="27432" marB="27432" anchor="ctr">
+                    <a:lnL w="0">
+                      <a:noFill/>
+                    </a:lnL>
+                    <a:lnR w="0">
+                      <a:noFill/>
+                    </a:lnR>
+                    <a:lnT w="6350">
+                      <a:solidFill>
+                        <a:srgbClr val="D3D7DF"/>
+                      </a:solidFill>
+                    </a:lnT>
+                    <a:lnB w="6350">
+                      <a:solidFill>
+                        <a:srgbClr val="D3D7DF"/>
+                      </a:solidFill>
+                    </a:lnB>
+                    <a:noFill/>
+                  </a:tcPr>
+                </a:tc>
+                <a:tc>
+                  <a:txBody>
+                    <a:bodyPr wrap="square"/>
+                    <a:lstStyle/>
+                    <a:p>
+                      <a:pPr algn="r"/>
+                      <a:r>
+                        <a:rPr sz="900" b="0" i="0">
+                          <a:solidFill>
+                            <a:srgbClr val="16181D"/>
+                          </a:solidFill>
+                          <a:latin typeface="Arial"/>
+                        </a:rPr>
+                        <a:t>+52.9-57.9%</a:t>
+                      </a:r>
+                      <a:endParaRPr sz="900" b="0" i="0">
+                        <a:solidFill>
+                          <a:srgbClr val="16181D"/>
+                        </a:solidFill>
+                        <a:latin typeface="Arial"/>
+                      </a:endParaRPr>
+                    </a:p>
+                  </a:txBody>
+                  <a:tcPr marL="27432" marR="27432" marT="27432" marB="27432" anchor="ctr">
+                    <a:lnL w="0">
+                      <a:noFill/>
+                    </a:lnL>
+                    <a:lnR w="0">
+                      <a:noFill/>
+                    </a:lnR>
+                    <a:lnT w="6350">
+                      <a:solidFill>
+                        <a:srgbClr val="D3D7DF"/>
+                      </a:solidFill>
+                    </a:lnT>
+                    <a:lnB w="6350">
+                      <a:solidFill>
+                        <a:srgbClr val="D3D7DF"/>
+                      </a:solidFill>
+                    </a:lnB>
+                    <a:noFill/>
+                  </a:tcPr>
+                </a:tc>
+              </a:tr>
+              <a:tr h="192278">
+                <a:tc>
+                  <a:txBody>
+                    <a:bodyPr wrap="square"/>
+                    <a:lstStyle/>
+                    <a:p>
+                      <a:pPr algn="l"/>
+                      <a:r>
+                        <a:rPr sz="900" b="0" i="0">
+                          <a:solidFill>
+                            <a:srgbClr val="16181D"/>
+                          </a:solidFill>
+                          <a:latin typeface="Arial"/>
+                        </a:rPr>
+                        <a:t>Operating margin (%)</a:t>
+                      </a:r>
+                      <a:endParaRPr sz="900" b="0" i="0">
+                        <a:solidFill>
+                          <a:srgbClr val="16181D"/>
+                        </a:solidFill>
+                        <a:latin typeface="Arial"/>
+                      </a:endParaRPr>
+                    </a:p>
+                  </a:txBody>
+                  <a:tcPr marL="27432" marR="27432" marT="27432" marB="27432" anchor="ctr">
+                    <a:lnL w="0">
+                      <a:noFill/>
+                    </a:lnL>
+                    <a:lnR w="0">
+                      <a:noFill/>
+                    </a:lnR>
+                    <a:lnT w="6350">
+                      <a:solidFill>
+                        <a:srgbClr val="D3D7DF"/>
+                      </a:solidFill>
+                    </a:lnT>
+                    <a:lnB w="9525">
+                      <a:solidFill>
+                        <a:srgbClr val="16181D"/>
+                      </a:solidFill>
+                    </a:lnB>
+                    <a:noFill/>
+                  </a:tcPr>
+                </a:tc>
+                <a:tc>
+                  <a:txBody>
+                    <a:bodyPr wrap="square"/>
+                    <a:lstStyle/>
+                    <a:p>
+                      <a:pPr algn="r"/>
+                      <a:r>
+                        <a:rPr sz="900" b="0" i="0">
+                          <a:solidFill>
+                            <a:srgbClr val="16181D"/>
+                          </a:solidFill>
+                          <a:latin typeface="Arial"/>
+                        </a:rPr>
+                        <a:t>12.8</a:t>
+                      </a:r>
+                      <a:endParaRPr sz="900" b="0" i="0">
+                        <a:solidFill>
+                          <a:srgbClr val="16181D"/>
+                        </a:solidFill>
+                        <a:latin typeface="Arial"/>
+                      </a:endParaRPr>
+                    </a:p>
+                  </a:txBody>
+                  <a:tcPr marL="27432" marR="27432" marT="27432" marB="27432" anchor="ctr">
+                    <a:lnL w="0">
+                      <a:noFill/>
+                    </a:lnL>
+                    <a:lnR w="0">
+                      <a:noFill/>
+                    </a:lnR>
+                    <a:lnT w="6350">
+                      <a:solidFill>
+                        <a:srgbClr val="D3D7DF"/>
+                      </a:solidFill>
+                    </a:lnT>
+                    <a:lnB w="9525">
+                      <a:solidFill>
+                        <a:srgbClr val="16181D"/>
+                      </a:solidFill>
+                    </a:lnB>
+                    <a:noFill/>
+                  </a:tcPr>
+                </a:tc>
+                <a:tc>
+                  <a:txBody>
+                    <a:bodyPr wrap="square"/>
+                    <a:lstStyle/>
+                    <a:p>
+                      <a:pPr algn="r"/>
+                      <a:r>
+                        <a:rPr sz="900" b="1" i="0">
+                          <a:solidFill>
+                            <a:srgbClr val="A9650A"/>
+                          </a:solidFill>
+                          <a:latin typeface="Arial"/>
+                        </a:rPr>
+                        <a:t>16.4-16.8</a:t>
+                      </a:r>
+                      <a:endParaRPr sz="900" b="1" i="0">
+                        <a:solidFill>
+                          <a:srgbClr val="A9650A"/>
+                        </a:solidFill>
+                        <a:latin typeface="Arial"/>
+                      </a:endParaRPr>
+                    </a:p>
+                  </a:txBody>
+                  <a:tcPr marL="27432" marR="27432" marT="27432" marB="27432" anchor="ctr">
+                    <a:lnL w="0">
+                      <a:noFill/>
+                    </a:lnL>
+                    <a:lnR w="0">
+                      <a:noFill/>
+                    </a:lnR>
+                    <a:lnT w="6350">
+                      <a:solidFill>
+                        <a:srgbClr val="D3D7DF"/>
+                      </a:solidFill>
+                    </a:lnT>
+                    <a:lnB w="9525">
+                      <a:solidFill>
+                        <a:srgbClr val="16181D"/>
+                      </a:solidFill>
+                    </a:lnB>
+                    <a:noFill/>
+                  </a:tcPr>
+                </a:tc>
+                <a:tc>
+                  <a:txBody>
+                    <a:bodyPr wrap="square"/>
+                    <a:lstStyle/>
+                    <a:p>
+                      <a:pPr algn="r"/>
+                      <a:r>
+                        <a:rPr sz="900" b="0" i="0">
+                          <a:solidFill>
+                            <a:srgbClr val="16181D"/>
+                          </a:solidFill>
+                          <a:latin typeface="Arial"/>
+                        </a:rPr>
+                        <a:t>+3.6-4.0 pts</a:t>
+                      </a:r>
+                      <a:endParaRPr sz="900" b="0" i="0">
+                        <a:solidFill>
+                          <a:srgbClr val="16181D"/>
+                        </a:solidFill>
+                        <a:latin typeface="Arial"/>
+                      </a:endParaRPr>
+                    </a:p>
+                  </a:txBody>
+                  <a:tcPr marL="27432" marR="27432" marT="27432" marB="27432" anchor="ctr">
+                    <a:lnL w="0">
+                      <a:noFill/>
+                    </a:lnL>
+                    <a:lnR w="0">
+                      <a:noFill/>
+                    </a:lnR>
+                    <a:lnT w="6350">
+                      <a:solidFill>
+                        <a:srgbClr val="D3D7DF"/>
+                      </a:solidFill>
+                    </a:lnT>
+                    <a:lnB w="9525">
+                      <a:solidFill>
+                        <a:srgbClr val="16181D"/>
+                      </a:solidFill>
+                    </a:lnB>
+                    <a:noFill/>
+                  </a:tcPr>
+                </a:tc>
+              </a:tr>
+            </a:tbl>
+          </a:graphicData>
+        </a:graphic>
+      </p:graphicFrame>
+      <p:sp>
+        <p:nvSpPr>
+          <p:cNvPr id="22" name="n_fn"/>
+          <p:cNvSpPr/>
+          <p:nvPr/>
+        </p:nvSpPr>
+        <p:spPr>
+          <a:xfrm>
+            <a:off x="7709210" y="5792216"/>
             <a:ext cx="4025590" cy="228600"/>
           </a:xfrm>
           <a:prstGeom prst="rect">
@@ -27061,7 +27836,7 @@
       </p:sp>
       <p:sp>
         <p:nvSpPr>
-          <p:cNvPr id="20" name="source"/>
+          <p:cNvPr id="23" name="source"/>
           <p:cNvSpPr/>
           <p:nvPr/>
         </p:nvSpPr>
@@ -27107,7 +27882,7 @@
       </p:sp>
       <p:sp>
         <p:nvSpPr>
-          <p:cNvPr id="21" name="mid-0-text"/>
+          <p:cNvPr id="24" name="mid-0-text"/>
           <p:cNvSpPr/>
           <p:nvPr/>
         </p:nvSpPr>
@@ -27153,7 +27928,7 @@
       </p:sp>
       <p:sp>
         <p:nvSpPr>
-          <p:cNvPr id="22" name="mid-1-text"/>
+          <p:cNvPr id="25" name="mid-1-text"/>
           <p:cNvSpPr/>
           <p:nvPr/>
         </p:nvSpPr>
@@ -27199,7 +27974,7 @@
       </p:sp>
       <p:sp>
         <p:nvSpPr>
-          <p:cNvPr id="23" name="mid-2-text"/>
+          <p:cNvPr id="26" name="mid-2-text"/>
           <p:cNvSpPr/>
           <p:nvPr/>
         </p:nvSpPr>
@@ -27245,7 +28020,7 @@
       </p:sp>
       <p:sp>
         <p:nvSpPr>
-          <p:cNvPr id="24" name="mid-3-text"/>
+          <p:cNvPr id="27" name="mid-3-text"/>
           <p:cNvSpPr/>
           <p:nvPr/>
         </p:nvSpPr>
@@ -27291,7 +28066,7 @@
       </p:sp>
       <p:sp>
         <p:nvSpPr>
-          <p:cNvPr id="25" name="mid-label"/>
+          <p:cNvPr id="28" name="mid-label"/>
           <p:cNvSpPr/>
           <p:nvPr/>
         </p:nvSpPr>
